--- a/presentation/jax-ghost-presentation.pptx
+++ b/presentation/jax-ghost-presentation.pptx
@@ -12,6 +12,7 @@
     <p:sldId id="260" r:id="rId12"/>
     <p:sldId id="261" r:id="rId13"/>
     <p:sldId id="262" r:id="rId14"/>
+    <p:sldId id="263" r:id="rId15"/>
   </p:sldIdLst>
   <p:sldSz cx="12192000" cy="6858000" type="screen4x3"/>
   <p:notesSz cx="6858000" cy="9144000"/>
@@ -1512,7 +1513,7 @@
           <a:p/>
           <a:p>
             <a:r>
-              <a:t>Timing: 2:25. Total planned speaking time: 10:00.</a:t>
+              <a:t>Timing: 2:25. Elapsed speaking time through this slide: 10:00.</a:t>
             </a:r>
           </a:p>
           <a:p/>
@@ -1689,6 +1690,405 @@
           <a:p>
             <a:r>
               <a:t>Reference: https://docs.jax.dev/en/latest/notebooks/shard_map.html</a:t>
+            </a:r>
+          </a:p>
+        </p:txBody>
+      </p:sp>
+      <p:sp>
+        <p:nvSpPr>
+          <p:cNvPr id="4" name="Slide Number Placeholder 3"/>
+          <p:cNvSpPr>
+            <a:spLocks noGrp="1"/>
+          </p:cNvSpPr>
+          <p:nvPr>
+            <p:ph type="sldNum" idx="5" sz="quarter"/>
+          </p:nvPr>
+        </p:nvSpPr>
+        <p:spPr/>
+      </p:sp>
+    </p:spTree>
+  </p:cSld>
+  <p:clrMapOvr>
+    <a:masterClrMapping/>
+  </p:clrMapOvr>
+</p:notes>
+</file>
+
+<file path=ppt/notesSlides/notesSlide8.xml><?xml version="1.0" encoding="utf-8"?>
+<p:notes xmlns:a="http://schemas.openxmlformats.org/drawingml/2006/main" xmlns:p="http://schemas.openxmlformats.org/presentationml/2006/main" xmlns:r="http://schemas.openxmlformats.org/officeDocument/2006/relationships">
+  <p:cSld>
+    <p:spTree>
+      <p:nvGrpSpPr>
+        <p:cNvPr id="1" name=""/>
+        <p:cNvGrpSpPr/>
+        <p:nvPr/>
+      </p:nvGrpSpPr>
+      <p:grpSpPr>
+        <a:xfrm>
+          <a:off x="0" y="0"/>
+          <a:ext cx="0" cy="0"/>
+          <a:chOff x="0" y="0"/>
+          <a:chExt cx="0" cy="0"/>
+        </a:xfrm>
+      </p:grpSpPr>
+      <p:sp>
+        <p:nvSpPr>
+          <p:cNvPr id="2" name="Slide Image Placeholder 1"/>
+          <p:cNvSpPr>
+            <a:spLocks noGrp="1"/>
+          </p:cNvSpPr>
+          <p:nvPr>
+            <p:ph type="sldImg" idx="2"/>
+          </p:nvPr>
+        </p:nvSpPr>
+        <p:spPr/>
+      </p:sp>
+      <p:sp>
+        <p:nvSpPr>
+          <p:cNvPr id="3" name="Notes Placeholder 2"/>
+          <p:cNvSpPr>
+            <a:spLocks noGrp="1"/>
+          </p:cNvSpPr>
+          <p:nvPr>
+            <p:ph type="body" idx="3" sz="quarter"/>
+          </p:nvPr>
+        </p:nvSpPr>
+        <p:spPr/>
+        <p:txBody>
+          <a:bodyPr/>
+          <a:lstStyle/>
+          <a:p>
+            <a:r>
+              <a:t>Newer JAX APIs: optimization opportunities</a:t>
+            </a:r>
+          </a:p>
+          <a:p/>
+          <a:p>
+            <a:r>
+              <a:t>Timing: 1:30. Total planned speaking time with the extra slide: 11:30.</a:t>
+            </a:r>
+          </a:p>
+          <a:p/>
+          <a:p>
+            <a:r>
+              <a:t>This is a roadmap, not a report of optimizations already implemented. These</a:t>
+            </a:r>
+          </a:p>
+          <a:p>
+            <a:r>
+              <a:t>are capabilities in current JAX documentation; they were not all introduced</a:t>
+            </a:r>
+          </a:p>
+          <a:p>
+            <a:r>
+              <a:t>in the same release. The supplied audit reports small CPU probes on JAX 0.10.2,</a:t>
+            </a:r>
+          </a:p>
+          <a:p>
+            <a:r>
+              <a:t>not complete GPU or transformation validation. We did not rerun those probes</a:t>
+            </a:r>
+          </a:p>
+          <a:p>
+            <a:r>
+              <a:t>or change the numerical backend while preparing this slide. Check the actual</a:t>
+            </a:r>
+          </a:p>
+          <a:p>
+            <a:r>
+              <a:t>JAX/jaxlib and GPU stack before each experiment.</a:t>
+            </a:r>
+          </a:p>
+          <a:p/>
+          <a:p>
+            <a:r>
+              <a:t>LESS PADDING. Our existing all-to-all allocates one maximum-width numerical</a:t>
+            </a:r>
+          </a:p>
+          <a:p>
+            <a:r>
+              <a:t>packet per peer. The mini-diagram illustrates the same three useful values</a:t>
+            </a:r>
+          </a:p>
+          <a:p>
+            <a:r>
+              <a:t>inside eight packet slots versus a packed representation; it is not a measured</a:t>
+            </a:r>
+          </a:p>
+          <a:p>
+            <a:r>
+              <a:t>size reduction for the earlier two-rank mesh. ragged_all_to_all exchanges slices</a:t>
+            </a:r>
+          </a:p>
+          <a:p>
+            <a:r>
+              <a:t>using counts and offsets, matching the DOLFINx-derived plan. Zero counts can</a:t>
+            </a:r>
+          </a:p>
+          <a:p>
+            <a:r>
+              <a:t>represent non-neighbors. With our uniform shards, capacities remain fixed:</a:t>
+            </a:r>
+          </a:p>
+          <a:p>
+            <a:r>
+              <a:t>use the maximum total outgoing count rather than rank count times the largest</a:t>
+            </a:r>
+          </a:p>
+          <a:p>
+            <a:r>
+              <a:t>peer message. Metadata and vector/CSR padding remain. output_offsets specifies</a:t>
+            </a:r>
+          </a:p>
+          <a:p>
+            <a:r>
+              <a:t>where each outgoing slice lands on its receiver, so receiver offsets must be</a:t>
+            </a:r>
+          </a:p>
+          <a:p>
+            <a:r>
+              <a:t>exchanged during setup before unpacking into original ghost order. Validate</a:t>
+            </a:r>
+          </a:p>
+          <a:p>
+            <a:r>
+              <a:t>GPU lowering and compare latency, not just payload size; the supplied audit's</a:t>
+            </a:r>
+          </a:p>
+          <a:p>
+            <a:r>
+              <a:t>CPU probe could not compile this primitive.</a:t>
+            </a:r>
+          </a:p>
+          <a:p/>
+          <a:p>
+            <a:r>
+              <a:t>REUSE STORAGE. Donation is the smallest API experiment: permit reuse of the</a:t>
+            </a:r>
+          </a:p>
+          <a:p>
+            <a:r>
+              <a:t>forward input x or matvec accumulator y when the caller relinquishes it. The</a:t>
+            </a:r>
+          </a:p>
+          <a:p>
+            <a:r>
+              <a:t>donated input must not be reused afterward; memory reuse is an opportunity</a:t>
+            </a:r>
+          </a:p>
+          <a:p>
+            <a:r>
+              <a:t>for the compiler, not a promised speedup. Keep the existing preserving API as</a:t>
+            </a:r>
+          </a:p>
+          <a:p>
+            <a:r>
+              <a:t>the baseline. Mutable Refs offer a separate API with indexed writes to ghost</a:t>
+            </a:r>
+          </a:p>
+          <a:p>
+            <a:r>
+              <a:t>or owned-output slots. Pass Refs explicitly into shard_map, rather than closing</a:t>
+            </a:r>
+          </a:p>
+          <a:p>
+            <a:r>
+              <a:t>over them, and perform the indexed updates directly. Wrapping the existing</a:t>
+            </a:r>
+          </a:p>
+          <a:p>
+            <a:r>
+              <a:t>full-vector functional update in a Ref will not automatically remove its</a:t>
+            </a:r>
+          </a:p>
+          <a:p>
+            <a:r>
+              <a:t>temporaries. Current Ref documentation notes slower Python dispatch to impure</a:t>
+            </a:r>
+          </a:p>
+          <a:p>
+            <a:r>
+              <a:t>JIT functions taking Ref inputs; benchmark against donated functional calls.</a:t>
+            </a:r>
+          </a:p>
+          <a:p/>
+          <a:p>
+            <a:r>
+              <a:t>OVERLAP. Split the local operator into owned-column and ghost-column parts.</a:t>
+            </a:r>
+          </a:p>
+          <a:p>
+            <a:r>
+              <a:t>The timeline is a target: initiate the exchange, compute the owned-column part,</a:t>
+            </a:r>
+          </a:p>
+          <a:p>
+            <a:r>
+              <a:t>then use received values for the ghost-column part. psend/precv expose separate</a:t>
+            </a:r>
+          </a:p>
+          <a:p>
+            <a:r>
+              <a:t>send/receive operations; their GPU semantics map to NCCL communication. They</a:t>
+            </a:r>
+          </a:p>
+          <a:p>
+            <a:r>
+              <a:t>are not interchangeable with MPI nonblocking begin/end. Matching permutations,</a:t>
+            </a:r>
+          </a:p>
+          <a:p>
+            <a:r>
+              <a:t>fixed operand shapes, ordering and progress need testing. The supplied audit</a:t>
+            </a:r>
+          </a:p>
+          <a:p>
+            <a:r>
+              <a:t>found no differentiation rule for psend; do not infer AD support from JIT</a:t>
+            </a:r>
+          </a:p>
+          <a:p>
+            <a:r>
+              <a:t>support. Also compare ordinary collectives with independent computation and</a:t>
+            </a:r>
+          </a:p>
+          <a:p>
+            <a:r>
+              <a:t>XLA latency-hiding / profile-guided scheduling. A GPU trace must show overlap.</a:t>
+            </a:r>
+          </a:p>
+          <a:p/>
+          <a:p>
+            <a:r>
+              <a:t>FOLLOW-UP. Profile local CSR separately: the current JAX sparse module is</a:t>
+            </a:r>
+          </a:p>
+          <a:p>
+            <a:r>
+              <a:t>experimental and does not promise performance-critical suitability. Consider</a:t>
+            </a:r>
+          </a:p>
+          <a:p>
+            <a:r>
+              <a:t>BCSR for batched vectors or gather-plus-segment-sum with cached row indices,</a:t>
+            </a:r>
+          </a:p>
+          <a:p>
+            <a:r>
+              <a:t>keeping existing CSR as the baseline. Pallas/Mosaic GPU offers later kernel-</a:t>
+            </a:r>
+          </a:p>
+          <a:p>
+            <a:r>
+              <a:t>level communication and computation integration. Its dense collective matmul</a:t>
+            </a:r>
+          </a:p>
+          <a:p>
+            <a:r>
+              <a:t>example does not establish performance or hardware suitability for our</a:t>
+            </a:r>
+          </a:p>
+          <a:p>
+            <a:r>
+              <a:t>irregular float64 CSR workload, including the GPUs used in this project.</a:t>
+            </a:r>
+          </a:p>
+          <a:p/>
+          <a:p>
+            <a:r>
+              <a:t>Suggested order: global no-communication fast path and donation; persistent</a:t>
+            </a:r>
+          </a:p>
+          <a:p>
+            <a:r>
+              <a:t>Refs; GPU ragged exchange; profile local kernels; test overlap; specialized</a:t>
+            </a:r>
+          </a:p>
+          <a:p>
+            <a:r>
+              <a:t>kernels only if warranted. The no-communication decision must be global:</a:t>
+            </a:r>
+          </a:p>
+          <a:p>
+            <a:r>
+              <a:t>a rank with no local ghosts may still need to send to another rank. Retain the</a:t>
+            </a:r>
+          </a:p>
+          <a:p>
+            <a:r>
+              <a:t>DOLFINx ownership and ghost ordering, and check correctness, memory and total</a:t>
+            </a:r>
+          </a:p>
+          <a:p>
+            <a:r>
+              <a:t>matvec time for each candidate. Backend execution, JIT, batching and AD are</a:t>
+            </a:r>
+          </a:p>
+          <a:p>
+            <a:r>
+              <a:t>separate properties to verify.</a:t>
+            </a:r>
+          </a:p>
+          <a:p/>
+          <a:p>
+            <a:r>
+              <a:t>References (official JAX documentation, checked for this slide):</a:t>
+            </a:r>
+          </a:p>
+          <a:p>
+            <a:r>
+              <a:t>https://docs.jax.dev/en/latest/_autosummary/jax.lax.ragged_all_to_all.html</a:t>
+            </a:r>
+          </a:p>
+          <a:p>
+            <a:r>
+              <a:t>https://docs.jax.dev/en/latest/buffer_donation.html</a:t>
+            </a:r>
+          </a:p>
+          <a:p>
+            <a:r>
+              <a:t>https://docs.jax.dev/en/latest/array_refs.html</a:t>
+            </a:r>
+          </a:p>
+          <a:p>
+            <a:r>
+              <a:t>https://docs.jax.dev/en/latest/_autosummary/jax.lax.psend.html</a:t>
+            </a:r>
+          </a:p>
+          <a:p>
+            <a:r>
+              <a:t>https://docs.jax.dev/en/latest/_autosummary/jax.lax.precv.html</a:t>
+            </a:r>
+          </a:p>
+          <a:p>
+            <a:r>
+              <a:t>https://docs.jax.dev/en/latest/gpu_performance_tips.html</a:t>
+            </a:r>
+          </a:p>
+          <a:p>
+            <a:r>
+              <a:t>https://docs.jax.dev/en/latest/jax.experimental.sparse.html</a:t>
+            </a:r>
+          </a:p>
+          <a:p>
+            <a:r>
+              <a:t>https://docs.jax.dev/en/latest/pallas/gpu/collective_matmul.html</a:t>
+            </a:r>
+          </a:p>
+          <a:p/>
+          <a:p>
+            <a:r>
+              <a:t>Repository baseline: ../src/jaxghost/sharded.py;</a:t>
+            </a:r>
+          </a:p>
+          <a:p>
+            <a:r>
+              <a:t>../src/jaxghost/sharded_matrix.py. The user-supplied API audit informed the</a:t>
+            </a:r>
+          </a:p>
+          <a:p>
+            <a:r>
+              <a:t>priorities; its probe outcomes are attributed above rather than revalidated.</a:t>
             </a:r>
           </a:p>
         </p:txBody>
@@ -4982,8 +5382,8 @@
         </p:nvSpPr>
         <p:spPr>
           <a:xfrm>
-            <a:off x="9906000" y="6610350"/>
-            <a:ext cx="133350" cy="38100"/>
+            <a:off x="9810750" y="6610350"/>
+            <a:ext cx="114300" cy="38100"/>
           </a:xfrm>
           <a:prstGeom prst="rect">
             <a:avLst/>
@@ -5025,8 +5425,8 @@
         </p:nvSpPr>
         <p:spPr>
           <a:xfrm>
-            <a:off x="10106025" y="6610350"/>
-            <a:ext cx="133350" cy="38100"/>
+            <a:off x="9991725" y="6610350"/>
+            <a:ext cx="114300" cy="38100"/>
           </a:xfrm>
           <a:prstGeom prst="rect">
             <a:avLst/>
@@ -5068,8 +5468,8 @@
         </p:nvSpPr>
         <p:spPr>
           <a:xfrm>
-            <a:off x="10306050" y="6610350"/>
-            <a:ext cx="133350" cy="38100"/>
+            <a:off x="10172700" y="6610350"/>
+            <a:ext cx="114300" cy="38100"/>
           </a:xfrm>
           <a:prstGeom prst="rect">
             <a:avLst/>
@@ -5111,8 +5511,8 @@
         </p:nvSpPr>
         <p:spPr>
           <a:xfrm>
-            <a:off x="10506075" y="6610350"/>
-            <a:ext cx="133350" cy="38100"/>
+            <a:off x="10353675" y="6610350"/>
+            <a:ext cx="114300" cy="38100"/>
           </a:xfrm>
           <a:prstGeom prst="rect">
             <a:avLst/>
@@ -5154,8 +5554,8 @@
         </p:nvSpPr>
         <p:spPr>
           <a:xfrm>
-            <a:off x="10706100" y="6610350"/>
-            <a:ext cx="133350" cy="38100"/>
+            <a:off x="10534650" y="6610350"/>
+            <a:ext cx="114300" cy="38100"/>
           </a:xfrm>
           <a:prstGeom prst="rect">
             <a:avLst/>
@@ -5197,8 +5597,8 @@
         </p:nvSpPr>
         <p:spPr>
           <a:xfrm>
-            <a:off x="10906125" y="6610350"/>
-            <a:ext cx="133350" cy="38100"/>
+            <a:off x="10715625" y="6610350"/>
+            <a:ext cx="114300" cy="38100"/>
           </a:xfrm>
           <a:prstGeom prst="rect">
             <a:avLst/>
@@ -5240,8 +5640,8 @@
         </p:nvSpPr>
         <p:spPr>
           <a:xfrm>
-            <a:off x="11106150" y="6610350"/>
-            <a:ext cx="133350" cy="38100"/>
+            <a:off x="10896600" y="6610350"/>
+            <a:ext cx="114300" cy="38100"/>
           </a:xfrm>
           <a:prstGeom prst="rect">
             <a:avLst/>
@@ -5277,7 +5677,50 @@
       </p:sp>
       <p:sp>
         <p:nvSpPr>
-          <p:cNvPr id="15" name="00-014-text"/>
+          <p:cNvPr id="15" name="00-014-rect"/>
+          <p:cNvSpPr/>
+          <p:nvPr/>
+        </p:nvSpPr>
+        <p:spPr>
+          <a:xfrm>
+            <a:off x="11077575" y="6610350"/>
+            <a:ext cx="114300" cy="38100"/>
+          </a:xfrm>
+          <a:prstGeom prst="rect">
+            <a:avLst/>
+          </a:prstGeom>
+          <a:solidFill>
+            <a:srgbClr val="D9E1EA"/>
+          </a:solidFill>
+          <a:ln>
+            <a:noFill/>
+          </a:ln>
+        </p:spPr>
+        <p:style>
+          <a:lnRef idx="1">
+            <a:schemeClr val="accent1"/>
+          </a:lnRef>
+          <a:fillRef idx="3">
+            <a:schemeClr val="accent1"/>
+          </a:fillRef>
+          <a:effectRef idx="2">
+            <a:schemeClr val="accent1"/>
+          </a:effectRef>
+          <a:fontRef idx="minor">
+            <a:schemeClr val="lt1"/>
+          </a:fontRef>
+        </p:style>
+        <p:txBody>
+          <a:bodyPr rtlCol="0" anchor="ctr"/>
+          <a:lstStyle/>
+          <a:p>
+            <a:pPr algn="ctr"/>
+          </a:p>
+        </p:txBody>
+      </p:sp>
+      <p:sp>
+        <p:nvSpPr>
+          <p:cNvPr id="16" name="00-015-text"/>
           <p:cNvSpPr txBox="1"/>
           <p:nvPr/>
         </p:nvSpPr>
@@ -5322,7 +5765,7 @@
       </p:sp>
       <p:sp>
         <p:nvSpPr>
-          <p:cNvPr id="16" name="00-015-rect"/>
+          <p:cNvPr id="17" name="00-016-rect"/>
           <p:cNvSpPr/>
           <p:nvPr/>
         </p:nvSpPr>
@@ -5367,7 +5810,7 @@
       </p:sp>
       <p:sp>
         <p:nvSpPr>
-          <p:cNvPr id="17" name="00-016-text"/>
+          <p:cNvPr id="18" name="00-017-text"/>
           <p:cNvSpPr txBox="1"/>
           <p:nvPr/>
         </p:nvSpPr>
@@ -5412,7 +5855,7 @@
       </p:sp>
       <p:sp>
         <p:nvSpPr>
-          <p:cNvPr id="18" name="00-017-rect"/>
+          <p:cNvPr id="19" name="00-018-rect"/>
           <p:cNvSpPr/>
           <p:nvPr/>
         </p:nvSpPr>
@@ -5457,7 +5900,7 @@
       </p:sp>
       <p:sp>
         <p:nvSpPr>
-          <p:cNvPr id="19" name="00-018-text"/>
+          <p:cNvPr id="20" name="00-019-text"/>
           <p:cNvSpPr txBox="1"/>
           <p:nvPr/>
         </p:nvSpPr>
@@ -5502,7 +5945,7 @@
       </p:sp>
       <p:sp>
         <p:nvSpPr>
-          <p:cNvPr id="20" name="00-019-rect"/>
+          <p:cNvPr id="21" name="00-020-rect"/>
           <p:cNvSpPr/>
           <p:nvPr/>
         </p:nvSpPr>
@@ -5547,7 +5990,7 @@
       </p:sp>
       <p:sp>
         <p:nvSpPr>
-          <p:cNvPr id="21" name="00-020-text"/>
+          <p:cNvPr id="22" name="00-021-text"/>
           <p:cNvSpPr txBox="1"/>
           <p:nvPr/>
         </p:nvSpPr>
@@ -5592,7 +6035,7 @@
       </p:sp>
       <p:sp>
         <p:nvSpPr>
-          <p:cNvPr id="22" name="00-021-poly"/>
+          <p:cNvPr id="23" name="00-022-poly"/>
           <p:cNvSpPr/>
           <p:nvPr/>
         </p:nvSpPr>
@@ -5655,7 +6098,7 @@
       </p:sp>
       <p:sp>
         <p:nvSpPr>
-          <p:cNvPr id="23" name="00-022-poly"/>
+          <p:cNvPr id="24" name="00-023-poly"/>
           <p:cNvSpPr/>
           <p:nvPr/>
         </p:nvSpPr>
@@ -5718,7 +6161,7 @@
       </p:sp>
       <p:sp>
         <p:nvSpPr>
-          <p:cNvPr id="24" name="00-023-poly"/>
+          <p:cNvPr id="25" name="00-024-poly"/>
           <p:cNvSpPr/>
           <p:nvPr/>
         </p:nvSpPr>
@@ -5781,7 +6224,7 @@
       </p:sp>
       <p:sp>
         <p:nvSpPr>
-          <p:cNvPr id="25" name="00-024-poly"/>
+          <p:cNvPr id="26" name="00-025-poly"/>
           <p:cNvSpPr/>
           <p:nvPr/>
         </p:nvSpPr>
@@ -5844,7 +6287,7 @@
       </p:sp>
       <p:sp>
         <p:nvSpPr>
-          <p:cNvPr id="26" name="00-025-poly"/>
+          <p:cNvPr id="27" name="00-026-poly"/>
           <p:cNvSpPr/>
           <p:nvPr/>
         </p:nvSpPr>
@@ -5907,7 +6350,7 @@
       </p:sp>
       <p:sp>
         <p:nvSpPr>
-          <p:cNvPr id="27" name="00-026-poly"/>
+          <p:cNvPr id="28" name="00-027-poly"/>
           <p:cNvSpPr/>
           <p:nvPr/>
         </p:nvSpPr>
@@ -5970,7 +6413,7 @@
       </p:sp>
       <p:sp>
         <p:nvSpPr>
-          <p:cNvPr id="28" name="00-027-poly"/>
+          <p:cNvPr id="29" name="00-028-poly"/>
           <p:cNvSpPr/>
           <p:nvPr/>
         </p:nvSpPr>
@@ -6033,7 +6476,7 @@
       </p:sp>
       <p:sp>
         <p:nvSpPr>
-          <p:cNvPr id="29" name="00-028-poly"/>
+          <p:cNvPr id="30" name="00-029-poly"/>
           <p:cNvSpPr/>
           <p:nvPr/>
         </p:nvSpPr>
@@ -6096,7 +6539,7 @@
       </p:sp>
       <p:sp>
         <p:nvSpPr>
-          <p:cNvPr id="30" name="00-029-poly"/>
+          <p:cNvPr id="31" name="00-030-poly"/>
           <p:cNvSpPr/>
           <p:nvPr/>
         </p:nvSpPr>
@@ -6159,7 +6602,7 @@
       </p:sp>
       <p:sp>
         <p:nvSpPr>
-          <p:cNvPr id="31" name="00-030-poly"/>
+          <p:cNvPr id="32" name="00-031-poly"/>
           <p:cNvSpPr/>
           <p:nvPr/>
         </p:nvSpPr>
@@ -6222,7 +6665,7 @@
       </p:sp>
       <p:sp>
         <p:nvSpPr>
-          <p:cNvPr id="32" name="00-031-poly"/>
+          <p:cNvPr id="33" name="00-032-poly"/>
           <p:cNvSpPr/>
           <p:nvPr/>
         </p:nvSpPr>
@@ -6285,7 +6728,7 @@
       </p:sp>
       <p:sp>
         <p:nvSpPr>
-          <p:cNvPr id="33" name="00-032-poly"/>
+          <p:cNvPr id="34" name="00-033-poly"/>
           <p:cNvSpPr/>
           <p:nvPr/>
         </p:nvSpPr>
@@ -6348,7 +6791,7 @@
       </p:sp>
       <p:sp>
         <p:nvSpPr>
-          <p:cNvPr id="34" name="00-033-poly"/>
+          <p:cNvPr id="35" name="00-034-poly"/>
           <p:cNvSpPr/>
           <p:nvPr/>
         </p:nvSpPr>
@@ -6411,7 +6854,7 @@
       </p:sp>
       <p:sp>
         <p:nvSpPr>
-          <p:cNvPr id="35" name="00-034-poly"/>
+          <p:cNvPr id="36" name="00-035-poly"/>
           <p:cNvSpPr/>
           <p:nvPr/>
         </p:nvSpPr>
@@ -6474,7 +6917,7 @@
       </p:sp>
       <p:sp>
         <p:nvSpPr>
-          <p:cNvPr id="36" name="00-035-poly"/>
+          <p:cNvPr id="37" name="00-036-poly"/>
           <p:cNvSpPr/>
           <p:nvPr/>
         </p:nvSpPr>
@@ -6537,7 +6980,7 @@
       </p:sp>
       <p:sp>
         <p:nvSpPr>
-          <p:cNvPr id="37" name="00-036-poly"/>
+          <p:cNvPr id="38" name="00-037-poly"/>
           <p:cNvSpPr/>
           <p:nvPr/>
         </p:nvSpPr>
@@ -6600,7 +7043,7 @@
       </p:sp>
       <p:sp>
         <p:nvSpPr>
-          <p:cNvPr id="38" name="00-037-poly"/>
+          <p:cNvPr id="39" name="00-038-poly"/>
           <p:cNvSpPr/>
           <p:nvPr/>
         </p:nvSpPr>
@@ -6663,7 +7106,7 @@
       </p:sp>
       <p:sp>
         <p:nvSpPr>
-          <p:cNvPr id="39" name="00-038-poly"/>
+          <p:cNvPr id="40" name="00-039-poly"/>
           <p:cNvSpPr/>
           <p:nvPr/>
         </p:nvSpPr>
@@ -6726,7 +7169,7 @@
       </p:sp>
       <p:sp>
         <p:nvSpPr>
-          <p:cNvPr id="40" name="00-039-poly"/>
+          <p:cNvPr id="41" name="00-040-poly"/>
           <p:cNvSpPr/>
           <p:nvPr/>
         </p:nvSpPr>
@@ -6789,7 +7232,7 @@
       </p:sp>
       <p:sp>
         <p:nvSpPr>
-          <p:cNvPr id="41" name="00-040-poly"/>
+          <p:cNvPr id="42" name="00-041-poly"/>
           <p:cNvSpPr/>
           <p:nvPr/>
         </p:nvSpPr>
@@ -6852,7 +7295,7 @@
       </p:sp>
       <p:sp>
         <p:nvSpPr>
-          <p:cNvPr id="42" name="00-041-poly"/>
+          <p:cNvPr id="43" name="00-042-poly"/>
           <p:cNvSpPr/>
           <p:nvPr/>
         </p:nvSpPr>
@@ -6915,7 +7358,7 @@
       </p:sp>
       <p:sp>
         <p:nvSpPr>
-          <p:cNvPr id="43" name="00-042-poly"/>
+          <p:cNvPr id="44" name="00-043-poly"/>
           <p:cNvSpPr/>
           <p:nvPr/>
         </p:nvSpPr>
@@ -6978,7 +7421,7 @@
       </p:sp>
       <p:sp>
         <p:nvSpPr>
-          <p:cNvPr id="44" name="00-043-poly"/>
+          <p:cNvPr id="45" name="00-044-poly"/>
           <p:cNvSpPr/>
           <p:nvPr/>
         </p:nvSpPr>
@@ -7041,7 +7484,7 @@
       </p:sp>
       <p:sp>
         <p:nvSpPr>
-          <p:cNvPr id="45" name="00-044-poly"/>
+          <p:cNvPr id="46" name="00-045-poly"/>
           <p:cNvSpPr/>
           <p:nvPr/>
         </p:nvSpPr>
@@ -7104,7 +7547,7 @@
       </p:sp>
       <p:sp>
         <p:nvSpPr>
-          <p:cNvPr id="46" name="00-045-poly"/>
+          <p:cNvPr id="47" name="00-046-poly"/>
           <p:cNvSpPr/>
           <p:nvPr/>
         </p:nvSpPr>
@@ -7167,7 +7610,7 @@
       </p:sp>
       <p:sp>
         <p:nvSpPr>
-          <p:cNvPr id="47" name="00-046-text"/>
+          <p:cNvPr id="48" name="00-047-text"/>
           <p:cNvSpPr txBox="1"/>
           <p:nvPr/>
         </p:nvSpPr>
@@ -7212,7 +7655,7 @@
       </p:sp>
       <p:sp>
         <p:nvSpPr>
-          <p:cNvPr id="48" name="00-047-text"/>
+          <p:cNvPr id="49" name="00-048-text"/>
           <p:cNvSpPr txBox="1"/>
           <p:nvPr/>
         </p:nvSpPr>
@@ -7257,7 +7700,7 @@
       </p:sp>
       <p:sp>
         <p:nvSpPr>
-          <p:cNvPr id="49" name="00-048-text"/>
+          <p:cNvPr id="50" name="00-049-text"/>
           <p:cNvSpPr txBox="1"/>
           <p:nvPr/>
         </p:nvSpPr>
@@ -7302,7 +7745,7 @@
       </p:sp>
       <p:sp>
         <p:nvSpPr>
-          <p:cNvPr id="50" name="00-049-text"/>
+          <p:cNvPr id="51" name="00-050-text"/>
           <p:cNvSpPr txBox="1"/>
           <p:nvPr/>
         </p:nvSpPr>
@@ -7347,7 +7790,7 @@
       </p:sp>
       <p:sp>
         <p:nvSpPr>
-          <p:cNvPr id="51" name="00-050-text"/>
+          <p:cNvPr id="52" name="00-051-text"/>
           <p:cNvSpPr txBox="1"/>
           <p:nvPr/>
         </p:nvSpPr>
@@ -7392,7 +7835,7 @@
       </p:sp>
       <p:sp>
         <p:nvSpPr>
-          <p:cNvPr id="52" name="00-051-rect"/>
+          <p:cNvPr id="53" name="00-052-rect"/>
           <p:cNvSpPr/>
           <p:nvPr/>
         </p:nvSpPr>
@@ -7435,7 +7878,7 @@
       </p:sp>
       <p:sp>
         <p:nvSpPr>
-          <p:cNvPr id="53" name="00-052-rect"/>
+          <p:cNvPr id="54" name="00-053-rect"/>
           <p:cNvSpPr/>
           <p:nvPr/>
         </p:nvSpPr>
@@ -7478,7 +7921,7 @@
       </p:sp>
       <p:sp>
         <p:nvSpPr>
-          <p:cNvPr id="54" name="00-053-rect"/>
+          <p:cNvPr id="55" name="00-054-rect"/>
           <p:cNvSpPr/>
           <p:nvPr/>
         </p:nvSpPr>
@@ -7521,7 +7964,7 @@
       </p:sp>
       <p:sp>
         <p:nvSpPr>
-          <p:cNvPr id="55" name="00-054-rect"/>
+          <p:cNvPr id="56" name="00-055-rect"/>
           <p:cNvSpPr/>
           <p:nvPr/>
         </p:nvSpPr>
@@ -7564,7 +8007,7 @@
       </p:sp>
       <p:sp>
         <p:nvSpPr>
-          <p:cNvPr id="56" name="00-055-rect"/>
+          <p:cNvPr id="57" name="00-056-rect"/>
           <p:cNvSpPr/>
           <p:nvPr/>
         </p:nvSpPr>
@@ -7607,7 +8050,7 @@
       </p:sp>
       <p:sp>
         <p:nvSpPr>
-          <p:cNvPr id="57" name="00-056-rect"/>
+          <p:cNvPr id="58" name="00-057-rect"/>
           <p:cNvSpPr/>
           <p:nvPr/>
         </p:nvSpPr>
@@ -7650,7 +8093,7 @@
       </p:sp>
       <p:sp>
         <p:nvSpPr>
-          <p:cNvPr id="58" name="00-057-rect"/>
+          <p:cNvPr id="59" name="00-058-rect"/>
           <p:cNvSpPr/>
           <p:nvPr/>
         </p:nvSpPr>
@@ -7693,7 +8136,7 @@
       </p:sp>
       <p:sp>
         <p:nvSpPr>
-          <p:cNvPr id="59" name="00-058-rect"/>
+          <p:cNvPr id="60" name="00-059-rect"/>
           <p:cNvSpPr/>
           <p:nvPr/>
         </p:nvSpPr>
@@ -7736,7 +8179,7 @@
       </p:sp>
       <p:sp>
         <p:nvSpPr>
-          <p:cNvPr id="60" name="00-059-rect"/>
+          <p:cNvPr id="61" name="00-060-rect"/>
           <p:cNvSpPr/>
           <p:nvPr/>
         </p:nvSpPr>
@@ -7779,7 +8222,7 @@
       </p:sp>
       <p:sp>
         <p:nvSpPr>
-          <p:cNvPr id="61" name="00-060-rect"/>
+          <p:cNvPr id="62" name="00-061-rect"/>
           <p:cNvSpPr/>
           <p:nvPr/>
         </p:nvSpPr>
@@ -7822,7 +8265,7 @@
       </p:sp>
       <p:sp>
         <p:nvSpPr>
-          <p:cNvPr id="62" name="00-061-rect"/>
+          <p:cNvPr id="63" name="00-062-rect"/>
           <p:cNvSpPr/>
           <p:nvPr/>
         </p:nvSpPr>
@@ -7865,7 +8308,7 @@
       </p:sp>
       <p:sp>
         <p:nvSpPr>
-          <p:cNvPr id="63" name="00-062-rect"/>
+          <p:cNvPr id="64" name="00-063-rect"/>
           <p:cNvSpPr/>
           <p:nvPr/>
         </p:nvSpPr>
@@ -7908,7 +8351,7 @@
       </p:sp>
       <p:sp>
         <p:nvSpPr>
-          <p:cNvPr id="64" name="00-063-rect"/>
+          <p:cNvPr id="65" name="00-064-rect"/>
           <p:cNvSpPr/>
           <p:nvPr/>
         </p:nvSpPr>
@@ -7951,7 +8394,7 @@
       </p:sp>
       <p:sp>
         <p:nvSpPr>
-          <p:cNvPr id="65" name="00-064-text"/>
+          <p:cNvPr id="66" name="00-065-text"/>
           <p:cNvSpPr txBox="1"/>
           <p:nvPr/>
         </p:nvSpPr>
@@ -7996,7 +8439,7 @@
       </p:sp>
       <p:sp>
         <p:nvSpPr>
-          <p:cNvPr id="66" name="00-065-line"/>
+          <p:cNvPr id="67" name="00-066-line"/>
           <p:cNvSpPr/>
           <p:nvPr/>
         </p:nvSpPr>
@@ -8053,7 +8496,7 @@
       </p:sp>
       <p:sp>
         <p:nvSpPr>
-          <p:cNvPr id="67" name="00-066-poly"/>
+          <p:cNvPr id="68" name="00-067-poly"/>
           <p:cNvSpPr/>
           <p:nvPr/>
         </p:nvSpPr>
@@ -8114,7 +8557,7 @@
       </p:sp>
       <p:sp>
         <p:nvSpPr>
-          <p:cNvPr id="68" name="00-067-line"/>
+          <p:cNvPr id="69" name="00-068-line"/>
           <p:cNvSpPr/>
           <p:nvPr/>
         </p:nvSpPr>
@@ -8171,7 +8614,7 @@
       </p:sp>
       <p:sp>
         <p:nvSpPr>
-          <p:cNvPr id="69" name="00-068-poly"/>
+          <p:cNvPr id="70" name="00-069-poly"/>
           <p:cNvSpPr/>
           <p:nvPr/>
         </p:nvSpPr>
@@ -8232,7 +8675,7 @@
       </p:sp>
       <p:sp>
         <p:nvSpPr>
-          <p:cNvPr id="70" name="00-069-text"/>
+          <p:cNvPr id="71" name="00-070-text"/>
           <p:cNvSpPr txBox="1"/>
           <p:nvPr/>
         </p:nvSpPr>
@@ -8277,7 +8720,7 @@
       </p:sp>
       <p:sp>
         <p:nvSpPr>
-          <p:cNvPr id="71" name="00-070-rect"/>
+          <p:cNvPr id="72" name="00-071-rect"/>
           <p:cNvSpPr/>
           <p:nvPr/>
         </p:nvSpPr>
@@ -8322,7 +8765,7 @@
       </p:sp>
       <p:sp>
         <p:nvSpPr>
-          <p:cNvPr id="72" name="00-071-rect"/>
+          <p:cNvPr id="73" name="00-072-rect"/>
           <p:cNvSpPr/>
           <p:nvPr/>
         </p:nvSpPr>
@@ -8365,7 +8808,7 @@
       </p:sp>
       <p:sp>
         <p:nvSpPr>
-          <p:cNvPr id="73" name="00-072-text"/>
+          <p:cNvPr id="74" name="00-073-text"/>
           <p:cNvSpPr txBox="1"/>
           <p:nvPr/>
         </p:nvSpPr>
@@ -8714,8 +9157,8 @@
         </p:nvSpPr>
         <p:spPr>
           <a:xfrm>
-            <a:off x="9906000" y="6610350"/>
-            <a:ext cx="133350" cy="38100"/>
+            <a:off x="9810750" y="6610350"/>
+            <a:ext cx="114300" cy="38100"/>
           </a:xfrm>
           <a:prstGeom prst="rect">
             <a:avLst/>
@@ -8757,8 +9200,8 @@
         </p:nvSpPr>
         <p:spPr>
           <a:xfrm>
-            <a:off x="10106025" y="6610350"/>
-            <a:ext cx="133350" cy="38100"/>
+            <a:off x="9991725" y="6610350"/>
+            <a:ext cx="114300" cy="38100"/>
           </a:xfrm>
           <a:prstGeom prst="rect">
             <a:avLst/>
@@ -8800,8 +9243,8 @@
         </p:nvSpPr>
         <p:spPr>
           <a:xfrm>
-            <a:off x="10306050" y="6610350"/>
-            <a:ext cx="133350" cy="38100"/>
+            <a:off x="10172700" y="6610350"/>
+            <a:ext cx="114300" cy="38100"/>
           </a:xfrm>
           <a:prstGeom prst="rect">
             <a:avLst/>
@@ -8843,8 +9286,8 @@
         </p:nvSpPr>
         <p:spPr>
           <a:xfrm>
-            <a:off x="10506075" y="6610350"/>
-            <a:ext cx="133350" cy="38100"/>
+            <a:off x="10353675" y="6610350"/>
+            <a:ext cx="114300" cy="38100"/>
           </a:xfrm>
           <a:prstGeom prst="rect">
             <a:avLst/>
@@ -8886,8 +9329,8 @@
         </p:nvSpPr>
         <p:spPr>
           <a:xfrm>
-            <a:off x="10706100" y="6610350"/>
-            <a:ext cx="133350" cy="38100"/>
+            <a:off x="10534650" y="6610350"/>
+            <a:ext cx="114300" cy="38100"/>
           </a:xfrm>
           <a:prstGeom prst="rect">
             <a:avLst/>
@@ -8929,8 +9372,8 @@
         </p:nvSpPr>
         <p:spPr>
           <a:xfrm>
-            <a:off x="10906125" y="6610350"/>
-            <a:ext cx="133350" cy="38100"/>
+            <a:off x="10715625" y="6610350"/>
+            <a:ext cx="114300" cy="38100"/>
           </a:xfrm>
           <a:prstGeom prst="rect">
             <a:avLst/>
@@ -8972,8 +9415,8 @@
         </p:nvSpPr>
         <p:spPr>
           <a:xfrm>
-            <a:off x="11106150" y="6610350"/>
-            <a:ext cx="133350" cy="38100"/>
+            <a:off x="10896600" y="6610350"/>
+            <a:ext cx="114300" cy="38100"/>
           </a:xfrm>
           <a:prstGeom prst="rect">
             <a:avLst/>
@@ -9009,7 +9452,50 @@
       </p:sp>
       <p:sp>
         <p:nvSpPr>
-          <p:cNvPr id="15" name="01-014-text"/>
+          <p:cNvPr id="15" name="01-014-rect"/>
+          <p:cNvSpPr/>
+          <p:nvPr/>
+        </p:nvSpPr>
+        <p:spPr>
+          <a:xfrm>
+            <a:off x="11077575" y="6610350"/>
+            <a:ext cx="114300" cy="38100"/>
+          </a:xfrm>
+          <a:prstGeom prst="rect">
+            <a:avLst/>
+          </a:prstGeom>
+          <a:solidFill>
+            <a:srgbClr val="D9E1EA"/>
+          </a:solidFill>
+          <a:ln>
+            <a:noFill/>
+          </a:ln>
+        </p:spPr>
+        <p:style>
+          <a:lnRef idx="1">
+            <a:schemeClr val="accent1"/>
+          </a:lnRef>
+          <a:fillRef idx="3">
+            <a:schemeClr val="accent1"/>
+          </a:fillRef>
+          <a:effectRef idx="2">
+            <a:schemeClr val="accent1"/>
+          </a:effectRef>
+          <a:fontRef idx="minor">
+            <a:schemeClr val="lt1"/>
+          </a:fontRef>
+        </p:style>
+        <p:txBody>
+          <a:bodyPr rtlCol="0" anchor="ctr"/>
+          <a:lstStyle/>
+          <a:p>
+            <a:pPr algn="ctr"/>
+          </a:p>
+        </p:txBody>
+      </p:sp>
+      <p:sp>
+        <p:nvSpPr>
+          <p:cNvPr id="16" name="01-015-text"/>
           <p:cNvSpPr txBox="1"/>
           <p:nvPr/>
         </p:nvSpPr>
@@ -9054,7 +9540,7 @@
       </p:sp>
       <p:sp>
         <p:nvSpPr>
-          <p:cNvPr id="16" name="01-015-text"/>
+          <p:cNvPr id="17" name="01-016-text"/>
           <p:cNvSpPr txBox="1"/>
           <p:nvPr/>
         </p:nvSpPr>
@@ -9099,7 +9585,7 @@
       </p:sp>
       <p:sp>
         <p:nvSpPr>
-          <p:cNvPr id="17" name="01-016-poly"/>
+          <p:cNvPr id="18" name="01-017-poly"/>
           <p:cNvSpPr/>
           <p:nvPr/>
         </p:nvSpPr>
@@ -9162,7 +9648,7 @@
       </p:sp>
       <p:sp>
         <p:nvSpPr>
-          <p:cNvPr id="18" name="01-017-poly"/>
+          <p:cNvPr id="19" name="01-018-poly"/>
           <p:cNvSpPr/>
           <p:nvPr/>
         </p:nvSpPr>
@@ -9225,7 +9711,7 @@
       </p:sp>
       <p:sp>
         <p:nvSpPr>
-          <p:cNvPr id="19" name="01-018-poly"/>
+          <p:cNvPr id="20" name="01-019-poly"/>
           <p:cNvSpPr/>
           <p:nvPr/>
         </p:nvSpPr>
@@ -9288,7 +9774,7 @@
       </p:sp>
       <p:sp>
         <p:nvSpPr>
-          <p:cNvPr id="20" name="01-019-poly"/>
+          <p:cNvPr id="21" name="01-020-poly"/>
           <p:cNvSpPr/>
           <p:nvPr/>
         </p:nvSpPr>
@@ -9351,7 +9837,7 @@
       </p:sp>
       <p:sp>
         <p:nvSpPr>
-          <p:cNvPr id="21" name="01-020-poly"/>
+          <p:cNvPr id="22" name="01-021-poly"/>
           <p:cNvSpPr/>
           <p:nvPr/>
         </p:nvSpPr>
@@ -9414,7 +9900,7 @@
       </p:sp>
       <p:sp>
         <p:nvSpPr>
-          <p:cNvPr id="22" name="01-021-poly"/>
+          <p:cNvPr id="23" name="01-022-poly"/>
           <p:cNvSpPr/>
           <p:nvPr/>
         </p:nvSpPr>
@@ -9477,7 +9963,7 @@
       </p:sp>
       <p:sp>
         <p:nvSpPr>
-          <p:cNvPr id="23" name="01-022-poly"/>
+          <p:cNvPr id="24" name="01-023-poly"/>
           <p:cNvSpPr/>
           <p:nvPr/>
         </p:nvSpPr>
@@ -9540,7 +10026,7 @@
       </p:sp>
       <p:sp>
         <p:nvSpPr>
-          <p:cNvPr id="24" name="01-023-poly"/>
+          <p:cNvPr id="25" name="01-024-poly"/>
           <p:cNvSpPr/>
           <p:nvPr/>
         </p:nvSpPr>
@@ -9603,7 +10089,7 @@
       </p:sp>
       <p:sp>
         <p:nvSpPr>
-          <p:cNvPr id="25" name="01-024-poly"/>
+          <p:cNvPr id="26" name="01-025-poly"/>
           <p:cNvSpPr/>
           <p:nvPr/>
         </p:nvSpPr>
@@ -9666,7 +10152,7 @@
       </p:sp>
       <p:sp>
         <p:nvSpPr>
-          <p:cNvPr id="26" name="01-025-poly"/>
+          <p:cNvPr id="27" name="01-026-poly"/>
           <p:cNvSpPr/>
           <p:nvPr/>
         </p:nvSpPr>
@@ -9729,7 +10215,7 @@
       </p:sp>
       <p:sp>
         <p:nvSpPr>
-          <p:cNvPr id="27" name="01-026-poly"/>
+          <p:cNvPr id="28" name="01-027-poly"/>
           <p:cNvSpPr/>
           <p:nvPr/>
         </p:nvSpPr>
@@ -9792,7 +10278,7 @@
       </p:sp>
       <p:sp>
         <p:nvSpPr>
-          <p:cNvPr id="28" name="01-027-poly"/>
+          <p:cNvPr id="29" name="01-028-poly"/>
           <p:cNvSpPr/>
           <p:nvPr/>
         </p:nvSpPr>
@@ -9855,7 +10341,7 @@
       </p:sp>
       <p:sp>
         <p:nvSpPr>
-          <p:cNvPr id="29" name="01-028-ellipse"/>
+          <p:cNvPr id="30" name="01-029-ellipse"/>
           <p:cNvSpPr/>
           <p:nvPr/>
         </p:nvSpPr>
@@ -9900,7 +10386,7 @@
       </p:sp>
       <p:sp>
         <p:nvSpPr>
-          <p:cNvPr id="30" name="01-029-text"/>
+          <p:cNvPr id="31" name="01-030-text"/>
           <p:cNvSpPr txBox="1"/>
           <p:nvPr/>
         </p:nvSpPr>
@@ -9945,7 +10431,7 @@
       </p:sp>
       <p:sp>
         <p:nvSpPr>
-          <p:cNvPr id="31" name="01-030-ellipse"/>
+          <p:cNvPr id="32" name="01-031-ellipse"/>
           <p:cNvSpPr/>
           <p:nvPr/>
         </p:nvSpPr>
@@ -9990,7 +10476,7 @@
       </p:sp>
       <p:sp>
         <p:nvSpPr>
-          <p:cNvPr id="32" name="01-031-text"/>
+          <p:cNvPr id="33" name="01-032-text"/>
           <p:cNvSpPr txBox="1"/>
           <p:nvPr/>
         </p:nvSpPr>
@@ -10035,7 +10521,7 @@
       </p:sp>
       <p:sp>
         <p:nvSpPr>
-          <p:cNvPr id="33" name="01-032-ellipse"/>
+          <p:cNvPr id="34" name="01-033-ellipse"/>
           <p:cNvSpPr/>
           <p:nvPr/>
         </p:nvSpPr>
@@ -10080,7 +10566,7 @@
       </p:sp>
       <p:sp>
         <p:nvSpPr>
-          <p:cNvPr id="34" name="01-033-text"/>
+          <p:cNvPr id="35" name="01-034-text"/>
           <p:cNvSpPr txBox="1"/>
           <p:nvPr/>
         </p:nvSpPr>
@@ -10125,7 +10611,7 @@
       </p:sp>
       <p:sp>
         <p:nvSpPr>
-          <p:cNvPr id="35" name="01-034-ellipse"/>
+          <p:cNvPr id="36" name="01-035-ellipse"/>
           <p:cNvSpPr/>
           <p:nvPr/>
         </p:nvSpPr>
@@ -10170,7 +10656,7 @@
       </p:sp>
       <p:sp>
         <p:nvSpPr>
-          <p:cNvPr id="36" name="01-035-text"/>
+          <p:cNvPr id="37" name="01-036-text"/>
           <p:cNvSpPr txBox="1"/>
           <p:nvPr/>
         </p:nvSpPr>
@@ -10215,7 +10701,7 @@
       </p:sp>
       <p:sp>
         <p:nvSpPr>
-          <p:cNvPr id="37" name="01-036-ellipse"/>
+          <p:cNvPr id="38" name="01-037-ellipse"/>
           <p:cNvSpPr/>
           <p:nvPr/>
         </p:nvSpPr>
@@ -10260,7 +10746,7 @@
       </p:sp>
       <p:sp>
         <p:nvSpPr>
-          <p:cNvPr id="38" name="01-037-text"/>
+          <p:cNvPr id="39" name="01-038-text"/>
           <p:cNvSpPr txBox="1"/>
           <p:nvPr/>
         </p:nvSpPr>
@@ -10305,7 +10791,7 @@
       </p:sp>
       <p:sp>
         <p:nvSpPr>
-          <p:cNvPr id="39" name="01-038-ellipse"/>
+          <p:cNvPr id="40" name="01-039-ellipse"/>
           <p:cNvSpPr/>
           <p:nvPr/>
         </p:nvSpPr>
@@ -10350,7 +10836,7 @@
       </p:sp>
       <p:sp>
         <p:nvSpPr>
-          <p:cNvPr id="40" name="01-039-text"/>
+          <p:cNvPr id="41" name="01-040-text"/>
           <p:cNvSpPr txBox="1"/>
           <p:nvPr/>
         </p:nvSpPr>
@@ -10395,7 +10881,7 @@
       </p:sp>
       <p:sp>
         <p:nvSpPr>
-          <p:cNvPr id="41" name="01-040-ellipse"/>
+          <p:cNvPr id="42" name="01-041-ellipse"/>
           <p:cNvSpPr/>
           <p:nvPr/>
         </p:nvSpPr>
@@ -10440,7 +10926,7 @@
       </p:sp>
       <p:sp>
         <p:nvSpPr>
-          <p:cNvPr id="42" name="01-041-text"/>
+          <p:cNvPr id="43" name="01-042-text"/>
           <p:cNvSpPr txBox="1"/>
           <p:nvPr/>
         </p:nvSpPr>
@@ -10485,7 +10971,7 @@
       </p:sp>
       <p:sp>
         <p:nvSpPr>
-          <p:cNvPr id="43" name="01-042-ellipse"/>
+          <p:cNvPr id="44" name="01-043-ellipse"/>
           <p:cNvSpPr/>
           <p:nvPr/>
         </p:nvSpPr>
@@ -10530,7 +11016,7 @@
       </p:sp>
       <p:sp>
         <p:nvSpPr>
-          <p:cNvPr id="44" name="01-043-text"/>
+          <p:cNvPr id="45" name="01-044-text"/>
           <p:cNvSpPr txBox="1"/>
           <p:nvPr/>
         </p:nvSpPr>
@@ -10575,7 +11061,7 @@
       </p:sp>
       <p:sp>
         <p:nvSpPr>
-          <p:cNvPr id="45" name="01-044-ellipse"/>
+          <p:cNvPr id="46" name="01-045-ellipse"/>
           <p:cNvSpPr/>
           <p:nvPr/>
         </p:nvSpPr>
@@ -10620,7 +11106,7 @@
       </p:sp>
       <p:sp>
         <p:nvSpPr>
-          <p:cNvPr id="46" name="01-045-text"/>
+          <p:cNvPr id="47" name="01-046-text"/>
           <p:cNvSpPr txBox="1"/>
           <p:nvPr/>
         </p:nvSpPr>
@@ -10665,7 +11151,7 @@
       </p:sp>
       <p:sp>
         <p:nvSpPr>
-          <p:cNvPr id="47" name="01-046-ellipse"/>
+          <p:cNvPr id="48" name="01-047-ellipse"/>
           <p:cNvSpPr/>
           <p:nvPr/>
         </p:nvSpPr>
@@ -10710,7 +11196,7 @@
       </p:sp>
       <p:sp>
         <p:nvSpPr>
-          <p:cNvPr id="48" name="01-047-text"/>
+          <p:cNvPr id="49" name="01-048-text"/>
           <p:cNvSpPr txBox="1"/>
           <p:nvPr/>
         </p:nvSpPr>
@@ -10755,7 +11241,7 @@
       </p:sp>
       <p:sp>
         <p:nvSpPr>
-          <p:cNvPr id="49" name="01-048-ellipse"/>
+          <p:cNvPr id="50" name="01-049-ellipse"/>
           <p:cNvSpPr/>
           <p:nvPr/>
         </p:nvSpPr>
@@ -10800,7 +11286,7 @@
       </p:sp>
       <p:sp>
         <p:nvSpPr>
-          <p:cNvPr id="50" name="01-049-text"/>
+          <p:cNvPr id="51" name="01-050-text"/>
           <p:cNvSpPr txBox="1"/>
           <p:nvPr/>
         </p:nvSpPr>
@@ -10845,7 +11331,7 @@
       </p:sp>
       <p:sp>
         <p:nvSpPr>
-          <p:cNvPr id="51" name="01-050-ellipse"/>
+          <p:cNvPr id="52" name="01-051-ellipse"/>
           <p:cNvSpPr/>
           <p:nvPr/>
         </p:nvSpPr>
@@ -10890,7 +11376,7 @@
       </p:sp>
       <p:sp>
         <p:nvSpPr>
-          <p:cNvPr id="52" name="01-051-text"/>
+          <p:cNvPr id="53" name="01-052-text"/>
           <p:cNvSpPr txBox="1"/>
           <p:nvPr/>
         </p:nvSpPr>
@@ -10935,7 +11421,7 @@
       </p:sp>
       <p:sp>
         <p:nvSpPr>
-          <p:cNvPr id="53" name="01-052-text"/>
+          <p:cNvPr id="54" name="01-053-text"/>
           <p:cNvSpPr txBox="1"/>
           <p:nvPr/>
         </p:nvSpPr>
@@ -11002,7 +11488,7 @@
       </p:sp>
       <p:sp>
         <p:nvSpPr>
-          <p:cNvPr id="54" name="01-053-rect"/>
+          <p:cNvPr id="55" name="01-054-rect"/>
           <p:cNvSpPr/>
           <p:nvPr/>
         </p:nvSpPr>
@@ -11049,7 +11535,7 @@
       </p:sp>
       <p:sp>
         <p:nvSpPr>
-          <p:cNvPr id="55" name="01-054-text"/>
+          <p:cNvPr id="56" name="01-055-text"/>
           <p:cNvSpPr txBox="1"/>
           <p:nvPr/>
         </p:nvSpPr>
@@ -11094,7 +11580,7 @@
       </p:sp>
       <p:sp>
         <p:nvSpPr>
-          <p:cNvPr id="56" name="01-055-rect"/>
+          <p:cNvPr id="57" name="01-056-rect"/>
           <p:cNvSpPr/>
           <p:nvPr/>
         </p:nvSpPr>
@@ -11141,7 +11627,7 @@
       </p:sp>
       <p:sp>
         <p:nvSpPr>
-          <p:cNvPr id="57" name="01-056-text"/>
+          <p:cNvPr id="58" name="01-057-text"/>
           <p:cNvSpPr txBox="1"/>
           <p:nvPr/>
         </p:nvSpPr>
@@ -11186,7 +11672,7 @@
       </p:sp>
       <p:sp>
         <p:nvSpPr>
-          <p:cNvPr id="58" name="01-057-line"/>
+          <p:cNvPr id="59" name="01-058-line"/>
           <p:cNvSpPr/>
           <p:nvPr/>
         </p:nvSpPr>
@@ -11243,7 +11729,7 @@
       </p:sp>
       <p:sp>
         <p:nvSpPr>
-          <p:cNvPr id="59" name="01-058-poly"/>
+          <p:cNvPr id="60" name="01-059-poly"/>
           <p:cNvSpPr/>
           <p:nvPr/>
         </p:nvSpPr>
@@ -11304,7 +11790,7 @@
       </p:sp>
       <p:sp>
         <p:nvSpPr>
-          <p:cNvPr id="60" name="01-059-rect"/>
+          <p:cNvPr id="61" name="01-060-rect"/>
           <p:cNvSpPr/>
           <p:nvPr/>
         </p:nvSpPr>
@@ -11349,7 +11835,7 @@
       </p:sp>
       <p:sp>
         <p:nvSpPr>
-          <p:cNvPr id="61" name="01-060-rect"/>
+          <p:cNvPr id="62" name="01-061-rect"/>
           <p:cNvSpPr/>
           <p:nvPr/>
         </p:nvSpPr>
@@ -11394,7 +11880,7 @@
       </p:sp>
       <p:sp>
         <p:nvSpPr>
-          <p:cNvPr id="62" name="01-061-text"/>
+          <p:cNvPr id="63" name="01-062-text"/>
           <p:cNvSpPr txBox="1"/>
           <p:nvPr/>
         </p:nvSpPr>
@@ -11439,7 +11925,7 @@
       </p:sp>
       <p:sp>
         <p:nvSpPr>
-          <p:cNvPr id="63" name="01-062-text"/>
+          <p:cNvPr id="64" name="01-063-text"/>
           <p:cNvSpPr txBox="1"/>
           <p:nvPr/>
         </p:nvSpPr>
@@ -11484,7 +11970,7 @@
       </p:sp>
       <p:sp>
         <p:nvSpPr>
-          <p:cNvPr id="64" name="01-063-poly"/>
+          <p:cNvPr id="65" name="01-064-poly"/>
           <p:cNvSpPr/>
           <p:nvPr/>
         </p:nvSpPr>
@@ -11547,7 +12033,7 @@
       </p:sp>
       <p:sp>
         <p:nvSpPr>
-          <p:cNvPr id="65" name="01-064-poly"/>
+          <p:cNvPr id="66" name="01-065-poly"/>
           <p:cNvSpPr/>
           <p:nvPr/>
         </p:nvSpPr>
@@ -11610,7 +12096,7 @@
       </p:sp>
       <p:sp>
         <p:nvSpPr>
-          <p:cNvPr id="66" name="01-065-poly"/>
+          <p:cNvPr id="67" name="01-066-poly"/>
           <p:cNvSpPr/>
           <p:nvPr/>
         </p:nvSpPr>
@@ -11673,7 +12159,7 @@
       </p:sp>
       <p:sp>
         <p:nvSpPr>
-          <p:cNvPr id="67" name="01-066-poly"/>
+          <p:cNvPr id="68" name="01-067-poly"/>
           <p:cNvSpPr/>
           <p:nvPr/>
         </p:nvSpPr>
@@ -11736,7 +12222,7 @@
       </p:sp>
       <p:sp>
         <p:nvSpPr>
-          <p:cNvPr id="68" name="01-067-poly"/>
+          <p:cNvPr id="69" name="01-068-poly"/>
           <p:cNvSpPr/>
           <p:nvPr/>
         </p:nvSpPr>
@@ -11799,7 +12285,7 @@
       </p:sp>
       <p:sp>
         <p:nvSpPr>
-          <p:cNvPr id="69" name="01-068-poly"/>
+          <p:cNvPr id="70" name="01-069-poly"/>
           <p:cNvSpPr/>
           <p:nvPr/>
         </p:nvSpPr>
@@ -11862,7 +12348,7 @@
       </p:sp>
       <p:sp>
         <p:nvSpPr>
-          <p:cNvPr id="70" name="01-069-poly"/>
+          <p:cNvPr id="71" name="01-070-poly"/>
           <p:cNvSpPr/>
           <p:nvPr/>
         </p:nvSpPr>
@@ -11925,7 +12411,7 @@
       </p:sp>
       <p:sp>
         <p:nvSpPr>
-          <p:cNvPr id="71" name="01-070-poly"/>
+          <p:cNvPr id="72" name="01-071-poly"/>
           <p:cNvSpPr/>
           <p:nvPr/>
         </p:nvSpPr>
@@ -11988,7 +12474,7 @@
       </p:sp>
       <p:sp>
         <p:nvSpPr>
-          <p:cNvPr id="72" name="01-071-ellipse"/>
+          <p:cNvPr id="73" name="01-072-ellipse"/>
           <p:cNvSpPr/>
           <p:nvPr/>
         </p:nvSpPr>
@@ -12033,7 +12519,7 @@
       </p:sp>
       <p:sp>
         <p:nvSpPr>
-          <p:cNvPr id="73" name="01-072-text"/>
+          <p:cNvPr id="74" name="01-073-text"/>
           <p:cNvSpPr txBox="1"/>
           <p:nvPr/>
         </p:nvSpPr>
@@ -12078,7 +12564,7 @@
       </p:sp>
       <p:sp>
         <p:nvSpPr>
-          <p:cNvPr id="74" name="01-073-ellipse"/>
+          <p:cNvPr id="75" name="01-074-ellipse"/>
           <p:cNvSpPr/>
           <p:nvPr/>
         </p:nvSpPr>
@@ -12123,7 +12609,7 @@
       </p:sp>
       <p:sp>
         <p:nvSpPr>
-          <p:cNvPr id="75" name="01-074-text"/>
+          <p:cNvPr id="76" name="01-075-text"/>
           <p:cNvSpPr txBox="1"/>
           <p:nvPr/>
         </p:nvSpPr>
@@ -12168,7 +12654,7 @@
       </p:sp>
       <p:sp>
         <p:nvSpPr>
-          <p:cNvPr id="76" name="01-075-ellipse"/>
+          <p:cNvPr id="77" name="01-076-ellipse"/>
           <p:cNvSpPr/>
           <p:nvPr/>
         </p:nvSpPr>
@@ -12213,7 +12699,7 @@
       </p:sp>
       <p:sp>
         <p:nvSpPr>
-          <p:cNvPr id="77" name="01-076-text"/>
+          <p:cNvPr id="78" name="01-077-text"/>
           <p:cNvSpPr txBox="1"/>
           <p:nvPr/>
         </p:nvSpPr>
@@ -12258,7 +12744,7 @@
       </p:sp>
       <p:sp>
         <p:nvSpPr>
-          <p:cNvPr id="78" name="01-077-ellipse"/>
+          <p:cNvPr id="79" name="01-078-ellipse"/>
           <p:cNvSpPr/>
           <p:nvPr/>
         </p:nvSpPr>
@@ -12303,7 +12789,7 @@
       </p:sp>
       <p:sp>
         <p:nvSpPr>
-          <p:cNvPr id="79" name="01-078-text"/>
+          <p:cNvPr id="80" name="01-079-text"/>
           <p:cNvSpPr txBox="1"/>
           <p:nvPr/>
         </p:nvSpPr>
@@ -12348,7 +12834,7 @@
       </p:sp>
       <p:sp>
         <p:nvSpPr>
-          <p:cNvPr id="80" name="01-079-ellipse"/>
+          <p:cNvPr id="81" name="01-080-ellipse"/>
           <p:cNvSpPr/>
           <p:nvPr/>
         </p:nvSpPr>
@@ -12393,7 +12879,7 @@
       </p:sp>
       <p:sp>
         <p:nvSpPr>
-          <p:cNvPr id="81" name="01-080-text"/>
+          <p:cNvPr id="82" name="01-081-text"/>
           <p:cNvSpPr txBox="1"/>
           <p:nvPr/>
         </p:nvSpPr>
@@ -12438,7 +12924,7 @@
       </p:sp>
       <p:sp>
         <p:nvSpPr>
-          <p:cNvPr id="82" name="01-081-ellipse"/>
+          <p:cNvPr id="83" name="01-082-ellipse"/>
           <p:cNvSpPr/>
           <p:nvPr/>
         </p:nvSpPr>
@@ -12483,7 +12969,7 @@
       </p:sp>
       <p:sp>
         <p:nvSpPr>
-          <p:cNvPr id="83" name="01-082-text"/>
+          <p:cNvPr id="84" name="01-083-text"/>
           <p:cNvSpPr txBox="1"/>
           <p:nvPr/>
         </p:nvSpPr>
@@ -12528,7 +13014,7 @@
       </p:sp>
       <p:sp>
         <p:nvSpPr>
-          <p:cNvPr id="84" name="01-083-ellipse"/>
+          <p:cNvPr id="85" name="01-084-ellipse"/>
           <p:cNvSpPr/>
           <p:nvPr/>
         </p:nvSpPr>
@@ -12573,7 +13059,7 @@
       </p:sp>
       <p:sp>
         <p:nvSpPr>
-          <p:cNvPr id="85" name="01-084-text"/>
+          <p:cNvPr id="86" name="01-085-text"/>
           <p:cNvSpPr txBox="1"/>
           <p:nvPr/>
         </p:nvSpPr>
@@ -12618,7 +13104,7 @@
       </p:sp>
       <p:sp>
         <p:nvSpPr>
-          <p:cNvPr id="86" name="01-085-ellipse"/>
+          <p:cNvPr id="87" name="01-086-ellipse"/>
           <p:cNvSpPr/>
           <p:nvPr/>
         </p:nvSpPr>
@@ -12663,7 +13149,7 @@
       </p:sp>
       <p:sp>
         <p:nvSpPr>
-          <p:cNvPr id="87" name="01-086-text"/>
+          <p:cNvPr id="88" name="01-087-text"/>
           <p:cNvSpPr txBox="1"/>
           <p:nvPr/>
         </p:nvSpPr>
@@ -12708,7 +13194,7 @@
       </p:sp>
       <p:sp>
         <p:nvSpPr>
-          <p:cNvPr id="88" name="01-087-ellipse"/>
+          <p:cNvPr id="89" name="01-088-ellipse"/>
           <p:cNvSpPr/>
           <p:nvPr/>
         </p:nvSpPr>
@@ -12753,7 +13239,7 @@
       </p:sp>
       <p:sp>
         <p:nvSpPr>
-          <p:cNvPr id="89" name="01-088-text"/>
+          <p:cNvPr id="90" name="01-089-text"/>
           <p:cNvSpPr txBox="1"/>
           <p:nvPr/>
         </p:nvSpPr>
@@ -12798,7 +13284,7 @@
       </p:sp>
       <p:sp>
         <p:nvSpPr>
-          <p:cNvPr id="90" name="01-089-poly"/>
+          <p:cNvPr id="91" name="01-090-poly"/>
           <p:cNvSpPr/>
           <p:nvPr/>
         </p:nvSpPr>
@@ -12861,7 +13347,7 @@
       </p:sp>
       <p:sp>
         <p:nvSpPr>
-          <p:cNvPr id="91" name="01-090-poly"/>
+          <p:cNvPr id="92" name="01-091-poly"/>
           <p:cNvSpPr/>
           <p:nvPr/>
         </p:nvSpPr>
@@ -12924,7 +13410,7 @@
       </p:sp>
       <p:sp>
         <p:nvSpPr>
-          <p:cNvPr id="92" name="01-091-poly"/>
+          <p:cNvPr id="93" name="01-092-poly"/>
           <p:cNvSpPr/>
           <p:nvPr/>
         </p:nvSpPr>
@@ -12987,7 +13473,7 @@
       </p:sp>
       <p:sp>
         <p:nvSpPr>
-          <p:cNvPr id="93" name="01-092-poly"/>
+          <p:cNvPr id="94" name="01-093-poly"/>
           <p:cNvSpPr/>
           <p:nvPr/>
         </p:nvSpPr>
@@ -13050,7 +13536,7 @@
       </p:sp>
       <p:sp>
         <p:nvSpPr>
-          <p:cNvPr id="94" name="01-093-ellipse"/>
+          <p:cNvPr id="95" name="01-094-ellipse"/>
           <p:cNvSpPr/>
           <p:nvPr/>
         </p:nvSpPr>
@@ -13095,7 +13581,7 @@
       </p:sp>
       <p:sp>
         <p:nvSpPr>
-          <p:cNvPr id="95" name="01-094-text"/>
+          <p:cNvPr id="96" name="01-095-text"/>
           <p:cNvSpPr txBox="1"/>
           <p:nvPr/>
         </p:nvSpPr>
@@ -13140,7 +13626,7 @@
       </p:sp>
       <p:sp>
         <p:nvSpPr>
-          <p:cNvPr id="96" name="01-095-ellipse"/>
+          <p:cNvPr id="97" name="01-096-ellipse"/>
           <p:cNvSpPr/>
           <p:nvPr/>
         </p:nvSpPr>
@@ -13185,7 +13671,7 @@
       </p:sp>
       <p:sp>
         <p:nvSpPr>
-          <p:cNvPr id="97" name="01-096-text"/>
+          <p:cNvPr id="98" name="01-097-text"/>
           <p:cNvSpPr txBox="1"/>
           <p:nvPr/>
         </p:nvSpPr>
@@ -13230,7 +13716,7 @@
       </p:sp>
       <p:sp>
         <p:nvSpPr>
-          <p:cNvPr id="98" name="01-097-ellipse"/>
+          <p:cNvPr id="99" name="01-098-ellipse"/>
           <p:cNvSpPr/>
           <p:nvPr/>
         </p:nvSpPr>
@@ -13275,7 +13761,7 @@
       </p:sp>
       <p:sp>
         <p:nvSpPr>
-          <p:cNvPr id="99" name="01-098-text"/>
+          <p:cNvPr id="100" name="01-099-text"/>
           <p:cNvSpPr txBox="1"/>
           <p:nvPr/>
         </p:nvSpPr>
@@ -13320,7 +13806,7 @@
       </p:sp>
       <p:sp>
         <p:nvSpPr>
-          <p:cNvPr id="100" name="01-099-ellipse"/>
+          <p:cNvPr id="101" name="01-100-ellipse"/>
           <p:cNvSpPr/>
           <p:nvPr/>
         </p:nvSpPr>
@@ -13365,7 +13851,7 @@
       </p:sp>
       <p:sp>
         <p:nvSpPr>
-          <p:cNvPr id="101" name="01-100-text"/>
+          <p:cNvPr id="102" name="01-101-text"/>
           <p:cNvSpPr txBox="1"/>
           <p:nvPr/>
         </p:nvSpPr>
@@ -13410,7 +13896,7 @@
       </p:sp>
       <p:sp>
         <p:nvSpPr>
-          <p:cNvPr id="102" name="01-101-ellipse"/>
+          <p:cNvPr id="103" name="01-102-ellipse"/>
           <p:cNvSpPr/>
           <p:nvPr/>
         </p:nvSpPr>
@@ -13455,7 +13941,7 @@
       </p:sp>
       <p:sp>
         <p:nvSpPr>
-          <p:cNvPr id="103" name="01-102-text"/>
+          <p:cNvPr id="104" name="01-103-text"/>
           <p:cNvSpPr txBox="1"/>
           <p:nvPr/>
         </p:nvSpPr>
@@ -13500,7 +13986,7 @@
       </p:sp>
       <p:sp>
         <p:nvSpPr>
-          <p:cNvPr id="104" name="01-103-ellipse"/>
+          <p:cNvPr id="105" name="01-104-ellipse"/>
           <p:cNvSpPr/>
           <p:nvPr/>
         </p:nvSpPr>
@@ -13545,7 +14031,7 @@
       </p:sp>
       <p:sp>
         <p:nvSpPr>
-          <p:cNvPr id="105" name="01-104-text"/>
+          <p:cNvPr id="106" name="01-105-text"/>
           <p:cNvSpPr txBox="1"/>
           <p:nvPr/>
         </p:nvSpPr>
@@ -13590,7 +14076,7 @@
       </p:sp>
       <p:sp>
         <p:nvSpPr>
-          <p:cNvPr id="106" name="01-105-line"/>
+          <p:cNvPr id="107" name="01-106-line"/>
           <p:cNvSpPr/>
           <p:nvPr/>
         </p:nvSpPr>
@@ -13647,7 +14133,7 @@
       </p:sp>
       <p:sp>
         <p:nvSpPr>
-          <p:cNvPr id="107" name="01-106-poly"/>
+          <p:cNvPr id="108" name="01-107-poly"/>
           <p:cNvSpPr/>
           <p:nvPr/>
         </p:nvSpPr>
@@ -13708,7 +14194,7 @@
       </p:sp>
       <p:sp>
         <p:nvSpPr>
-          <p:cNvPr id="108" name="01-107-rect"/>
+          <p:cNvPr id="109" name="01-108-rect"/>
           <p:cNvSpPr/>
           <p:nvPr/>
         </p:nvSpPr>
@@ -13751,7 +14237,7 @@
       </p:sp>
       <p:sp>
         <p:nvSpPr>
-          <p:cNvPr id="109" name="01-108-text"/>
+          <p:cNvPr id="110" name="01-109-text"/>
           <p:cNvSpPr txBox="1"/>
           <p:nvPr/>
         </p:nvSpPr>
@@ -13796,7 +14282,7 @@
       </p:sp>
       <p:sp>
         <p:nvSpPr>
-          <p:cNvPr id="110" name="01-109-line"/>
+          <p:cNvPr id="111" name="01-110-line"/>
           <p:cNvSpPr/>
           <p:nvPr/>
         </p:nvSpPr>
@@ -13853,7 +14339,7 @@
       </p:sp>
       <p:sp>
         <p:nvSpPr>
-          <p:cNvPr id="111" name="01-110-poly"/>
+          <p:cNvPr id="112" name="01-111-poly"/>
           <p:cNvSpPr/>
           <p:nvPr/>
         </p:nvSpPr>
@@ -13914,7 +14400,7 @@
       </p:sp>
       <p:sp>
         <p:nvSpPr>
-          <p:cNvPr id="112" name="01-111-rect"/>
+          <p:cNvPr id="113" name="01-112-rect"/>
           <p:cNvSpPr/>
           <p:nvPr/>
         </p:nvSpPr>
@@ -13957,7 +14443,7 @@
       </p:sp>
       <p:sp>
         <p:nvSpPr>
-          <p:cNvPr id="113" name="01-112-text"/>
+          <p:cNvPr id="114" name="01-113-text"/>
           <p:cNvSpPr txBox="1"/>
           <p:nvPr/>
         </p:nvSpPr>
@@ -14002,7 +14488,7 @@
       </p:sp>
       <p:sp>
         <p:nvSpPr>
-          <p:cNvPr id="114" name="01-113-line"/>
+          <p:cNvPr id="115" name="01-114-line"/>
           <p:cNvSpPr/>
           <p:nvPr/>
         </p:nvSpPr>
@@ -14059,7 +14545,7 @@
       </p:sp>
       <p:sp>
         <p:nvSpPr>
-          <p:cNvPr id="115" name="01-114-poly"/>
+          <p:cNvPr id="116" name="01-115-poly"/>
           <p:cNvSpPr/>
           <p:nvPr/>
         </p:nvSpPr>
@@ -14120,7 +14606,7 @@
       </p:sp>
       <p:sp>
         <p:nvSpPr>
-          <p:cNvPr id="116" name="01-115-rect"/>
+          <p:cNvPr id="117" name="01-116-rect"/>
           <p:cNvSpPr/>
           <p:nvPr/>
         </p:nvSpPr>
@@ -14163,7 +14649,7 @@
       </p:sp>
       <p:sp>
         <p:nvSpPr>
-          <p:cNvPr id="117" name="01-116-text"/>
+          <p:cNvPr id="118" name="01-117-text"/>
           <p:cNvSpPr txBox="1"/>
           <p:nvPr/>
         </p:nvSpPr>
@@ -14208,7 +14694,7 @@
       </p:sp>
       <p:sp>
         <p:nvSpPr>
-          <p:cNvPr id="118" name="01-117-rect"/>
+          <p:cNvPr id="119" name="01-118-rect"/>
           <p:cNvSpPr/>
           <p:nvPr/>
         </p:nvSpPr>
@@ -14255,7 +14741,7 @@
       </p:sp>
       <p:sp>
         <p:nvSpPr>
-          <p:cNvPr id="119" name="01-118-text"/>
+          <p:cNvPr id="120" name="01-119-text"/>
           <p:cNvSpPr txBox="1"/>
           <p:nvPr/>
         </p:nvSpPr>
@@ -14300,7 +14786,7 @@
       </p:sp>
       <p:sp>
         <p:nvSpPr>
-          <p:cNvPr id="120" name="01-119-rect"/>
+          <p:cNvPr id="121" name="01-120-rect"/>
           <p:cNvSpPr/>
           <p:nvPr/>
         </p:nvSpPr>
@@ -14347,7 +14833,7 @@
       </p:sp>
       <p:sp>
         <p:nvSpPr>
-          <p:cNvPr id="121" name="01-120-text"/>
+          <p:cNvPr id="122" name="01-121-text"/>
           <p:cNvSpPr txBox="1"/>
           <p:nvPr/>
         </p:nvSpPr>
@@ -14392,7 +14878,7 @@
       </p:sp>
       <p:sp>
         <p:nvSpPr>
-          <p:cNvPr id="122" name="01-121-rect"/>
+          <p:cNvPr id="123" name="01-122-rect"/>
           <p:cNvSpPr/>
           <p:nvPr/>
         </p:nvSpPr>
@@ -14439,7 +14925,7 @@
       </p:sp>
       <p:sp>
         <p:nvSpPr>
-          <p:cNvPr id="123" name="01-122-text"/>
+          <p:cNvPr id="124" name="01-123-text"/>
           <p:cNvSpPr txBox="1"/>
           <p:nvPr/>
         </p:nvSpPr>
@@ -14484,7 +14970,7 @@
       </p:sp>
       <p:sp>
         <p:nvSpPr>
-          <p:cNvPr id="124" name="01-123-rect"/>
+          <p:cNvPr id="125" name="01-124-rect"/>
           <p:cNvSpPr/>
           <p:nvPr/>
         </p:nvSpPr>
@@ -14531,7 +15017,7 @@
       </p:sp>
       <p:sp>
         <p:nvSpPr>
-          <p:cNvPr id="125" name="01-124-text"/>
+          <p:cNvPr id="126" name="01-125-text"/>
           <p:cNvSpPr txBox="1"/>
           <p:nvPr/>
         </p:nvSpPr>
@@ -14576,7 +15062,7 @@
       </p:sp>
       <p:sp>
         <p:nvSpPr>
-          <p:cNvPr id="126" name="01-125-rect"/>
+          <p:cNvPr id="127" name="01-126-rect"/>
           <p:cNvSpPr/>
           <p:nvPr/>
         </p:nvSpPr>
@@ -14623,7 +15109,7 @@
       </p:sp>
       <p:sp>
         <p:nvSpPr>
-          <p:cNvPr id="127" name="01-126-text"/>
+          <p:cNvPr id="128" name="01-127-text"/>
           <p:cNvSpPr txBox="1"/>
           <p:nvPr/>
         </p:nvSpPr>
@@ -14668,7 +15154,7 @@
       </p:sp>
       <p:sp>
         <p:nvSpPr>
-          <p:cNvPr id="128" name="01-127-rect"/>
+          <p:cNvPr id="129" name="01-128-rect"/>
           <p:cNvSpPr/>
           <p:nvPr/>
         </p:nvSpPr>
@@ -14715,7 +15201,7 @@
       </p:sp>
       <p:sp>
         <p:nvSpPr>
-          <p:cNvPr id="129" name="01-128-text"/>
+          <p:cNvPr id="130" name="01-129-text"/>
           <p:cNvSpPr txBox="1"/>
           <p:nvPr/>
         </p:nvSpPr>
@@ -14760,7 +15246,7 @@
       </p:sp>
       <p:sp>
         <p:nvSpPr>
-          <p:cNvPr id="130" name="01-129-rect"/>
+          <p:cNvPr id="131" name="01-130-rect"/>
           <p:cNvSpPr/>
           <p:nvPr/>
         </p:nvSpPr>
@@ -14807,7 +15293,7 @@
       </p:sp>
       <p:sp>
         <p:nvSpPr>
-          <p:cNvPr id="131" name="01-130-text"/>
+          <p:cNvPr id="132" name="01-131-text"/>
           <p:cNvSpPr txBox="1"/>
           <p:nvPr/>
         </p:nvSpPr>
@@ -14852,7 +15338,7 @@
       </p:sp>
       <p:sp>
         <p:nvSpPr>
-          <p:cNvPr id="132" name="01-131-rect"/>
+          <p:cNvPr id="133" name="01-132-rect"/>
           <p:cNvSpPr/>
           <p:nvPr/>
         </p:nvSpPr>
@@ -14899,7 +15385,7 @@
       </p:sp>
       <p:sp>
         <p:nvSpPr>
-          <p:cNvPr id="133" name="01-132-text"/>
+          <p:cNvPr id="134" name="01-133-text"/>
           <p:cNvSpPr txBox="1"/>
           <p:nvPr/>
         </p:nvSpPr>
@@ -14944,7 +15430,7 @@
       </p:sp>
       <p:sp>
         <p:nvSpPr>
-          <p:cNvPr id="134" name="01-133-rect"/>
+          <p:cNvPr id="135" name="01-134-rect"/>
           <p:cNvSpPr/>
           <p:nvPr/>
         </p:nvSpPr>
@@ -14991,7 +15477,7 @@
       </p:sp>
       <p:sp>
         <p:nvSpPr>
-          <p:cNvPr id="135" name="01-134-text"/>
+          <p:cNvPr id="136" name="01-135-text"/>
           <p:cNvSpPr txBox="1"/>
           <p:nvPr/>
         </p:nvSpPr>
@@ -15036,7 +15522,7 @@
       </p:sp>
       <p:sp>
         <p:nvSpPr>
-          <p:cNvPr id="136" name="01-135-rect"/>
+          <p:cNvPr id="137" name="01-136-rect"/>
           <p:cNvSpPr/>
           <p:nvPr/>
         </p:nvSpPr>
@@ -15083,7 +15569,7 @@
       </p:sp>
       <p:sp>
         <p:nvSpPr>
-          <p:cNvPr id="137" name="01-136-text"/>
+          <p:cNvPr id="138" name="01-137-text"/>
           <p:cNvSpPr txBox="1"/>
           <p:nvPr/>
         </p:nvSpPr>
@@ -15128,7 +15614,7 @@
       </p:sp>
       <p:sp>
         <p:nvSpPr>
-          <p:cNvPr id="138" name="01-137-rect"/>
+          <p:cNvPr id="139" name="01-138-rect"/>
           <p:cNvSpPr/>
           <p:nvPr/>
         </p:nvSpPr>
@@ -15175,7 +15661,7 @@
       </p:sp>
       <p:sp>
         <p:nvSpPr>
-          <p:cNvPr id="139" name="01-138-text"/>
+          <p:cNvPr id="140" name="01-139-text"/>
           <p:cNvSpPr txBox="1"/>
           <p:nvPr/>
         </p:nvSpPr>
@@ -15220,7 +15706,7 @@
       </p:sp>
       <p:sp>
         <p:nvSpPr>
-          <p:cNvPr id="140" name="01-139-rect"/>
+          <p:cNvPr id="141" name="01-140-rect"/>
           <p:cNvSpPr/>
           <p:nvPr/>
         </p:nvSpPr>
@@ -15267,7 +15753,7 @@
       </p:sp>
       <p:sp>
         <p:nvSpPr>
-          <p:cNvPr id="141" name="01-140-text"/>
+          <p:cNvPr id="142" name="01-141-text"/>
           <p:cNvSpPr txBox="1"/>
           <p:nvPr/>
         </p:nvSpPr>
@@ -15312,7 +15798,7 @@
       </p:sp>
       <p:sp>
         <p:nvSpPr>
-          <p:cNvPr id="142" name="01-141-rect"/>
+          <p:cNvPr id="143" name="01-142-rect"/>
           <p:cNvSpPr/>
           <p:nvPr/>
         </p:nvSpPr>
@@ -15359,7 +15845,7 @@
       </p:sp>
       <p:sp>
         <p:nvSpPr>
-          <p:cNvPr id="143" name="01-142-text"/>
+          <p:cNvPr id="144" name="01-143-text"/>
           <p:cNvSpPr txBox="1"/>
           <p:nvPr/>
         </p:nvSpPr>
@@ -15404,7 +15890,7 @@
       </p:sp>
       <p:sp>
         <p:nvSpPr>
-          <p:cNvPr id="144" name="01-143-rect"/>
+          <p:cNvPr id="145" name="01-144-rect"/>
           <p:cNvSpPr/>
           <p:nvPr/>
         </p:nvSpPr>
@@ -15451,7 +15937,7 @@
       </p:sp>
       <p:sp>
         <p:nvSpPr>
-          <p:cNvPr id="145" name="01-144-text"/>
+          <p:cNvPr id="146" name="01-145-text"/>
           <p:cNvSpPr txBox="1"/>
           <p:nvPr/>
         </p:nvSpPr>
@@ -15496,7 +15982,7 @@
       </p:sp>
       <p:sp>
         <p:nvSpPr>
-          <p:cNvPr id="146" name="01-145-rect"/>
+          <p:cNvPr id="147" name="01-146-rect"/>
           <p:cNvSpPr/>
           <p:nvPr/>
         </p:nvSpPr>
@@ -15543,7 +16029,7 @@
       </p:sp>
       <p:sp>
         <p:nvSpPr>
-          <p:cNvPr id="147" name="01-146-text"/>
+          <p:cNvPr id="148" name="01-147-text"/>
           <p:cNvSpPr txBox="1"/>
           <p:nvPr/>
         </p:nvSpPr>
@@ -15588,7 +16074,7 @@
       </p:sp>
       <p:sp>
         <p:nvSpPr>
-          <p:cNvPr id="148" name="01-147-text"/>
+          <p:cNvPr id="149" name="01-148-text"/>
           <p:cNvSpPr txBox="1"/>
           <p:nvPr/>
         </p:nvSpPr>
@@ -15633,7 +16119,7 @@
       </p:sp>
       <p:sp>
         <p:nvSpPr>
-          <p:cNvPr id="149" name="01-148-text"/>
+          <p:cNvPr id="150" name="01-149-text"/>
           <p:cNvSpPr txBox="1"/>
           <p:nvPr/>
         </p:nvSpPr>
@@ -15678,7 +16164,7 @@
       </p:sp>
       <p:sp>
         <p:nvSpPr>
-          <p:cNvPr id="150" name="01-149-rect"/>
+          <p:cNvPr id="151" name="01-150-rect"/>
           <p:cNvSpPr/>
           <p:nvPr/>
         </p:nvSpPr>
@@ -15723,7 +16209,7 @@
       </p:sp>
       <p:sp>
         <p:nvSpPr>
-          <p:cNvPr id="151" name="01-150-rect"/>
+          <p:cNvPr id="152" name="01-151-rect"/>
           <p:cNvSpPr/>
           <p:nvPr/>
         </p:nvSpPr>
@@ -15766,7 +16252,7 @@
       </p:sp>
       <p:sp>
         <p:nvSpPr>
-          <p:cNvPr id="152" name="01-151-text"/>
+          <p:cNvPr id="153" name="01-152-text"/>
           <p:cNvSpPr txBox="1"/>
           <p:nvPr/>
         </p:nvSpPr>
@@ -15811,7 +16297,7 @@
       </p:sp>
       <p:sp>
         <p:nvSpPr>
-          <p:cNvPr id="153" name="01-152-text"/>
+          <p:cNvPr id="154" name="01-153-text"/>
           <p:cNvSpPr txBox="1"/>
           <p:nvPr/>
         </p:nvSpPr>
@@ -16160,8 +16646,8 @@
         </p:nvSpPr>
         <p:spPr>
           <a:xfrm>
-            <a:off x="9906000" y="6610350"/>
-            <a:ext cx="133350" cy="38100"/>
+            <a:off x="9810750" y="6610350"/>
+            <a:ext cx="114300" cy="38100"/>
           </a:xfrm>
           <a:prstGeom prst="rect">
             <a:avLst/>
@@ -16203,8 +16689,8 @@
         </p:nvSpPr>
         <p:spPr>
           <a:xfrm>
-            <a:off x="10106025" y="6610350"/>
-            <a:ext cx="133350" cy="38100"/>
+            <a:off x="9991725" y="6610350"/>
+            <a:ext cx="114300" cy="38100"/>
           </a:xfrm>
           <a:prstGeom prst="rect">
             <a:avLst/>
@@ -16246,8 +16732,8 @@
         </p:nvSpPr>
         <p:spPr>
           <a:xfrm>
-            <a:off x="10306050" y="6610350"/>
-            <a:ext cx="133350" cy="38100"/>
+            <a:off x="10172700" y="6610350"/>
+            <a:ext cx="114300" cy="38100"/>
           </a:xfrm>
           <a:prstGeom prst="rect">
             <a:avLst/>
@@ -16289,8 +16775,8 @@
         </p:nvSpPr>
         <p:spPr>
           <a:xfrm>
-            <a:off x="10506075" y="6610350"/>
-            <a:ext cx="133350" cy="38100"/>
+            <a:off x="10353675" y="6610350"/>
+            <a:ext cx="114300" cy="38100"/>
           </a:xfrm>
           <a:prstGeom prst="rect">
             <a:avLst/>
@@ -16332,8 +16818,8 @@
         </p:nvSpPr>
         <p:spPr>
           <a:xfrm>
-            <a:off x="10706100" y="6610350"/>
-            <a:ext cx="133350" cy="38100"/>
+            <a:off x="10534650" y="6610350"/>
+            <a:ext cx="114300" cy="38100"/>
           </a:xfrm>
           <a:prstGeom prst="rect">
             <a:avLst/>
@@ -16375,8 +16861,8 @@
         </p:nvSpPr>
         <p:spPr>
           <a:xfrm>
-            <a:off x="10906125" y="6610350"/>
-            <a:ext cx="133350" cy="38100"/>
+            <a:off x="10715625" y="6610350"/>
+            <a:ext cx="114300" cy="38100"/>
           </a:xfrm>
           <a:prstGeom prst="rect">
             <a:avLst/>
@@ -16418,8 +16904,8 @@
         </p:nvSpPr>
         <p:spPr>
           <a:xfrm>
-            <a:off x="11106150" y="6610350"/>
-            <a:ext cx="133350" cy="38100"/>
+            <a:off x="10896600" y="6610350"/>
+            <a:ext cx="114300" cy="38100"/>
           </a:xfrm>
           <a:prstGeom prst="rect">
             <a:avLst/>
@@ -16455,7 +16941,50 @@
       </p:sp>
       <p:sp>
         <p:nvSpPr>
-          <p:cNvPr id="15" name="02-014-text"/>
+          <p:cNvPr id="15" name="02-014-rect"/>
+          <p:cNvSpPr/>
+          <p:nvPr/>
+        </p:nvSpPr>
+        <p:spPr>
+          <a:xfrm>
+            <a:off x="11077575" y="6610350"/>
+            <a:ext cx="114300" cy="38100"/>
+          </a:xfrm>
+          <a:prstGeom prst="rect">
+            <a:avLst/>
+          </a:prstGeom>
+          <a:solidFill>
+            <a:srgbClr val="D9E1EA"/>
+          </a:solidFill>
+          <a:ln>
+            <a:noFill/>
+          </a:ln>
+        </p:spPr>
+        <p:style>
+          <a:lnRef idx="1">
+            <a:schemeClr val="accent1"/>
+          </a:lnRef>
+          <a:fillRef idx="3">
+            <a:schemeClr val="accent1"/>
+          </a:fillRef>
+          <a:effectRef idx="2">
+            <a:schemeClr val="accent1"/>
+          </a:effectRef>
+          <a:fontRef idx="minor">
+            <a:schemeClr val="lt1"/>
+          </a:fontRef>
+        </p:style>
+        <p:txBody>
+          <a:bodyPr rtlCol="0" anchor="ctr"/>
+          <a:lstStyle/>
+          <a:p>
+            <a:pPr algn="ctr"/>
+          </a:p>
+        </p:txBody>
+      </p:sp>
+      <p:sp>
+        <p:nvSpPr>
+          <p:cNvPr id="16" name="02-015-text"/>
           <p:cNvSpPr txBox="1"/>
           <p:nvPr/>
         </p:nvSpPr>
@@ -16500,7 +17029,7 @@
       </p:sp>
       <p:sp>
         <p:nvSpPr>
-          <p:cNvPr id="16" name="02-015-rect"/>
+          <p:cNvPr id="17" name="02-016-rect"/>
           <p:cNvSpPr/>
           <p:nvPr/>
         </p:nvSpPr>
@@ -16547,7 +17076,7 @@
       </p:sp>
       <p:sp>
         <p:nvSpPr>
-          <p:cNvPr id="17" name="02-016-text"/>
+          <p:cNvPr id="18" name="02-017-text"/>
           <p:cNvSpPr txBox="1"/>
           <p:nvPr/>
         </p:nvSpPr>
@@ -16592,7 +17121,7 @@
       </p:sp>
       <p:sp>
         <p:nvSpPr>
-          <p:cNvPr id="18" name="02-017-rect"/>
+          <p:cNvPr id="19" name="02-018-rect"/>
           <p:cNvSpPr/>
           <p:nvPr/>
         </p:nvSpPr>
@@ -16639,7 +17168,7 @@
       </p:sp>
       <p:sp>
         <p:nvSpPr>
-          <p:cNvPr id="19" name="02-018-text"/>
+          <p:cNvPr id="20" name="02-019-text"/>
           <p:cNvSpPr txBox="1"/>
           <p:nvPr/>
         </p:nvSpPr>
@@ -16684,7 +17213,7 @@
       </p:sp>
       <p:sp>
         <p:nvSpPr>
-          <p:cNvPr id="20" name="02-019-rect"/>
+          <p:cNvPr id="21" name="02-020-rect"/>
           <p:cNvSpPr/>
           <p:nvPr/>
         </p:nvSpPr>
@@ -16731,7 +17260,7 @@
       </p:sp>
       <p:sp>
         <p:nvSpPr>
-          <p:cNvPr id="21" name="02-020-text"/>
+          <p:cNvPr id="22" name="02-021-text"/>
           <p:cNvSpPr txBox="1"/>
           <p:nvPr/>
         </p:nvSpPr>
@@ -16776,7 +17305,7 @@
       </p:sp>
       <p:sp>
         <p:nvSpPr>
-          <p:cNvPr id="22" name="02-021-rect"/>
+          <p:cNvPr id="23" name="02-022-rect"/>
           <p:cNvSpPr/>
           <p:nvPr/>
         </p:nvSpPr>
@@ -16823,7 +17352,7 @@
       </p:sp>
       <p:sp>
         <p:nvSpPr>
-          <p:cNvPr id="23" name="02-022-text"/>
+          <p:cNvPr id="24" name="02-023-text"/>
           <p:cNvSpPr txBox="1"/>
           <p:nvPr/>
         </p:nvSpPr>
@@ -16868,7 +17397,7 @@
       </p:sp>
       <p:sp>
         <p:nvSpPr>
-          <p:cNvPr id="24" name="02-023-rect"/>
+          <p:cNvPr id="25" name="02-024-rect"/>
           <p:cNvSpPr/>
           <p:nvPr/>
         </p:nvSpPr>
@@ -16915,7 +17444,7 @@
       </p:sp>
       <p:sp>
         <p:nvSpPr>
-          <p:cNvPr id="25" name="02-024-text"/>
+          <p:cNvPr id="26" name="02-025-text"/>
           <p:cNvSpPr txBox="1"/>
           <p:nvPr/>
         </p:nvSpPr>
@@ -16960,7 +17489,7 @@
       </p:sp>
       <p:sp>
         <p:nvSpPr>
-          <p:cNvPr id="26" name="02-025-rect"/>
+          <p:cNvPr id="27" name="02-026-rect"/>
           <p:cNvSpPr/>
           <p:nvPr/>
         </p:nvSpPr>
@@ -17007,7 +17536,7 @@
       </p:sp>
       <p:sp>
         <p:nvSpPr>
-          <p:cNvPr id="27" name="02-026-text"/>
+          <p:cNvPr id="28" name="02-027-text"/>
           <p:cNvSpPr txBox="1"/>
           <p:nvPr/>
         </p:nvSpPr>
@@ -17052,7 +17581,7 @@
       </p:sp>
       <p:sp>
         <p:nvSpPr>
-          <p:cNvPr id="28" name="02-027-rect"/>
+          <p:cNvPr id="29" name="02-028-rect"/>
           <p:cNvSpPr/>
           <p:nvPr/>
         </p:nvSpPr>
@@ -17099,7 +17628,7 @@
       </p:sp>
       <p:sp>
         <p:nvSpPr>
-          <p:cNvPr id="29" name="02-028-text"/>
+          <p:cNvPr id="30" name="02-029-text"/>
           <p:cNvSpPr txBox="1"/>
           <p:nvPr/>
         </p:nvSpPr>
@@ -17144,7 +17673,7 @@
       </p:sp>
       <p:sp>
         <p:nvSpPr>
-          <p:cNvPr id="30" name="02-029-rect"/>
+          <p:cNvPr id="31" name="02-030-rect"/>
           <p:cNvSpPr/>
           <p:nvPr/>
         </p:nvSpPr>
@@ -17191,7 +17720,7 @@
       </p:sp>
       <p:sp>
         <p:nvSpPr>
-          <p:cNvPr id="31" name="02-030-text"/>
+          <p:cNvPr id="32" name="02-031-text"/>
           <p:cNvSpPr txBox="1"/>
           <p:nvPr/>
         </p:nvSpPr>
@@ -17236,7 +17765,7 @@
       </p:sp>
       <p:sp>
         <p:nvSpPr>
-          <p:cNvPr id="32" name="02-031-rect"/>
+          <p:cNvPr id="33" name="02-032-rect"/>
           <p:cNvSpPr/>
           <p:nvPr/>
         </p:nvSpPr>
@@ -17283,7 +17812,7 @@
       </p:sp>
       <p:sp>
         <p:nvSpPr>
-          <p:cNvPr id="33" name="02-032-text"/>
+          <p:cNvPr id="34" name="02-033-text"/>
           <p:cNvSpPr txBox="1"/>
           <p:nvPr/>
         </p:nvSpPr>
@@ -17328,7 +17857,7 @@
       </p:sp>
       <p:sp>
         <p:nvSpPr>
-          <p:cNvPr id="34" name="02-033-rect"/>
+          <p:cNvPr id="35" name="02-034-rect"/>
           <p:cNvSpPr/>
           <p:nvPr/>
         </p:nvSpPr>
@@ -17375,7 +17904,7 @@
       </p:sp>
       <p:sp>
         <p:nvSpPr>
-          <p:cNvPr id="35" name="02-034-text"/>
+          <p:cNvPr id="36" name="02-035-text"/>
           <p:cNvSpPr txBox="1"/>
           <p:nvPr/>
         </p:nvSpPr>
@@ -17420,7 +17949,7 @@
       </p:sp>
       <p:sp>
         <p:nvSpPr>
-          <p:cNvPr id="36" name="02-035-rect"/>
+          <p:cNvPr id="37" name="02-036-rect"/>
           <p:cNvSpPr/>
           <p:nvPr/>
         </p:nvSpPr>
@@ -17467,7 +17996,7 @@
       </p:sp>
       <p:sp>
         <p:nvSpPr>
-          <p:cNvPr id="37" name="02-036-text"/>
+          <p:cNvPr id="38" name="02-037-text"/>
           <p:cNvSpPr txBox="1"/>
           <p:nvPr/>
         </p:nvSpPr>
@@ -17512,7 +18041,7 @@
       </p:sp>
       <p:sp>
         <p:nvSpPr>
-          <p:cNvPr id="38" name="02-037-rect"/>
+          <p:cNvPr id="39" name="02-038-rect"/>
           <p:cNvSpPr/>
           <p:nvPr/>
         </p:nvSpPr>
@@ -17559,7 +18088,7 @@
       </p:sp>
       <p:sp>
         <p:nvSpPr>
-          <p:cNvPr id="39" name="02-038-text"/>
+          <p:cNvPr id="40" name="02-039-text"/>
           <p:cNvSpPr txBox="1"/>
           <p:nvPr/>
         </p:nvSpPr>
@@ -17604,7 +18133,7 @@
       </p:sp>
       <p:sp>
         <p:nvSpPr>
-          <p:cNvPr id="40" name="02-039-rect"/>
+          <p:cNvPr id="41" name="02-040-rect"/>
           <p:cNvSpPr/>
           <p:nvPr/>
         </p:nvSpPr>
@@ -17651,7 +18180,7 @@
       </p:sp>
       <p:sp>
         <p:nvSpPr>
-          <p:cNvPr id="41" name="02-040-text"/>
+          <p:cNvPr id="42" name="02-041-text"/>
           <p:cNvSpPr txBox="1"/>
           <p:nvPr/>
         </p:nvSpPr>
@@ -17696,7 +18225,7 @@
       </p:sp>
       <p:sp>
         <p:nvSpPr>
-          <p:cNvPr id="42" name="02-041-rect"/>
+          <p:cNvPr id="43" name="02-042-rect"/>
           <p:cNvSpPr/>
           <p:nvPr/>
         </p:nvSpPr>
@@ -17743,7 +18272,7 @@
       </p:sp>
       <p:sp>
         <p:nvSpPr>
-          <p:cNvPr id="43" name="02-042-text"/>
+          <p:cNvPr id="44" name="02-043-text"/>
           <p:cNvSpPr txBox="1"/>
           <p:nvPr/>
         </p:nvSpPr>
@@ -17788,7 +18317,7 @@
       </p:sp>
       <p:sp>
         <p:nvSpPr>
-          <p:cNvPr id="44" name="02-043-rect"/>
+          <p:cNvPr id="45" name="02-044-rect"/>
           <p:cNvSpPr/>
           <p:nvPr/>
         </p:nvSpPr>
@@ -17835,7 +18364,7 @@
       </p:sp>
       <p:sp>
         <p:nvSpPr>
-          <p:cNvPr id="45" name="02-044-text"/>
+          <p:cNvPr id="46" name="02-045-text"/>
           <p:cNvSpPr txBox="1"/>
           <p:nvPr/>
         </p:nvSpPr>
@@ -17880,7 +18409,7 @@
       </p:sp>
       <p:sp>
         <p:nvSpPr>
-          <p:cNvPr id="46" name="02-045-rect"/>
+          <p:cNvPr id="47" name="02-046-rect"/>
           <p:cNvSpPr/>
           <p:nvPr/>
         </p:nvSpPr>
@@ -17927,7 +18456,7 @@
       </p:sp>
       <p:sp>
         <p:nvSpPr>
-          <p:cNvPr id="47" name="02-046-text"/>
+          <p:cNvPr id="48" name="02-047-text"/>
           <p:cNvSpPr txBox="1"/>
           <p:nvPr/>
         </p:nvSpPr>
@@ -17972,7 +18501,7 @@
       </p:sp>
       <p:sp>
         <p:nvSpPr>
-          <p:cNvPr id="48" name="02-047-rect"/>
+          <p:cNvPr id="49" name="02-048-rect"/>
           <p:cNvSpPr/>
           <p:nvPr/>
         </p:nvSpPr>
@@ -18019,7 +18548,7 @@
       </p:sp>
       <p:sp>
         <p:nvSpPr>
-          <p:cNvPr id="49" name="02-048-text"/>
+          <p:cNvPr id="50" name="02-049-text"/>
           <p:cNvSpPr txBox="1"/>
           <p:nvPr/>
         </p:nvSpPr>
@@ -18064,7 +18593,7 @@
       </p:sp>
       <p:sp>
         <p:nvSpPr>
-          <p:cNvPr id="50" name="02-049-text"/>
+          <p:cNvPr id="51" name="02-050-text"/>
           <p:cNvSpPr txBox="1"/>
           <p:nvPr/>
         </p:nvSpPr>
@@ -18109,7 +18638,7 @@
       </p:sp>
       <p:sp>
         <p:nvSpPr>
-          <p:cNvPr id="51" name="02-050-text"/>
+          <p:cNvPr id="52" name="02-051-text"/>
           <p:cNvSpPr txBox="1"/>
           <p:nvPr/>
         </p:nvSpPr>
@@ -18154,7 +18683,7 @@
       </p:sp>
       <p:sp>
         <p:nvSpPr>
-          <p:cNvPr id="52" name="02-051-line"/>
+          <p:cNvPr id="53" name="02-052-line"/>
           <p:cNvSpPr/>
           <p:nvPr/>
         </p:nvSpPr>
@@ -18211,7 +18740,7 @@
       </p:sp>
       <p:sp>
         <p:nvSpPr>
-          <p:cNvPr id="53" name="02-052-poly"/>
+          <p:cNvPr id="54" name="02-053-poly"/>
           <p:cNvSpPr/>
           <p:nvPr/>
         </p:nvSpPr>
@@ -18272,7 +18801,7 @@
       </p:sp>
       <p:sp>
         <p:nvSpPr>
-          <p:cNvPr id="54" name="02-053-line"/>
+          <p:cNvPr id="55" name="02-054-line"/>
           <p:cNvSpPr/>
           <p:nvPr/>
         </p:nvSpPr>
@@ -18329,7 +18858,7 @@
       </p:sp>
       <p:sp>
         <p:nvSpPr>
-          <p:cNvPr id="55" name="02-054-poly"/>
+          <p:cNvPr id="56" name="02-055-poly"/>
           <p:cNvSpPr/>
           <p:nvPr/>
         </p:nvSpPr>
@@ -18390,7 +18919,7 @@
       </p:sp>
       <p:sp>
         <p:nvSpPr>
-          <p:cNvPr id="56" name="02-055-ellipse"/>
+          <p:cNvPr id="57" name="02-056-ellipse"/>
           <p:cNvSpPr/>
           <p:nvPr/>
         </p:nvSpPr>
@@ -18435,7 +18964,7 @@
       </p:sp>
       <p:sp>
         <p:nvSpPr>
-          <p:cNvPr id="57" name="02-056-text"/>
+          <p:cNvPr id="58" name="02-057-text"/>
           <p:cNvSpPr txBox="1"/>
           <p:nvPr/>
         </p:nvSpPr>
@@ -18480,7 +19009,7 @@
       </p:sp>
       <p:sp>
         <p:nvSpPr>
-          <p:cNvPr id="58" name="02-057-rect"/>
+          <p:cNvPr id="59" name="02-058-rect"/>
           <p:cNvSpPr/>
           <p:nvPr/>
         </p:nvSpPr>
@@ -18527,7 +19056,7 @@
       </p:sp>
       <p:sp>
         <p:nvSpPr>
-          <p:cNvPr id="59" name="02-058-text"/>
+          <p:cNvPr id="60" name="02-059-text"/>
           <p:cNvSpPr txBox="1"/>
           <p:nvPr/>
         </p:nvSpPr>
@@ -18572,7 +19101,7 @@
       </p:sp>
       <p:sp>
         <p:nvSpPr>
-          <p:cNvPr id="60" name="02-059-text"/>
+          <p:cNvPr id="61" name="02-060-text"/>
           <p:cNvSpPr txBox="1"/>
           <p:nvPr/>
         </p:nvSpPr>
@@ -18617,7 +19146,7 @@
       </p:sp>
       <p:sp>
         <p:nvSpPr>
-          <p:cNvPr id="61" name="02-060-rect"/>
+          <p:cNvPr id="62" name="02-061-rect"/>
           <p:cNvSpPr/>
           <p:nvPr/>
         </p:nvSpPr>
@@ -18664,7 +19193,7 @@
       </p:sp>
       <p:sp>
         <p:nvSpPr>
-          <p:cNvPr id="62" name="02-061-text"/>
+          <p:cNvPr id="63" name="02-062-text"/>
           <p:cNvSpPr txBox="1"/>
           <p:nvPr/>
         </p:nvSpPr>
@@ -18709,7 +19238,7 @@
       </p:sp>
       <p:sp>
         <p:nvSpPr>
-          <p:cNvPr id="63" name="02-062-text"/>
+          <p:cNvPr id="64" name="02-063-text"/>
           <p:cNvSpPr txBox="1"/>
           <p:nvPr/>
         </p:nvSpPr>
@@ -18754,7 +19283,7 @@
       </p:sp>
       <p:sp>
         <p:nvSpPr>
-          <p:cNvPr id="64" name="02-063-rect"/>
+          <p:cNvPr id="65" name="02-064-rect"/>
           <p:cNvSpPr/>
           <p:nvPr/>
         </p:nvSpPr>
@@ -18801,7 +19330,7 @@
       </p:sp>
       <p:sp>
         <p:nvSpPr>
-          <p:cNvPr id="65" name="02-064-text"/>
+          <p:cNvPr id="66" name="02-065-text"/>
           <p:cNvSpPr txBox="1"/>
           <p:nvPr/>
         </p:nvSpPr>
@@ -18846,7 +19375,7 @@
       </p:sp>
       <p:sp>
         <p:nvSpPr>
-          <p:cNvPr id="66" name="02-065-text"/>
+          <p:cNvPr id="67" name="02-066-text"/>
           <p:cNvSpPr txBox="1"/>
           <p:nvPr/>
         </p:nvSpPr>
@@ -18891,7 +19420,7 @@
       </p:sp>
       <p:sp>
         <p:nvSpPr>
-          <p:cNvPr id="67" name="02-066-rect"/>
+          <p:cNvPr id="68" name="02-067-rect"/>
           <p:cNvSpPr/>
           <p:nvPr/>
         </p:nvSpPr>
@@ -18936,7 +19465,7 @@
       </p:sp>
       <p:sp>
         <p:nvSpPr>
-          <p:cNvPr id="68" name="02-067-rect"/>
+          <p:cNvPr id="69" name="02-068-rect"/>
           <p:cNvSpPr/>
           <p:nvPr/>
         </p:nvSpPr>
@@ -18979,7 +19508,7 @@
       </p:sp>
       <p:sp>
         <p:nvSpPr>
-          <p:cNvPr id="69" name="02-068-text"/>
+          <p:cNvPr id="70" name="02-069-text"/>
           <p:cNvSpPr txBox="1"/>
           <p:nvPr/>
         </p:nvSpPr>
@@ -19328,8 +19857,8 @@
         </p:nvSpPr>
         <p:spPr>
           <a:xfrm>
-            <a:off x="9906000" y="6610350"/>
-            <a:ext cx="133350" cy="38100"/>
+            <a:off x="9810750" y="6610350"/>
+            <a:ext cx="114300" cy="38100"/>
           </a:xfrm>
           <a:prstGeom prst="rect">
             <a:avLst/>
@@ -19371,8 +19900,8 @@
         </p:nvSpPr>
         <p:spPr>
           <a:xfrm>
-            <a:off x="10106025" y="6610350"/>
-            <a:ext cx="133350" cy="38100"/>
+            <a:off x="9991725" y="6610350"/>
+            <a:ext cx="114300" cy="38100"/>
           </a:xfrm>
           <a:prstGeom prst="rect">
             <a:avLst/>
@@ -19414,8 +19943,8 @@
         </p:nvSpPr>
         <p:spPr>
           <a:xfrm>
-            <a:off x="10306050" y="6610350"/>
-            <a:ext cx="133350" cy="38100"/>
+            <a:off x="10172700" y="6610350"/>
+            <a:ext cx="114300" cy="38100"/>
           </a:xfrm>
           <a:prstGeom prst="rect">
             <a:avLst/>
@@ -19457,8 +19986,8 @@
         </p:nvSpPr>
         <p:spPr>
           <a:xfrm>
-            <a:off x="10506075" y="6610350"/>
-            <a:ext cx="133350" cy="38100"/>
+            <a:off x="10353675" y="6610350"/>
+            <a:ext cx="114300" cy="38100"/>
           </a:xfrm>
           <a:prstGeom prst="rect">
             <a:avLst/>
@@ -19500,8 +20029,8 @@
         </p:nvSpPr>
         <p:spPr>
           <a:xfrm>
-            <a:off x="10706100" y="6610350"/>
-            <a:ext cx="133350" cy="38100"/>
+            <a:off x="10534650" y="6610350"/>
+            <a:ext cx="114300" cy="38100"/>
           </a:xfrm>
           <a:prstGeom prst="rect">
             <a:avLst/>
@@ -19543,8 +20072,8 @@
         </p:nvSpPr>
         <p:spPr>
           <a:xfrm>
-            <a:off x="10906125" y="6610350"/>
-            <a:ext cx="133350" cy="38100"/>
+            <a:off x="10715625" y="6610350"/>
+            <a:ext cx="114300" cy="38100"/>
           </a:xfrm>
           <a:prstGeom prst="rect">
             <a:avLst/>
@@ -19586,8 +20115,8 @@
         </p:nvSpPr>
         <p:spPr>
           <a:xfrm>
-            <a:off x="11106150" y="6610350"/>
-            <a:ext cx="133350" cy="38100"/>
+            <a:off x="10896600" y="6610350"/>
+            <a:ext cx="114300" cy="38100"/>
           </a:xfrm>
           <a:prstGeom prst="rect">
             <a:avLst/>
@@ -19623,7 +20152,50 @@
       </p:sp>
       <p:sp>
         <p:nvSpPr>
-          <p:cNvPr id="15" name="03-014-text"/>
+          <p:cNvPr id="15" name="03-014-rect"/>
+          <p:cNvSpPr/>
+          <p:nvPr/>
+        </p:nvSpPr>
+        <p:spPr>
+          <a:xfrm>
+            <a:off x="11077575" y="6610350"/>
+            <a:ext cx="114300" cy="38100"/>
+          </a:xfrm>
+          <a:prstGeom prst="rect">
+            <a:avLst/>
+          </a:prstGeom>
+          <a:solidFill>
+            <a:srgbClr val="D9E1EA"/>
+          </a:solidFill>
+          <a:ln>
+            <a:noFill/>
+          </a:ln>
+        </p:spPr>
+        <p:style>
+          <a:lnRef idx="1">
+            <a:schemeClr val="accent1"/>
+          </a:lnRef>
+          <a:fillRef idx="3">
+            <a:schemeClr val="accent1"/>
+          </a:fillRef>
+          <a:effectRef idx="2">
+            <a:schemeClr val="accent1"/>
+          </a:effectRef>
+          <a:fontRef idx="minor">
+            <a:schemeClr val="lt1"/>
+          </a:fontRef>
+        </p:style>
+        <p:txBody>
+          <a:bodyPr rtlCol="0" anchor="ctr"/>
+          <a:lstStyle/>
+          <a:p>
+            <a:pPr algn="ctr"/>
+          </a:p>
+        </p:txBody>
+      </p:sp>
+      <p:sp>
+        <p:nvSpPr>
+          <p:cNvPr id="16" name="03-015-text"/>
           <p:cNvSpPr txBox="1"/>
           <p:nvPr/>
         </p:nvSpPr>
@@ -19668,7 +20240,7 @@
       </p:sp>
       <p:sp>
         <p:nvSpPr>
-          <p:cNvPr id="16" name="03-015-text"/>
+          <p:cNvPr id="17" name="03-016-text"/>
           <p:cNvSpPr txBox="1"/>
           <p:nvPr/>
         </p:nvSpPr>
@@ -19713,7 +20285,7 @@
       </p:sp>
       <p:sp>
         <p:nvSpPr>
-          <p:cNvPr id="17" name="03-016-rect"/>
+          <p:cNvPr id="18" name="03-017-rect"/>
           <p:cNvSpPr/>
           <p:nvPr/>
         </p:nvSpPr>
@@ -19756,7 +20328,7 @@
       </p:sp>
       <p:sp>
         <p:nvSpPr>
-          <p:cNvPr id="18" name="03-017-text"/>
+          <p:cNvPr id="19" name="03-018-text"/>
           <p:cNvSpPr txBox="1"/>
           <p:nvPr/>
         </p:nvSpPr>
@@ -19801,7 +20373,7 @@
       </p:sp>
       <p:sp>
         <p:nvSpPr>
-          <p:cNvPr id="19" name="03-018-text"/>
+          <p:cNvPr id="20" name="03-019-text"/>
           <p:cNvSpPr txBox="1"/>
           <p:nvPr/>
         </p:nvSpPr>
@@ -19846,7 +20418,7 @@
       </p:sp>
       <p:sp>
         <p:nvSpPr>
-          <p:cNvPr id="20" name="03-019-text"/>
+          <p:cNvPr id="21" name="03-020-text"/>
           <p:cNvSpPr txBox="1"/>
           <p:nvPr/>
         </p:nvSpPr>
@@ -19891,7 +20463,7 @@
       </p:sp>
       <p:sp>
         <p:nvSpPr>
-          <p:cNvPr id="21" name="03-020-text"/>
+          <p:cNvPr id="22" name="03-021-text"/>
           <p:cNvSpPr txBox="1"/>
           <p:nvPr/>
         </p:nvSpPr>
@@ -19936,7 +20508,7 @@
       </p:sp>
       <p:sp>
         <p:nvSpPr>
-          <p:cNvPr id="22" name="03-021-text"/>
+          <p:cNvPr id="23" name="03-022-text"/>
           <p:cNvSpPr txBox="1"/>
           <p:nvPr/>
         </p:nvSpPr>
@@ -19981,7 +20553,7 @@
       </p:sp>
       <p:sp>
         <p:nvSpPr>
-          <p:cNvPr id="23" name="03-022-rect"/>
+          <p:cNvPr id="24" name="03-023-rect"/>
           <p:cNvSpPr/>
           <p:nvPr/>
         </p:nvSpPr>
@@ -20024,7 +20596,7 @@
       </p:sp>
       <p:sp>
         <p:nvSpPr>
-          <p:cNvPr id="24" name="03-023-text"/>
+          <p:cNvPr id="25" name="03-024-text"/>
           <p:cNvSpPr txBox="1"/>
           <p:nvPr/>
         </p:nvSpPr>
@@ -20069,7 +20641,7 @@
       </p:sp>
       <p:sp>
         <p:nvSpPr>
-          <p:cNvPr id="25" name="03-024-text"/>
+          <p:cNvPr id="26" name="03-025-text"/>
           <p:cNvSpPr txBox="1"/>
           <p:nvPr/>
         </p:nvSpPr>
@@ -20114,7 +20686,7 @@
       </p:sp>
       <p:sp>
         <p:nvSpPr>
-          <p:cNvPr id="26" name="03-025-text"/>
+          <p:cNvPr id="27" name="03-026-text"/>
           <p:cNvSpPr txBox="1"/>
           <p:nvPr/>
         </p:nvSpPr>
@@ -20159,7 +20731,7 @@
       </p:sp>
       <p:sp>
         <p:nvSpPr>
-          <p:cNvPr id="27" name="03-026-rect"/>
+          <p:cNvPr id="28" name="03-027-rect"/>
           <p:cNvSpPr/>
           <p:nvPr/>
         </p:nvSpPr>
@@ -20204,7 +20776,7 @@
       </p:sp>
       <p:sp>
         <p:nvSpPr>
-          <p:cNvPr id="28" name="03-027-text"/>
+          <p:cNvPr id="29" name="03-028-text"/>
           <p:cNvSpPr txBox="1"/>
           <p:nvPr/>
         </p:nvSpPr>
@@ -20249,7 +20821,7 @@
       </p:sp>
       <p:sp>
         <p:nvSpPr>
-          <p:cNvPr id="29" name="03-028-text"/>
+          <p:cNvPr id="30" name="03-029-text"/>
           <p:cNvSpPr txBox="1"/>
           <p:nvPr/>
         </p:nvSpPr>
@@ -20294,7 +20866,7 @@
       </p:sp>
       <p:sp>
         <p:nvSpPr>
-          <p:cNvPr id="30" name="03-029-rect"/>
+          <p:cNvPr id="31" name="03-030-rect"/>
           <p:cNvSpPr/>
           <p:nvPr/>
         </p:nvSpPr>
@@ -20337,7 +20909,7 @@
       </p:sp>
       <p:sp>
         <p:nvSpPr>
-          <p:cNvPr id="31" name="03-030-text"/>
+          <p:cNvPr id="32" name="03-031-text"/>
           <p:cNvSpPr txBox="1"/>
           <p:nvPr/>
         </p:nvSpPr>
@@ -20382,7 +20954,7 @@
       </p:sp>
       <p:sp>
         <p:nvSpPr>
-          <p:cNvPr id="32" name="03-031-text"/>
+          <p:cNvPr id="33" name="03-032-text"/>
           <p:cNvSpPr txBox="1"/>
           <p:nvPr/>
         </p:nvSpPr>
@@ -20427,7 +20999,7 @@
       </p:sp>
       <p:sp>
         <p:nvSpPr>
-          <p:cNvPr id="33" name="03-032-rect"/>
+          <p:cNvPr id="34" name="03-033-rect"/>
           <p:cNvSpPr/>
           <p:nvPr/>
         </p:nvSpPr>
@@ -20472,7 +21044,7 @@
       </p:sp>
       <p:sp>
         <p:nvSpPr>
-          <p:cNvPr id="34" name="03-033-text"/>
+          <p:cNvPr id="35" name="03-034-text"/>
           <p:cNvSpPr txBox="1"/>
           <p:nvPr/>
         </p:nvSpPr>
@@ -20517,7 +21089,7 @@
       </p:sp>
       <p:sp>
         <p:nvSpPr>
-          <p:cNvPr id="35" name="03-034-text"/>
+          <p:cNvPr id="36" name="03-035-text"/>
           <p:cNvSpPr txBox="1"/>
           <p:nvPr/>
         </p:nvSpPr>
@@ -20562,7 +21134,7 @@
       </p:sp>
       <p:sp>
         <p:nvSpPr>
-          <p:cNvPr id="36" name="03-035-text"/>
+          <p:cNvPr id="37" name="03-036-text"/>
           <p:cNvSpPr txBox="1"/>
           <p:nvPr/>
         </p:nvSpPr>
@@ -20607,7 +21179,7 @@
       </p:sp>
       <p:sp>
         <p:nvSpPr>
-          <p:cNvPr id="37" name="03-036-rect"/>
+          <p:cNvPr id="38" name="03-037-rect"/>
           <p:cNvSpPr/>
           <p:nvPr/>
         </p:nvSpPr>
@@ -20650,7 +21222,7 @@
       </p:sp>
       <p:sp>
         <p:nvSpPr>
-          <p:cNvPr id="38" name="03-037-text"/>
+          <p:cNvPr id="39" name="03-038-text"/>
           <p:cNvSpPr txBox="1"/>
           <p:nvPr/>
         </p:nvSpPr>
@@ -20695,7 +21267,7 @@
       </p:sp>
       <p:sp>
         <p:nvSpPr>
-          <p:cNvPr id="39" name="03-038-text"/>
+          <p:cNvPr id="40" name="03-039-text"/>
           <p:cNvSpPr txBox="1"/>
           <p:nvPr/>
         </p:nvSpPr>
@@ -20740,7 +21312,7 @@
       </p:sp>
       <p:sp>
         <p:nvSpPr>
-          <p:cNvPr id="40" name="03-039-text"/>
+          <p:cNvPr id="41" name="03-040-text"/>
           <p:cNvSpPr txBox="1"/>
           <p:nvPr/>
         </p:nvSpPr>
@@ -20785,7 +21357,7 @@
       </p:sp>
       <p:sp>
         <p:nvSpPr>
-          <p:cNvPr id="41" name="03-040-text"/>
+          <p:cNvPr id="42" name="03-041-text"/>
           <p:cNvSpPr txBox="1"/>
           <p:nvPr/>
         </p:nvSpPr>
@@ -20830,7 +21402,7 @@
       </p:sp>
       <p:sp>
         <p:nvSpPr>
-          <p:cNvPr id="42" name="03-041-text"/>
+          <p:cNvPr id="43" name="03-042-text"/>
           <p:cNvSpPr txBox="1"/>
           <p:nvPr/>
         </p:nvSpPr>
@@ -20875,7 +21447,7 @@
       </p:sp>
       <p:sp>
         <p:nvSpPr>
-          <p:cNvPr id="43" name="03-042-line"/>
+          <p:cNvPr id="44" name="03-043-line"/>
           <p:cNvSpPr/>
           <p:nvPr/>
         </p:nvSpPr>
@@ -20932,7 +21504,7 @@
       </p:sp>
       <p:sp>
         <p:nvSpPr>
-          <p:cNvPr id="44" name="03-043-line"/>
+          <p:cNvPr id="45" name="03-044-line"/>
           <p:cNvSpPr/>
           <p:nvPr/>
         </p:nvSpPr>
@@ -20989,7 +21561,7 @@
       </p:sp>
       <p:sp>
         <p:nvSpPr>
-          <p:cNvPr id="45" name="03-044-line"/>
+          <p:cNvPr id="46" name="03-045-line"/>
           <p:cNvSpPr/>
           <p:nvPr/>
         </p:nvSpPr>
@@ -21046,7 +21618,7 @@
       </p:sp>
       <p:sp>
         <p:nvSpPr>
-          <p:cNvPr id="46" name="03-045-line"/>
+          <p:cNvPr id="47" name="03-046-line"/>
           <p:cNvSpPr/>
           <p:nvPr/>
         </p:nvSpPr>
@@ -21103,7 +21675,7 @@
       </p:sp>
       <p:sp>
         <p:nvSpPr>
-          <p:cNvPr id="47" name="03-046-line"/>
+          <p:cNvPr id="48" name="03-047-line"/>
           <p:cNvSpPr/>
           <p:nvPr/>
         </p:nvSpPr>
@@ -21160,7 +21732,7 @@
       </p:sp>
       <p:sp>
         <p:nvSpPr>
-          <p:cNvPr id="48" name="03-047-line"/>
+          <p:cNvPr id="49" name="03-048-line"/>
           <p:cNvSpPr/>
           <p:nvPr/>
         </p:nvSpPr>
@@ -21217,7 +21789,7 @@
       </p:sp>
       <p:sp>
         <p:nvSpPr>
-          <p:cNvPr id="49" name="03-048-text"/>
+          <p:cNvPr id="50" name="03-049-text"/>
           <p:cNvSpPr txBox="1"/>
           <p:nvPr/>
         </p:nvSpPr>
@@ -21262,7 +21834,7 @@
       </p:sp>
       <p:sp>
         <p:nvSpPr>
-          <p:cNvPr id="50" name="03-049-text"/>
+          <p:cNvPr id="51" name="03-050-text"/>
           <p:cNvSpPr txBox="1"/>
           <p:nvPr/>
         </p:nvSpPr>
@@ -21307,7 +21879,7 @@
       </p:sp>
       <p:sp>
         <p:nvSpPr>
-          <p:cNvPr id="51" name="03-050-rect"/>
+          <p:cNvPr id="52" name="03-051-rect"/>
           <p:cNvSpPr/>
           <p:nvPr/>
         </p:nvSpPr>
@@ -21354,7 +21926,7 @@
       </p:sp>
       <p:sp>
         <p:nvSpPr>
-          <p:cNvPr id="52" name="03-051-text"/>
+          <p:cNvPr id="53" name="03-052-text"/>
           <p:cNvSpPr txBox="1"/>
           <p:nvPr/>
         </p:nvSpPr>
@@ -21399,7 +21971,7 @@
       </p:sp>
       <p:sp>
         <p:nvSpPr>
-          <p:cNvPr id="53" name="03-052-rect"/>
+          <p:cNvPr id="54" name="03-053-rect"/>
           <p:cNvSpPr/>
           <p:nvPr/>
         </p:nvSpPr>
@@ -21446,7 +22018,7 @@
       </p:sp>
       <p:sp>
         <p:nvSpPr>
-          <p:cNvPr id="54" name="03-053-text"/>
+          <p:cNvPr id="55" name="03-054-text"/>
           <p:cNvSpPr txBox="1"/>
           <p:nvPr/>
         </p:nvSpPr>
@@ -21491,7 +22063,7 @@
       </p:sp>
       <p:sp>
         <p:nvSpPr>
-          <p:cNvPr id="55" name="03-054-rect"/>
+          <p:cNvPr id="56" name="03-055-rect"/>
           <p:cNvSpPr/>
           <p:nvPr/>
         </p:nvSpPr>
@@ -21538,7 +22110,7 @@
       </p:sp>
       <p:sp>
         <p:nvSpPr>
-          <p:cNvPr id="56" name="03-055-text"/>
+          <p:cNvPr id="57" name="03-056-text"/>
           <p:cNvSpPr txBox="1"/>
           <p:nvPr/>
         </p:nvSpPr>
@@ -21583,7 +22155,7 @@
       </p:sp>
       <p:sp>
         <p:nvSpPr>
-          <p:cNvPr id="57" name="03-056-rect"/>
+          <p:cNvPr id="58" name="03-057-rect"/>
           <p:cNvSpPr/>
           <p:nvPr/>
         </p:nvSpPr>
@@ -21630,7 +22202,7 @@
       </p:sp>
       <p:sp>
         <p:nvSpPr>
-          <p:cNvPr id="58" name="03-057-text"/>
+          <p:cNvPr id="59" name="03-058-text"/>
           <p:cNvSpPr txBox="1"/>
           <p:nvPr/>
         </p:nvSpPr>
@@ -21675,7 +22247,7 @@
       </p:sp>
       <p:sp>
         <p:nvSpPr>
-          <p:cNvPr id="59" name="03-058-text"/>
+          <p:cNvPr id="60" name="03-059-text"/>
           <p:cNvSpPr txBox="1"/>
           <p:nvPr/>
         </p:nvSpPr>
@@ -21720,7 +22292,7 @@
       </p:sp>
       <p:sp>
         <p:nvSpPr>
-          <p:cNvPr id="60" name="03-059-text"/>
+          <p:cNvPr id="61" name="03-060-text"/>
           <p:cNvSpPr txBox="1"/>
           <p:nvPr/>
         </p:nvSpPr>
@@ -21765,7 +22337,7 @@
       </p:sp>
       <p:sp>
         <p:nvSpPr>
-          <p:cNvPr id="61" name="03-060-text"/>
+          <p:cNvPr id="62" name="03-061-text"/>
           <p:cNvSpPr txBox="1"/>
           <p:nvPr/>
         </p:nvSpPr>
@@ -21810,7 +22382,7 @@
       </p:sp>
       <p:sp>
         <p:nvSpPr>
-          <p:cNvPr id="62" name="03-061-text"/>
+          <p:cNvPr id="63" name="03-062-text"/>
           <p:cNvSpPr txBox="1"/>
           <p:nvPr/>
         </p:nvSpPr>
@@ -21855,7 +22427,7 @@
       </p:sp>
       <p:sp>
         <p:nvSpPr>
-          <p:cNvPr id="63" name="03-062-text"/>
+          <p:cNvPr id="64" name="03-063-text"/>
           <p:cNvSpPr txBox="1"/>
           <p:nvPr/>
         </p:nvSpPr>
@@ -21900,7 +22472,7 @@
       </p:sp>
       <p:sp>
         <p:nvSpPr>
-          <p:cNvPr id="64" name="03-063-text"/>
+          <p:cNvPr id="65" name="03-064-text"/>
           <p:cNvSpPr txBox="1"/>
           <p:nvPr/>
         </p:nvSpPr>
@@ -21945,7 +22517,7 @@
       </p:sp>
       <p:sp>
         <p:nvSpPr>
-          <p:cNvPr id="65" name="03-064-text"/>
+          <p:cNvPr id="66" name="03-065-text"/>
           <p:cNvSpPr txBox="1"/>
           <p:nvPr/>
         </p:nvSpPr>
@@ -21990,7 +22562,7 @@
       </p:sp>
       <p:sp>
         <p:nvSpPr>
-          <p:cNvPr id="66" name="03-065-line"/>
+          <p:cNvPr id="67" name="03-066-line"/>
           <p:cNvSpPr/>
           <p:nvPr/>
         </p:nvSpPr>
@@ -22048,7 +22620,7 @@
       </p:sp>
       <p:sp>
         <p:nvSpPr>
-          <p:cNvPr id="67" name="03-066-text"/>
+          <p:cNvPr id="68" name="03-067-text"/>
           <p:cNvSpPr txBox="1"/>
           <p:nvPr/>
         </p:nvSpPr>
@@ -22093,7 +22665,7 @@
       </p:sp>
       <p:sp>
         <p:nvSpPr>
-          <p:cNvPr id="68" name="03-067-text"/>
+          <p:cNvPr id="69" name="03-068-text"/>
           <p:cNvSpPr txBox="1"/>
           <p:nvPr/>
         </p:nvSpPr>
@@ -22138,7 +22710,7 @@
       </p:sp>
       <p:sp>
         <p:nvSpPr>
-          <p:cNvPr id="69" name="03-068-rect"/>
+          <p:cNvPr id="70" name="03-069-rect"/>
           <p:cNvSpPr/>
           <p:nvPr/>
         </p:nvSpPr>
@@ -22183,7 +22755,7 @@
       </p:sp>
       <p:sp>
         <p:nvSpPr>
-          <p:cNvPr id="70" name="03-069-text"/>
+          <p:cNvPr id="71" name="03-070-text"/>
           <p:cNvSpPr txBox="1"/>
           <p:nvPr/>
         </p:nvSpPr>
@@ -22228,7 +22800,7 @@
       </p:sp>
       <p:sp>
         <p:nvSpPr>
-          <p:cNvPr id="71" name="03-070-rect"/>
+          <p:cNvPr id="72" name="03-071-rect"/>
           <p:cNvSpPr/>
           <p:nvPr/>
         </p:nvSpPr>
@@ -22275,7 +22847,7 @@
       </p:sp>
       <p:sp>
         <p:nvSpPr>
-          <p:cNvPr id="72" name="03-071-text"/>
+          <p:cNvPr id="73" name="03-072-text"/>
           <p:cNvSpPr txBox="1"/>
           <p:nvPr/>
         </p:nvSpPr>
@@ -22320,7 +22892,7 @@
       </p:sp>
       <p:sp>
         <p:nvSpPr>
-          <p:cNvPr id="73" name="03-072-rect"/>
+          <p:cNvPr id="74" name="03-073-rect"/>
           <p:cNvSpPr/>
           <p:nvPr/>
         </p:nvSpPr>
@@ -22367,7 +22939,7 @@
       </p:sp>
       <p:sp>
         <p:nvSpPr>
-          <p:cNvPr id="74" name="03-073-text"/>
+          <p:cNvPr id="75" name="03-074-text"/>
           <p:cNvSpPr txBox="1"/>
           <p:nvPr/>
         </p:nvSpPr>
@@ -22412,7 +22984,7 @@
       </p:sp>
       <p:sp>
         <p:nvSpPr>
-          <p:cNvPr id="75" name="03-074-rect"/>
+          <p:cNvPr id="76" name="03-075-rect"/>
           <p:cNvSpPr/>
           <p:nvPr/>
         </p:nvSpPr>
@@ -22459,7 +23031,7 @@
       </p:sp>
       <p:sp>
         <p:nvSpPr>
-          <p:cNvPr id="76" name="03-075-text"/>
+          <p:cNvPr id="77" name="03-076-text"/>
           <p:cNvSpPr txBox="1"/>
           <p:nvPr/>
         </p:nvSpPr>
@@ -22504,7 +23076,7 @@
       </p:sp>
       <p:sp>
         <p:nvSpPr>
-          <p:cNvPr id="77" name="03-076-text"/>
+          <p:cNvPr id="78" name="03-077-text"/>
           <p:cNvSpPr txBox="1"/>
           <p:nvPr/>
         </p:nvSpPr>
@@ -22549,7 +23121,7 @@
       </p:sp>
       <p:sp>
         <p:nvSpPr>
-          <p:cNvPr id="78" name="03-077-rect"/>
+          <p:cNvPr id="79" name="03-078-rect"/>
           <p:cNvSpPr/>
           <p:nvPr/>
         </p:nvSpPr>
@@ -22594,7 +23166,7 @@
       </p:sp>
       <p:sp>
         <p:nvSpPr>
-          <p:cNvPr id="79" name="03-078-text"/>
+          <p:cNvPr id="80" name="03-079-text"/>
           <p:cNvSpPr txBox="1"/>
           <p:nvPr/>
         </p:nvSpPr>
@@ -22639,7 +23211,7 @@
       </p:sp>
       <p:sp>
         <p:nvSpPr>
-          <p:cNvPr id="80" name="03-079-rect"/>
+          <p:cNvPr id="81" name="03-080-rect"/>
           <p:cNvSpPr/>
           <p:nvPr/>
         </p:nvSpPr>
@@ -22686,7 +23258,7 @@
       </p:sp>
       <p:sp>
         <p:nvSpPr>
-          <p:cNvPr id="81" name="03-080-text"/>
+          <p:cNvPr id="82" name="03-081-text"/>
           <p:cNvSpPr txBox="1"/>
           <p:nvPr/>
         </p:nvSpPr>
@@ -22731,7 +23303,7 @@
       </p:sp>
       <p:sp>
         <p:nvSpPr>
-          <p:cNvPr id="82" name="03-081-rect"/>
+          <p:cNvPr id="83" name="03-082-rect"/>
           <p:cNvSpPr/>
           <p:nvPr/>
         </p:nvSpPr>
@@ -22778,7 +23350,7 @@
       </p:sp>
       <p:sp>
         <p:nvSpPr>
-          <p:cNvPr id="83" name="03-082-text"/>
+          <p:cNvPr id="84" name="03-083-text"/>
           <p:cNvSpPr txBox="1"/>
           <p:nvPr/>
         </p:nvSpPr>
@@ -22823,7 +23395,7 @@
       </p:sp>
       <p:sp>
         <p:nvSpPr>
-          <p:cNvPr id="84" name="03-083-rect"/>
+          <p:cNvPr id="85" name="03-084-rect"/>
           <p:cNvSpPr/>
           <p:nvPr/>
         </p:nvSpPr>
@@ -22870,7 +23442,7 @@
       </p:sp>
       <p:sp>
         <p:nvSpPr>
-          <p:cNvPr id="85" name="03-084-text"/>
+          <p:cNvPr id="86" name="03-085-text"/>
           <p:cNvSpPr txBox="1"/>
           <p:nvPr/>
         </p:nvSpPr>
@@ -22915,7 +23487,7 @@
       </p:sp>
       <p:sp>
         <p:nvSpPr>
-          <p:cNvPr id="86" name="03-085-text"/>
+          <p:cNvPr id="87" name="03-086-text"/>
           <p:cNvSpPr txBox="1"/>
           <p:nvPr/>
         </p:nvSpPr>
@@ -22960,7 +23532,7 @@
       </p:sp>
       <p:sp>
         <p:nvSpPr>
-          <p:cNvPr id="87" name="03-086-rect"/>
+          <p:cNvPr id="88" name="03-087-rect"/>
           <p:cNvSpPr/>
           <p:nvPr/>
         </p:nvSpPr>
@@ -23005,7 +23577,7 @@
       </p:sp>
       <p:sp>
         <p:nvSpPr>
-          <p:cNvPr id="88" name="03-087-rect"/>
+          <p:cNvPr id="89" name="03-088-rect"/>
           <p:cNvSpPr/>
           <p:nvPr/>
         </p:nvSpPr>
@@ -23048,7 +23620,7 @@
       </p:sp>
       <p:sp>
         <p:nvSpPr>
-          <p:cNvPr id="89" name="03-088-text"/>
+          <p:cNvPr id="90" name="03-089-text"/>
           <p:cNvSpPr txBox="1"/>
           <p:nvPr/>
         </p:nvSpPr>
@@ -23093,7 +23665,7 @@
       </p:sp>
       <p:sp>
         <p:nvSpPr>
-          <p:cNvPr id="90" name="03-089-text"/>
+          <p:cNvPr id="91" name="03-090-text"/>
           <p:cNvSpPr txBox="1"/>
           <p:nvPr/>
         </p:nvSpPr>
@@ -23442,8 +24014,8 @@
         </p:nvSpPr>
         <p:spPr>
           <a:xfrm>
-            <a:off x="9906000" y="6610350"/>
-            <a:ext cx="133350" cy="38100"/>
+            <a:off x="9810750" y="6610350"/>
+            <a:ext cx="114300" cy="38100"/>
           </a:xfrm>
           <a:prstGeom prst="rect">
             <a:avLst/>
@@ -23485,8 +24057,8 @@
         </p:nvSpPr>
         <p:spPr>
           <a:xfrm>
-            <a:off x="10106025" y="6610350"/>
-            <a:ext cx="133350" cy="38100"/>
+            <a:off x="9991725" y="6610350"/>
+            <a:ext cx="114300" cy="38100"/>
           </a:xfrm>
           <a:prstGeom prst="rect">
             <a:avLst/>
@@ -23528,8 +24100,8 @@
         </p:nvSpPr>
         <p:spPr>
           <a:xfrm>
-            <a:off x="10306050" y="6610350"/>
-            <a:ext cx="133350" cy="38100"/>
+            <a:off x="10172700" y="6610350"/>
+            <a:ext cx="114300" cy="38100"/>
           </a:xfrm>
           <a:prstGeom prst="rect">
             <a:avLst/>
@@ -23571,8 +24143,8 @@
         </p:nvSpPr>
         <p:spPr>
           <a:xfrm>
-            <a:off x="10506075" y="6610350"/>
-            <a:ext cx="133350" cy="38100"/>
+            <a:off x="10353675" y="6610350"/>
+            <a:ext cx="114300" cy="38100"/>
           </a:xfrm>
           <a:prstGeom prst="rect">
             <a:avLst/>
@@ -23614,8 +24186,8 @@
         </p:nvSpPr>
         <p:spPr>
           <a:xfrm>
-            <a:off x="10706100" y="6610350"/>
-            <a:ext cx="133350" cy="38100"/>
+            <a:off x="10534650" y="6610350"/>
+            <a:ext cx="114300" cy="38100"/>
           </a:xfrm>
           <a:prstGeom prst="rect">
             <a:avLst/>
@@ -23657,8 +24229,8 @@
         </p:nvSpPr>
         <p:spPr>
           <a:xfrm>
-            <a:off x="10906125" y="6610350"/>
-            <a:ext cx="133350" cy="38100"/>
+            <a:off x="10715625" y="6610350"/>
+            <a:ext cx="114300" cy="38100"/>
           </a:xfrm>
           <a:prstGeom prst="rect">
             <a:avLst/>
@@ -23700,8 +24272,8 @@
         </p:nvSpPr>
         <p:spPr>
           <a:xfrm>
-            <a:off x="11106150" y="6610350"/>
-            <a:ext cx="133350" cy="38100"/>
+            <a:off x="10896600" y="6610350"/>
+            <a:ext cx="114300" cy="38100"/>
           </a:xfrm>
           <a:prstGeom prst="rect">
             <a:avLst/>
@@ -23737,7 +24309,50 @@
       </p:sp>
       <p:sp>
         <p:nvSpPr>
-          <p:cNvPr id="15" name="04-014-text"/>
+          <p:cNvPr id="15" name="04-014-rect"/>
+          <p:cNvSpPr/>
+          <p:nvPr/>
+        </p:nvSpPr>
+        <p:spPr>
+          <a:xfrm>
+            <a:off x="11077575" y="6610350"/>
+            <a:ext cx="114300" cy="38100"/>
+          </a:xfrm>
+          <a:prstGeom prst="rect">
+            <a:avLst/>
+          </a:prstGeom>
+          <a:solidFill>
+            <a:srgbClr val="D9E1EA"/>
+          </a:solidFill>
+          <a:ln>
+            <a:noFill/>
+          </a:ln>
+        </p:spPr>
+        <p:style>
+          <a:lnRef idx="1">
+            <a:schemeClr val="accent1"/>
+          </a:lnRef>
+          <a:fillRef idx="3">
+            <a:schemeClr val="accent1"/>
+          </a:fillRef>
+          <a:effectRef idx="2">
+            <a:schemeClr val="accent1"/>
+          </a:effectRef>
+          <a:fontRef idx="minor">
+            <a:schemeClr val="lt1"/>
+          </a:fontRef>
+        </p:style>
+        <p:txBody>
+          <a:bodyPr rtlCol="0" anchor="ctr"/>
+          <a:lstStyle/>
+          <a:p>
+            <a:pPr algn="ctr"/>
+          </a:p>
+        </p:txBody>
+      </p:sp>
+      <p:sp>
+        <p:nvSpPr>
+          <p:cNvPr id="16" name="04-015-text"/>
           <p:cNvSpPr txBox="1"/>
           <p:nvPr/>
         </p:nvSpPr>
@@ -23782,7 +24397,7 @@
       </p:sp>
       <p:sp>
         <p:nvSpPr>
-          <p:cNvPr id="16" name="04-015-rect"/>
+          <p:cNvPr id="17" name="04-016-rect"/>
           <p:cNvSpPr/>
           <p:nvPr/>
         </p:nvSpPr>
@@ -23829,7 +24444,7 @@
       </p:sp>
       <p:sp>
         <p:nvSpPr>
-          <p:cNvPr id="17" name="04-016-text"/>
+          <p:cNvPr id="18" name="04-017-text"/>
           <p:cNvSpPr txBox="1"/>
           <p:nvPr/>
         </p:nvSpPr>
@@ -23874,7 +24489,7 @@
       </p:sp>
       <p:sp>
         <p:nvSpPr>
-          <p:cNvPr id="18" name="04-017-rect"/>
+          <p:cNvPr id="19" name="04-018-rect"/>
           <p:cNvSpPr/>
           <p:nvPr/>
         </p:nvSpPr>
@@ -23921,7 +24536,7 @@
       </p:sp>
       <p:sp>
         <p:nvSpPr>
-          <p:cNvPr id="19" name="04-018-text"/>
+          <p:cNvPr id="20" name="04-019-text"/>
           <p:cNvSpPr txBox="1"/>
           <p:nvPr/>
         </p:nvSpPr>
@@ -23966,7 +24581,7 @@
       </p:sp>
       <p:sp>
         <p:nvSpPr>
-          <p:cNvPr id="20" name="04-019-rect"/>
+          <p:cNvPr id="21" name="04-020-rect"/>
           <p:cNvSpPr/>
           <p:nvPr/>
         </p:nvSpPr>
@@ -24013,7 +24628,7 @@
       </p:sp>
       <p:sp>
         <p:nvSpPr>
-          <p:cNvPr id="21" name="04-020-text"/>
+          <p:cNvPr id="22" name="04-021-text"/>
           <p:cNvSpPr txBox="1"/>
           <p:nvPr/>
         </p:nvSpPr>
@@ -24058,7 +24673,7 @@
       </p:sp>
       <p:sp>
         <p:nvSpPr>
-          <p:cNvPr id="22" name="04-021-rect"/>
+          <p:cNvPr id="23" name="04-022-rect"/>
           <p:cNvSpPr/>
           <p:nvPr/>
         </p:nvSpPr>
@@ -24105,7 +24720,7 @@
       </p:sp>
       <p:sp>
         <p:nvSpPr>
-          <p:cNvPr id="23" name="04-022-text"/>
+          <p:cNvPr id="24" name="04-023-text"/>
           <p:cNvSpPr txBox="1"/>
           <p:nvPr/>
         </p:nvSpPr>
@@ -24150,7 +24765,7 @@
       </p:sp>
       <p:sp>
         <p:nvSpPr>
-          <p:cNvPr id="24" name="04-023-rect"/>
+          <p:cNvPr id="25" name="04-024-rect"/>
           <p:cNvSpPr/>
           <p:nvPr/>
         </p:nvSpPr>
@@ -24197,7 +24812,7 @@
       </p:sp>
       <p:sp>
         <p:nvSpPr>
-          <p:cNvPr id="25" name="04-024-text"/>
+          <p:cNvPr id="26" name="04-025-text"/>
           <p:cNvSpPr txBox="1"/>
           <p:nvPr/>
         </p:nvSpPr>
@@ -24242,7 +24857,7 @@
       </p:sp>
       <p:sp>
         <p:nvSpPr>
-          <p:cNvPr id="26" name="04-025-rect"/>
+          <p:cNvPr id="27" name="04-026-rect"/>
           <p:cNvSpPr/>
           <p:nvPr/>
         </p:nvSpPr>
@@ -24289,7 +24904,7 @@
       </p:sp>
       <p:sp>
         <p:nvSpPr>
-          <p:cNvPr id="27" name="04-026-text"/>
+          <p:cNvPr id="28" name="04-027-text"/>
           <p:cNvSpPr txBox="1"/>
           <p:nvPr/>
         </p:nvSpPr>
@@ -24334,7 +24949,7 @@
       </p:sp>
       <p:sp>
         <p:nvSpPr>
-          <p:cNvPr id="28" name="04-027-text"/>
+          <p:cNvPr id="29" name="04-028-text"/>
           <p:cNvSpPr txBox="1"/>
           <p:nvPr/>
         </p:nvSpPr>
@@ -24379,7 +24994,7 @@
       </p:sp>
       <p:sp>
         <p:nvSpPr>
-          <p:cNvPr id="29" name="04-028-text"/>
+          <p:cNvPr id="30" name="04-029-text"/>
           <p:cNvSpPr txBox="1"/>
           <p:nvPr/>
         </p:nvSpPr>
@@ -24424,7 +25039,7 @@
       </p:sp>
       <p:sp>
         <p:nvSpPr>
-          <p:cNvPr id="30" name="04-029-text"/>
+          <p:cNvPr id="31" name="04-030-text"/>
           <p:cNvSpPr txBox="1"/>
           <p:nvPr/>
         </p:nvSpPr>
@@ -24469,7 +25084,7 @@
       </p:sp>
       <p:sp>
         <p:nvSpPr>
-          <p:cNvPr id="31" name="04-030-text"/>
+          <p:cNvPr id="32" name="04-031-text"/>
           <p:cNvSpPr txBox="1"/>
           <p:nvPr/>
         </p:nvSpPr>
@@ -24514,7 +25129,7 @@
       </p:sp>
       <p:sp>
         <p:nvSpPr>
-          <p:cNvPr id="32" name="04-031-text"/>
+          <p:cNvPr id="33" name="04-032-text"/>
           <p:cNvSpPr txBox="1"/>
           <p:nvPr/>
         </p:nvSpPr>
@@ -24559,7 +25174,7 @@
       </p:sp>
       <p:sp>
         <p:nvSpPr>
-          <p:cNvPr id="33" name="04-032-rect"/>
+          <p:cNvPr id="34" name="04-033-rect"/>
           <p:cNvSpPr/>
           <p:nvPr/>
         </p:nvSpPr>
@@ -24606,7 +25221,7 @@
       </p:sp>
       <p:sp>
         <p:nvSpPr>
-          <p:cNvPr id="34" name="04-033-text"/>
+          <p:cNvPr id="35" name="04-034-text"/>
           <p:cNvSpPr txBox="1"/>
           <p:nvPr/>
         </p:nvSpPr>
@@ -24651,7 +25266,7 @@
       </p:sp>
       <p:sp>
         <p:nvSpPr>
-          <p:cNvPr id="35" name="04-034-rect"/>
+          <p:cNvPr id="36" name="04-035-rect"/>
           <p:cNvSpPr/>
           <p:nvPr/>
         </p:nvSpPr>
@@ -24698,7 +25313,7 @@
       </p:sp>
       <p:sp>
         <p:nvSpPr>
-          <p:cNvPr id="36" name="04-035-text"/>
+          <p:cNvPr id="37" name="04-036-text"/>
           <p:cNvSpPr txBox="1"/>
           <p:nvPr/>
         </p:nvSpPr>
@@ -24743,7 +25358,7 @@
       </p:sp>
       <p:sp>
         <p:nvSpPr>
-          <p:cNvPr id="37" name="04-036-rect"/>
+          <p:cNvPr id="38" name="04-037-rect"/>
           <p:cNvSpPr/>
           <p:nvPr/>
         </p:nvSpPr>
@@ -24790,7 +25405,7 @@
       </p:sp>
       <p:sp>
         <p:nvSpPr>
-          <p:cNvPr id="38" name="04-037-text"/>
+          <p:cNvPr id="39" name="04-038-text"/>
           <p:cNvSpPr txBox="1"/>
           <p:nvPr/>
         </p:nvSpPr>
@@ -24835,7 +25450,7 @@
       </p:sp>
       <p:sp>
         <p:nvSpPr>
-          <p:cNvPr id="39" name="04-038-text"/>
+          <p:cNvPr id="40" name="04-039-text"/>
           <p:cNvSpPr txBox="1"/>
           <p:nvPr/>
         </p:nvSpPr>
@@ -24880,7 +25495,7 @@
       </p:sp>
       <p:sp>
         <p:nvSpPr>
-          <p:cNvPr id="40" name="04-039-line"/>
+          <p:cNvPr id="41" name="04-040-line"/>
           <p:cNvSpPr/>
           <p:nvPr/>
         </p:nvSpPr>
@@ -24937,7 +25552,7 @@
       </p:sp>
       <p:sp>
         <p:nvSpPr>
-          <p:cNvPr id="41" name="04-040-poly"/>
+          <p:cNvPr id="42" name="04-041-poly"/>
           <p:cNvSpPr/>
           <p:nvPr/>
         </p:nvSpPr>
@@ -24998,7 +25613,7 @@
       </p:sp>
       <p:sp>
         <p:nvSpPr>
-          <p:cNvPr id="42" name="04-041-line"/>
+          <p:cNvPr id="43" name="04-042-line"/>
           <p:cNvSpPr/>
           <p:nvPr/>
         </p:nvSpPr>
@@ -25055,7 +25670,7 @@
       </p:sp>
       <p:sp>
         <p:nvSpPr>
-          <p:cNvPr id="43" name="04-042-poly"/>
+          <p:cNvPr id="44" name="04-043-poly"/>
           <p:cNvSpPr/>
           <p:nvPr/>
         </p:nvSpPr>
@@ -25116,7 +25731,7 @@
       </p:sp>
       <p:sp>
         <p:nvSpPr>
-          <p:cNvPr id="44" name="04-043-text"/>
+          <p:cNvPr id="45" name="04-044-text"/>
           <p:cNvSpPr txBox="1"/>
           <p:nvPr/>
         </p:nvSpPr>
@@ -25161,7 +25776,7 @@
       </p:sp>
       <p:sp>
         <p:nvSpPr>
-          <p:cNvPr id="45" name="04-044-rect"/>
+          <p:cNvPr id="46" name="04-045-rect"/>
           <p:cNvSpPr/>
           <p:nvPr/>
         </p:nvSpPr>
@@ -25206,7 +25821,7 @@
       </p:sp>
       <p:sp>
         <p:nvSpPr>
-          <p:cNvPr id="46" name="04-045-text"/>
+          <p:cNvPr id="47" name="04-046-text"/>
           <p:cNvSpPr txBox="1"/>
           <p:nvPr/>
         </p:nvSpPr>
@@ -25251,7 +25866,7 @@
       </p:sp>
       <p:sp>
         <p:nvSpPr>
-          <p:cNvPr id="47" name="04-046-text"/>
+          <p:cNvPr id="48" name="04-047-text"/>
           <p:cNvSpPr txBox="1"/>
           <p:nvPr/>
         </p:nvSpPr>
@@ -25296,7 +25911,7 @@
       </p:sp>
       <p:sp>
         <p:nvSpPr>
-          <p:cNvPr id="48" name="04-047-rect"/>
+          <p:cNvPr id="49" name="04-048-rect"/>
           <p:cNvSpPr/>
           <p:nvPr/>
         </p:nvSpPr>
@@ -25341,7 +25956,7 @@
       </p:sp>
       <p:sp>
         <p:nvSpPr>
-          <p:cNvPr id="49" name="04-048-text"/>
+          <p:cNvPr id="50" name="04-049-text"/>
           <p:cNvSpPr txBox="1"/>
           <p:nvPr/>
         </p:nvSpPr>
@@ -25386,7 +26001,7 @@
       </p:sp>
       <p:sp>
         <p:nvSpPr>
-          <p:cNvPr id="50" name="04-049-text"/>
+          <p:cNvPr id="51" name="04-050-text"/>
           <p:cNvSpPr txBox="1"/>
           <p:nvPr/>
         </p:nvSpPr>
@@ -25431,7 +26046,7 @@
       </p:sp>
       <p:sp>
         <p:nvSpPr>
-          <p:cNvPr id="51" name="04-050-rect"/>
+          <p:cNvPr id="52" name="04-051-rect"/>
           <p:cNvSpPr/>
           <p:nvPr/>
         </p:nvSpPr>
@@ -25476,7 +26091,7 @@
       </p:sp>
       <p:sp>
         <p:nvSpPr>
-          <p:cNvPr id="52" name="04-051-rect"/>
+          <p:cNvPr id="53" name="04-052-rect"/>
           <p:cNvSpPr/>
           <p:nvPr/>
         </p:nvSpPr>
@@ -25519,7 +26134,7 @@
       </p:sp>
       <p:sp>
         <p:nvSpPr>
-          <p:cNvPr id="53" name="04-052-text"/>
+          <p:cNvPr id="54" name="04-053-text"/>
           <p:cNvSpPr txBox="1"/>
           <p:nvPr/>
         </p:nvSpPr>
@@ -25868,8 +26483,8 @@
         </p:nvSpPr>
         <p:spPr>
           <a:xfrm>
-            <a:off x="9906000" y="6610350"/>
-            <a:ext cx="133350" cy="38100"/>
+            <a:off x="9810750" y="6610350"/>
+            <a:ext cx="114300" cy="38100"/>
           </a:xfrm>
           <a:prstGeom prst="rect">
             <a:avLst/>
@@ -25911,8 +26526,8 @@
         </p:nvSpPr>
         <p:spPr>
           <a:xfrm>
-            <a:off x="10106025" y="6610350"/>
-            <a:ext cx="133350" cy="38100"/>
+            <a:off x="9991725" y="6610350"/>
+            <a:ext cx="114300" cy="38100"/>
           </a:xfrm>
           <a:prstGeom prst="rect">
             <a:avLst/>
@@ -25954,8 +26569,8 @@
         </p:nvSpPr>
         <p:spPr>
           <a:xfrm>
-            <a:off x="10306050" y="6610350"/>
-            <a:ext cx="133350" cy="38100"/>
+            <a:off x="10172700" y="6610350"/>
+            <a:ext cx="114300" cy="38100"/>
           </a:xfrm>
           <a:prstGeom prst="rect">
             <a:avLst/>
@@ -25997,8 +26612,8 @@
         </p:nvSpPr>
         <p:spPr>
           <a:xfrm>
-            <a:off x="10506075" y="6610350"/>
-            <a:ext cx="133350" cy="38100"/>
+            <a:off x="10353675" y="6610350"/>
+            <a:ext cx="114300" cy="38100"/>
           </a:xfrm>
           <a:prstGeom prst="rect">
             <a:avLst/>
@@ -26040,8 +26655,8 @@
         </p:nvSpPr>
         <p:spPr>
           <a:xfrm>
-            <a:off x="10706100" y="6610350"/>
-            <a:ext cx="133350" cy="38100"/>
+            <a:off x="10534650" y="6610350"/>
+            <a:ext cx="114300" cy="38100"/>
           </a:xfrm>
           <a:prstGeom prst="rect">
             <a:avLst/>
@@ -26083,8 +26698,8 @@
         </p:nvSpPr>
         <p:spPr>
           <a:xfrm>
-            <a:off x="10906125" y="6610350"/>
-            <a:ext cx="133350" cy="38100"/>
+            <a:off x="10715625" y="6610350"/>
+            <a:ext cx="114300" cy="38100"/>
           </a:xfrm>
           <a:prstGeom prst="rect">
             <a:avLst/>
@@ -26126,8 +26741,8 @@
         </p:nvSpPr>
         <p:spPr>
           <a:xfrm>
-            <a:off x="11106150" y="6610350"/>
-            <a:ext cx="133350" cy="38100"/>
+            <a:off x="10896600" y="6610350"/>
+            <a:ext cx="114300" cy="38100"/>
           </a:xfrm>
           <a:prstGeom prst="rect">
             <a:avLst/>
@@ -26163,7 +26778,50 @@
       </p:sp>
       <p:sp>
         <p:nvSpPr>
-          <p:cNvPr id="15" name="05-014-text"/>
+          <p:cNvPr id="15" name="05-014-rect"/>
+          <p:cNvSpPr/>
+          <p:nvPr/>
+        </p:nvSpPr>
+        <p:spPr>
+          <a:xfrm>
+            <a:off x="11077575" y="6610350"/>
+            <a:ext cx="114300" cy="38100"/>
+          </a:xfrm>
+          <a:prstGeom prst="rect">
+            <a:avLst/>
+          </a:prstGeom>
+          <a:solidFill>
+            <a:srgbClr val="D9E1EA"/>
+          </a:solidFill>
+          <a:ln>
+            <a:noFill/>
+          </a:ln>
+        </p:spPr>
+        <p:style>
+          <a:lnRef idx="1">
+            <a:schemeClr val="accent1"/>
+          </a:lnRef>
+          <a:fillRef idx="3">
+            <a:schemeClr val="accent1"/>
+          </a:fillRef>
+          <a:effectRef idx="2">
+            <a:schemeClr val="accent1"/>
+          </a:effectRef>
+          <a:fontRef idx="minor">
+            <a:schemeClr val="lt1"/>
+          </a:fontRef>
+        </p:style>
+        <p:txBody>
+          <a:bodyPr rtlCol="0" anchor="ctr"/>
+          <a:lstStyle/>
+          <a:p>
+            <a:pPr algn="ctr"/>
+          </a:p>
+        </p:txBody>
+      </p:sp>
+      <p:sp>
+        <p:nvSpPr>
+          <p:cNvPr id="16" name="05-015-text"/>
           <p:cNvSpPr txBox="1"/>
           <p:nvPr/>
         </p:nvSpPr>
@@ -26208,7 +26866,7 @@
       </p:sp>
       <p:sp>
         <p:nvSpPr>
-          <p:cNvPr id="16" name="05-015-line"/>
+          <p:cNvPr id="17" name="05-016-line"/>
           <p:cNvSpPr/>
           <p:nvPr/>
         </p:nvSpPr>
@@ -26265,7 +26923,7 @@
       </p:sp>
       <p:sp>
         <p:nvSpPr>
-          <p:cNvPr id="17" name="05-016-line"/>
+          <p:cNvPr id="18" name="05-017-line"/>
           <p:cNvSpPr/>
           <p:nvPr/>
         </p:nvSpPr>
@@ -26322,7 +26980,7 @@
       </p:sp>
       <p:sp>
         <p:nvSpPr>
-          <p:cNvPr id="18" name="05-017-line"/>
+          <p:cNvPr id="19" name="05-018-line"/>
           <p:cNvSpPr/>
           <p:nvPr/>
         </p:nvSpPr>
@@ -26379,7 +27037,7 @@
       </p:sp>
       <p:sp>
         <p:nvSpPr>
-          <p:cNvPr id="19" name="05-018-line"/>
+          <p:cNvPr id="20" name="05-019-line"/>
           <p:cNvSpPr/>
           <p:nvPr/>
         </p:nvSpPr>
@@ -26436,7 +27094,7 @@
       </p:sp>
       <p:sp>
         <p:nvSpPr>
-          <p:cNvPr id="20" name="05-019-line"/>
+          <p:cNvPr id="21" name="05-020-line"/>
           <p:cNvSpPr/>
           <p:nvPr/>
         </p:nvSpPr>
@@ -26493,7 +27151,7 @@
       </p:sp>
       <p:sp>
         <p:nvSpPr>
-          <p:cNvPr id="21" name="05-020-line"/>
+          <p:cNvPr id="22" name="05-021-line"/>
           <p:cNvSpPr/>
           <p:nvPr/>
         </p:nvSpPr>
@@ -26550,7 +27208,7 @@
       </p:sp>
       <p:sp>
         <p:nvSpPr>
-          <p:cNvPr id="22" name="05-021-line"/>
+          <p:cNvPr id="23" name="05-022-line"/>
           <p:cNvSpPr/>
           <p:nvPr/>
         </p:nvSpPr>
@@ -26607,7 +27265,7 @@
       </p:sp>
       <p:sp>
         <p:nvSpPr>
-          <p:cNvPr id="23" name="05-022-line"/>
+          <p:cNvPr id="24" name="05-023-line"/>
           <p:cNvSpPr/>
           <p:nvPr/>
         </p:nvSpPr>
@@ -26664,7 +27322,7 @@
       </p:sp>
       <p:sp>
         <p:nvSpPr>
-          <p:cNvPr id="24" name="05-023-line"/>
+          <p:cNvPr id="25" name="05-024-line"/>
           <p:cNvSpPr/>
           <p:nvPr/>
         </p:nvSpPr>
@@ -26721,7 +27379,7 @@
       </p:sp>
       <p:sp>
         <p:nvSpPr>
-          <p:cNvPr id="25" name="05-024-rect"/>
+          <p:cNvPr id="26" name="05-025-rect"/>
           <p:cNvSpPr/>
           <p:nvPr/>
         </p:nvSpPr>
@@ -26768,7 +27426,7 @@
       </p:sp>
       <p:sp>
         <p:nvSpPr>
-          <p:cNvPr id="26" name="05-025-text"/>
+          <p:cNvPr id="27" name="05-026-text"/>
           <p:cNvSpPr txBox="1"/>
           <p:nvPr/>
         </p:nvSpPr>
@@ -26813,7 +27471,7 @@
       </p:sp>
       <p:sp>
         <p:nvSpPr>
-          <p:cNvPr id="27" name="05-026-rect"/>
+          <p:cNvPr id="28" name="05-027-rect"/>
           <p:cNvSpPr/>
           <p:nvPr/>
         </p:nvSpPr>
@@ -26860,7 +27518,7 @@
       </p:sp>
       <p:sp>
         <p:nvSpPr>
-          <p:cNvPr id="28" name="05-027-text"/>
+          <p:cNvPr id="29" name="05-028-text"/>
           <p:cNvSpPr txBox="1"/>
           <p:nvPr/>
         </p:nvSpPr>
@@ -26905,7 +27563,7 @@
       </p:sp>
       <p:sp>
         <p:nvSpPr>
-          <p:cNvPr id="29" name="05-028-rect"/>
+          <p:cNvPr id="30" name="05-029-rect"/>
           <p:cNvSpPr/>
           <p:nvPr/>
         </p:nvSpPr>
@@ -26952,7 +27610,7 @@
       </p:sp>
       <p:sp>
         <p:nvSpPr>
-          <p:cNvPr id="30" name="05-029-text"/>
+          <p:cNvPr id="31" name="05-030-text"/>
           <p:cNvSpPr txBox="1"/>
           <p:nvPr/>
         </p:nvSpPr>
@@ -26997,7 +27655,7 @@
       </p:sp>
       <p:sp>
         <p:nvSpPr>
-          <p:cNvPr id="31" name="05-030-rect"/>
+          <p:cNvPr id="32" name="05-031-rect"/>
           <p:cNvSpPr/>
           <p:nvPr/>
         </p:nvSpPr>
@@ -27044,7 +27702,7 @@
       </p:sp>
       <p:sp>
         <p:nvSpPr>
-          <p:cNvPr id="32" name="05-031-text"/>
+          <p:cNvPr id="33" name="05-032-text"/>
           <p:cNvSpPr txBox="1"/>
           <p:nvPr/>
         </p:nvSpPr>
@@ -27089,7 +27747,7 @@
       </p:sp>
       <p:sp>
         <p:nvSpPr>
-          <p:cNvPr id="33" name="05-032-rect"/>
+          <p:cNvPr id="34" name="05-033-rect"/>
           <p:cNvSpPr/>
           <p:nvPr/>
         </p:nvSpPr>
@@ -27136,7 +27794,7 @@
       </p:sp>
       <p:sp>
         <p:nvSpPr>
-          <p:cNvPr id="34" name="05-033-text"/>
+          <p:cNvPr id="35" name="05-034-text"/>
           <p:cNvSpPr txBox="1"/>
           <p:nvPr/>
         </p:nvSpPr>
@@ -27181,7 +27839,7 @@
       </p:sp>
       <p:sp>
         <p:nvSpPr>
-          <p:cNvPr id="35" name="05-034-rect"/>
+          <p:cNvPr id="36" name="05-035-rect"/>
           <p:cNvSpPr/>
           <p:nvPr/>
         </p:nvSpPr>
@@ -27228,7 +27886,7 @@
       </p:sp>
       <p:sp>
         <p:nvSpPr>
-          <p:cNvPr id="36" name="05-035-text"/>
+          <p:cNvPr id="37" name="05-036-text"/>
           <p:cNvSpPr txBox="1"/>
           <p:nvPr/>
         </p:nvSpPr>
@@ -27273,7 +27931,7 @@
       </p:sp>
       <p:sp>
         <p:nvSpPr>
-          <p:cNvPr id="37" name="05-036-rect"/>
+          <p:cNvPr id="38" name="05-037-rect"/>
           <p:cNvSpPr/>
           <p:nvPr/>
         </p:nvSpPr>
@@ -27320,7 +27978,7 @@
       </p:sp>
       <p:sp>
         <p:nvSpPr>
-          <p:cNvPr id="38" name="05-037-text"/>
+          <p:cNvPr id="39" name="05-038-text"/>
           <p:cNvSpPr txBox="1"/>
           <p:nvPr/>
         </p:nvSpPr>
@@ -27365,7 +28023,7 @@
       </p:sp>
       <p:sp>
         <p:nvSpPr>
-          <p:cNvPr id="39" name="05-038-rect"/>
+          <p:cNvPr id="40" name="05-039-rect"/>
           <p:cNvSpPr/>
           <p:nvPr/>
         </p:nvSpPr>
@@ -27408,7 +28066,7 @@
       </p:sp>
       <p:sp>
         <p:nvSpPr>
-          <p:cNvPr id="40" name="05-039-rect"/>
+          <p:cNvPr id="41" name="05-040-rect"/>
           <p:cNvSpPr/>
           <p:nvPr/>
         </p:nvSpPr>
@@ -27451,7 +28109,7 @@
       </p:sp>
       <p:sp>
         <p:nvSpPr>
-          <p:cNvPr id="41" name="05-040-rect"/>
+          <p:cNvPr id="42" name="05-041-rect"/>
           <p:cNvSpPr/>
           <p:nvPr/>
         </p:nvSpPr>
@@ -27494,7 +28152,7 @@
       </p:sp>
       <p:sp>
         <p:nvSpPr>
-          <p:cNvPr id="42" name="05-041-text"/>
+          <p:cNvPr id="43" name="05-042-text"/>
           <p:cNvSpPr txBox="1"/>
           <p:nvPr/>
         </p:nvSpPr>
@@ -27539,7 +28197,7 @@
       </p:sp>
       <p:sp>
         <p:nvSpPr>
-          <p:cNvPr id="43" name="05-042-text"/>
+          <p:cNvPr id="44" name="05-043-text"/>
           <p:cNvSpPr txBox="1"/>
           <p:nvPr/>
         </p:nvSpPr>
@@ -27584,7 +28242,7 @@
       </p:sp>
       <p:sp>
         <p:nvSpPr>
-          <p:cNvPr id="44" name="05-043-text"/>
+          <p:cNvPr id="45" name="05-044-text"/>
           <p:cNvSpPr txBox="1"/>
           <p:nvPr/>
         </p:nvSpPr>
@@ -27629,7 +28287,7 @@
       </p:sp>
       <p:sp>
         <p:nvSpPr>
-          <p:cNvPr id="45" name="05-044-text"/>
+          <p:cNvPr id="46" name="05-045-text"/>
           <p:cNvSpPr txBox="1"/>
           <p:nvPr/>
         </p:nvSpPr>
@@ -27674,7 +28332,7 @@
       </p:sp>
       <p:sp>
         <p:nvSpPr>
-          <p:cNvPr id="46" name="05-045-rect"/>
+          <p:cNvPr id="47" name="05-046-rect"/>
           <p:cNvSpPr/>
           <p:nvPr/>
         </p:nvSpPr>
@@ -27717,7 +28375,7 @@
       </p:sp>
       <p:sp>
         <p:nvSpPr>
-          <p:cNvPr id="47" name="05-046-text"/>
+          <p:cNvPr id="48" name="05-047-text"/>
           <p:cNvSpPr txBox="1"/>
           <p:nvPr/>
         </p:nvSpPr>
@@ -27762,7 +28420,7 @@
       </p:sp>
       <p:sp>
         <p:nvSpPr>
-          <p:cNvPr id="48" name="05-047-text"/>
+          <p:cNvPr id="49" name="05-048-text"/>
           <p:cNvSpPr txBox="1"/>
           <p:nvPr/>
         </p:nvSpPr>
@@ -27807,7 +28465,7 @@
       </p:sp>
       <p:sp>
         <p:nvSpPr>
-          <p:cNvPr id="49" name="05-048-rect"/>
+          <p:cNvPr id="50" name="05-049-rect"/>
           <p:cNvSpPr/>
           <p:nvPr/>
         </p:nvSpPr>
@@ -27852,7 +28510,7 @@
       </p:sp>
       <p:sp>
         <p:nvSpPr>
-          <p:cNvPr id="50" name="05-049-text"/>
+          <p:cNvPr id="51" name="05-050-text"/>
           <p:cNvSpPr txBox="1"/>
           <p:nvPr/>
         </p:nvSpPr>
@@ -27897,7 +28555,7 @@
       </p:sp>
       <p:sp>
         <p:nvSpPr>
-          <p:cNvPr id="51" name="05-050-text"/>
+          <p:cNvPr id="52" name="05-051-text"/>
           <p:cNvSpPr txBox="1"/>
           <p:nvPr/>
         </p:nvSpPr>
@@ -27964,7 +28622,7 @@
       </p:sp>
       <p:sp>
         <p:nvSpPr>
-          <p:cNvPr id="52" name="05-051-rect"/>
+          <p:cNvPr id="53" name="05-052-rect"/>
           <p:cNvSpPr/>
           <p:nvPr/>
         </p:nvSpPr>
@@ -28009,7 +28667,7 @@
       </p:sp>
       <p:sp>
         <p:nvSpPr>
-          <p:cNvPr id="53" name="05-052-text"/>
+          <p:cNvPr id="54" name="05-053-text"/>
           <p:cNvSpPr txBox="1"/>
           <p:nvPr/>
         </p:nvSpPr>
@@ -28054,7 +28712,7 @@
       </p:sp>
       <p:sp>
         <p:nvSpPr>
-          <p:cNvPr id="54" name="05-053-text"/>
+          <p:cNvPr id="55" name="05-054-text"/>
           <p:cNvSpPr txBox="1"/>
           <p:nvPr/>
         </p:nvSpPr>
@@ -28121,7 +28779,7 @@
       </p:sp>
       <p:sp>
         <p:nvSpPr>
-          <p:cNvPr id="55" name="05-054-rect"/>
+          <p:cNvPr id="56" name="05-055-rect"/>
           <p:cNvSpPr/>
           <p:nvPr/>
         </p:nvSpPr>
@@ -28166,7 +28824,7 @@
       </p:sp>
       <p:sp>
         <p:nvSpPr>
-          <p:cNvPr id="56" name="05-055-rect"/>
+          <p:cNvPr id="57" name="05-056-rect"/>
           <p:cNvSpPr/>
           <p:nvPr/>
         </p:nvSpPr>
@@ -28209,7 +28867,7 @@
       </p:sp>
       <p:sp>
         <p:nvSpPr>
-          <p:cNvPr id="57" name="05-056-text"/>
+          <p:cNvPr id="58" name="05-057-text"/>
           <p:cNvSpPr txBox="1"/>
           <p:nvPr/>
         </p:nvSpPr>
@@ -28558,8 +29216,8 @@
         </p:nvSpPr>
         <p:spPr>
           <a:xfrm>
-            <a:off x="9906000" y="6610350"/>
-            <a:ext cx="133350" cy="38100"/>
+            <a:off x="9810750" y="6610350"/>
+            <a:ext cx="114300" cy="38100"/>
           </a:xfrm>
           <a:prstGeom prst="rect">
             <a:avLst/>
@@ -28601,8 +29259,8 @@
         </p:nvSpPr>
         <p:spPr>
           <a:xfrm>
-            <a:off x="10106025" y="6610350"/>
-            <a:ext cx="133350" cy="38100"/>
+            <a:off x="9991725" y="6610350"/>
+            <a:ext cx="114300" cy="38100"/>
           </a:xfrm>
           <a:prstGeom prst="rect">
             <a:avLst/>
@@ -28644,8 +29302,8 @@
         </p:nvSpPr>
         <p:spPr>
           <a:xfrm>
-            <a:off x="10306050" y="6610350"/>
-            <a:ext cx="133350" cy="38100"/>
+            <a:off x="10172700" y="6610350"/>
+            <a:ext cx="114300" cy="38100"/>
           </a:xfrm>
           <a:prstGeom prst="rect">
             <a:avLst/>
@@ -28687,8 +29345,8 @@
         </p:nvSpPr>
         <p:spPr>
           <a:xfrm>
-            <a:off x="10506075" y="6610350"/>
-            <a:ext cx="133350" cy="38100"/>
+            <a:off x="10353675" y="6610350"/>
+            <a:ext cx="114300" cy="38100"/>
           </a:xfrm>
           <a:prstGeom prst="rect">
             <a:avLst/>
@@ -28730,8 +29388,8 @@
         </p:nvSpPr>
         <p:spPr>
           <a:xfrm>
-            <a:off x="10706100" y="6610350"/>
-            <a:ext cx="133350" cy="38100"/>
+            <a:off x="10534650" y="6610350"/>
+            <a:ext cx="114300" cy="38100"/>
           </a:xfrm>
           <a:prstGeom prst="rect">
             <a:avLst/>
@@ -28773,8 +29431,8 @@
         </p:nvSpPr>
         <p:spPr>
           <a:xfrm>
-            <a:off x="10906125" y="6610350"/>
-            <a:ext cx="133350" cy="38100"/>
+            <a:off x="10715625" y="6610350"/>
+            <a:ext cx="114300" cy="38100"/>
           </a:xfrm>
           <a:prstGeom prst="rect">
             <a:avLst/>
@@ -28816,8 +29474,8 @@
         </p:nvSpPr>
         <p:spPr>
           <a:xfrm>
-            <a:off x="11106150" y="6610350"/>
-            <a:ext cx="133350" cy="38100"/>
+            <a:off x="10896600" y="6610350"/>
+            <a:ext cx="114300" cy="38100"/>
           </a:xfrm>
           <a:prstGeom prst="rect">
             <a:avLst/>
@@ -28853,7 +29511,50 @@
       </p:sp>
       <p:sp>
         <p:nvSpPr>
-          <p:cNvPr id="15" name="06-014-text"/>
+          <p:cNvPr id="15" name="06-014-rect"/>
+          <p:cNvSpPr/>
+          <p:nvPr/>
+        </p:nvSpPr>
+        <p:spPr>
+          <a:xfrm>
+            <a:off x="11077575" y="6610350"/>
+            <a:ext cx="114300" cy="38100"/>
+          </a:xfrm>
+          <a:prstGeom prst="rect">
+            <a:avLst/>
+          </a:prstGeom>
+          <a:solidFill>
+            <a:srgbClr val="D9E1EA"/>
+          </a:solidFill>
+          <a:ln>
+            <a:noFill/>
+          </a:ln>
+        </p:spPr>
+        <p:style>
+          <a:lnRef idx="1">
+            <a:schemeClr val="accent1"/>
+          </a:lnRef>
+          <a:fillRef idx="3">
+            <a:schemeClr val="accent1"/>
+          </a:fillRef>
+          <a:effectRef idx="2">
+            <a:schemeClr val="accent1"/>
+          </a:effectRef>
+          <a:fontRef idx="minor">
+            <a:schemeClr val="lt1"/>
+          </a:fontRef>
+        </p:style>
+        <p:txBody>
+          <a:bodyPr rtlCol="0" anchor="ctr"/>
+          <a:lstStyle/>
+          <a:p>
+            <a:pPr algn="ctr"/>
+          </a:p>
+        </p:txBody>
+      </p:sp>
+      <p:sp>
+        <p:nvSpPr>
+          <p:cNvPr id="16" name="06-015-text"/>
           <p:cNvSpPr txBox="1"/>
           <p:nvPr/>
         </p:nvSpPr>
@@ -28898,7 +29599,7 @@
       </p:sp>
       <p:sp>
         <p:nvSpPr>
-          <p:cNvPr id="16" name="06-015-rect"/>
+          <p:cNvPr id="17" name="06-016-rect"/>
           <p:cNvSpPr/>
           <p:nvPr/>
         </p:nvSpPr>
@@ -28943,7 +29644,7 @@
       </p:sp>
       <p:sp>
         <p:nvSpPr>
-          <p:cNvPr id="17" name="06-016-text"/>
+          <p:cNvPr id="18" name="06-017-text"/>
           <p:cNvSpPr txBox="1"/>
           <p:nvPr/>
         </p:nvSpPr>
@@ -28988,7 +29689,7 @@
       </p:sp>
       <p:sp>
         <p:nvSpPr>
-          <p:cNvPr id="18" name="06-017-text"/>
+          <p:cNvPr id="19" name="06-018-text"/>
           <p:cNvSpPr txBox="1"/>
           <p:nvPr/>
         </p:nvSpPr>
@@ -29033,7 +29734,7 @@
       </p:sp>
       <p:sp>
         <p:nvSpPr>
-          <p:cNvPr id="19" name="06-018-text"/>
+          <p:cNvPr id="20" name="06-019-text"/>
           <p:cNvSpPr txBox="1"/>
           <p:nvPr/>
         </p:nvSpPr>
@@ -29078,7 +29779,7 @@
       </p:sp>
       <p:sp>
         <p:nvSpPr>
-          <p:cNvPr id="20" name="06-019-text"/>
+          <p:cNvPr id="21" name="06-020-text"/>
           <p:cNvSpPr txBox="1"/>
           <p:nvPr/>
         </p:nvSpPr>
@@ -29123,7 +29824,7 @@
       </p:sp>
       <p:sp>
         <p:nvSpPr>
-          <p:cNvPr id="21" name="06-020-text"/>
+          <p:cNvPr id="22" name="06-021-text"/>
           <p:cNvSpPr txBox="1"/>
           <p:nvPr/>
         </p:nvSpPr>
@@ -29168,7 +29869,7 @@
       </p:sp>
       <p:sp>
         <p:nvSpPr>
-          <p:cNvPr id="22" name="06-021-rect"/>
+          <p:cNvPr id="23" name="06-022-rect"/>
           <p:cNvSpPr/>
           <p:nvPr/>
         </p:nvSpPr>
@@ -29215,7 +29916,7 @@
       </p:sp>
       <p:sp>
         <p:nvSpPr>
-          <p:cNvPr id="23" name="06-022-text"/>
+          <p:cNvPr id="24" name="06-023-text"/>
           <p:cNvSpPr txBox="1"/>
           <p:nvPr/>
         </p:nvSpPr>
@@ -29260,7 +29961,7 @@
       </p:sp>
       <p:sp>
         <p:nvSpPr>
-          <p:cNvPr id="24" name="06-023-rect"/>
+          <p:cNvPr id="25" name="06-024-rect"/>
           <p:cNvSpPr/>
           <p:nvPr/>
         </p:nvSpPr>
@@ -29307,7 +30008,7 @@
       </p:sp>
       <p:sp>
         <p:nvSpPr>
-          <p:cNvPr id="25" name="06-024-text"/>
+          <p:cNvPr id="26" name="06-025-text"/>
           <p:cNvSpPr txBox="1"/>
           <p:nvPr/>
         </p:nvSpPr>
@@ -29352,7 +30053,7 @@
       </p:sp>
       <p:sp>
         <p:nvSpPr>
-          <p:cNvPr id="26" name="06-025-rect"/>
+          <p:cNvPr id="27" name="06-026-rect"/>
           <p:cNvSpPr/>
           <p:nvPr/>
         </p:nvSpPr>
@@ -29399,7 +30100,7 @@
       </p:sp>
       <p:sp>
         <p:nvSpPr>
-          <p:cNvPr id="27" name="06-026-text"/>
+          <p:cNvPr id="28" name="06-027-text"/>
           <p:cNvSpPr txBox="1"/>
           <p:nvPr/>
         </p:nvSpPr>
@@ -29444,7 +30145,7 @@
       </p:sp>
       <p:sp>
         <p:nvSpPr>
-          <p:cNvPr id="28" name="06-027-rect"/>
+          <p:cNvPr id="29" name="06-028-rect"/>
           <p:cNvSpPr/>
           <p:nvPr/>
         </p:nvSpPr>
@@ -29491,7 +30192,7 @@
       </p:sp>
       <p:sp>
         <p:nvSpPr>
-          <p:cNvPr id="29" name="06-028-text"/>
+          <p:cNvPr id="30" name="06-029-text"/>
           <p:cNvSpPr txBox="1"/>
           <p:nvPr/>
         </p:nvSpPr>
@@ -29536,7 +30237,7 @@
       </p:sp>
       <p:sp>
         <p:nvSpPr>
-          <p:cNvPr id="30" name="06-029-rect"/>
+          <p:cNvPr id="31" name="06-030-rect"/>
           <p:cNvSpPr/>
           <p:nvPr/>
         </p:nvSpPr>
@@ -29583,7 +30284,7 @@
       </p:sp>
       <p:sp>
         <p:nvSpPr>
-          <p:cNvPr id="31" name="06-030-text"/>
+          <p:cNvPr id="32" name="06-031-text"/>
           <p:cNvSpPr txBox="1"/>
           <p:nvPr/>
         </p:nvSpPr>
@@ -29628,7 +30329,7 @@
       </p:sp>
       <p:sp>
         <p:nvSpPr>
-          <p:cNvPr id="32" name="06-031-rect"/>
+          <p:cNvPr id="33" name="06-032-rect"/>
           <p:cNvSpPr/>
           <p:nvPr/>
         </p:nvSpPr>
@@ -29675,7 +30376,7 @@
       </p:sp>
       <p:sp>
         <p:nvSpPr>
-          <p:cNvPr id="33" name="06-032-text"/>
+          <p:cNvPr id="34" name="06-033-text"/>
           <p:cNvSpPr txBox="1"/>
           <p:nvPr/>
         </p:nvSpPr>
@@ -29720,7 +30421,7 @@
       </p:sp>
       <p:sp>
         <p:nvSpPr>
-          <p:cNvPr id="34" name="06-033-rect"/>
+          <p:cNvPr id="35" name="06-034-rect"/>
           <p:cNvSpPr/>
           <p:nvPr/>
         </p:nvSpPr>
@@ -29767,7 +30468,7 @@
       </p:sp>
       <p:sp>
         <p:nvSpPr>
-          <p:cNvPr id="35" name="06-034-text"/>
+          <p:cNvPr id="36" name="06-035-text"/>
           <p:cNvSpPr txBox="1"/>
           <p:nvPr/>
         </p:nvSpPr>
@@ -29812,7 +30513,7 @@
       </p:sp>
       <p:sp>
         <p:nvSpPr>
-          <p:cNvPr id="36" name="06-035-rect"/>
+          <p:cNvPr id="37" name="06-036-rect"/>
           <p:cNvSpPr/>
           <p:nvPr/>
         </p:nvSpPr>
@@ -29859,7 +30560,7 @@
       </p:sp>
       <p:sp>
         <p:nvSpPr>
-          <p:cNvPr id="37" name="06-036-text"/>
+          <p:cNvPr id="38" name="06-037-text"/>
           <p:cNvSpPr txBox="1"/>
           <p:nvPr/>
         </p:nvSpPr>
@@ -29904,7 +30605,7 @@
       </p:sp>
       <p:sp>
         <p:nvSpPr>
-          <p:cNvPr id="38" name="06-037-rect"/>
+          <p:cNvPr id="39" name="06-038-rect"/>
           <p:cNvSpPr/>
           <p:nvPr/>
         </p:nvSpPr>
@@ -29951,7 +30652,7 @@
       </p:sp>
       <p:sp>
         <p:nvSpPr>
-          <p:cNvPr id="39" name="06-038-text"/>
+          <p:cNvPr id="40" name="06-039-text"/>
           <p:cNvSpPr txBox="1"/>
           <p:nvPr/>
         </p:nvSpPr>
@@ -29996,7 +30697,7 @@
       </p:sp>
       <p:sp>
         <p:nvSpPr>
-          <p:cNvPr id="40" name="06-039-text"/>
+          <p:cNvPr id="41" name="06-040-text"/>
           <p:cNvSpPr txBox="1"/>
           <p:nvPr/>
         </p:nvSpPr>
@@ -30041,7 +30742,7 @@
       </p:sp>
       <p:sp>
         <p:nvSpPr>
-          <p:cNvPr id="41" name="06-040-rect"/>
+          <p:cNvPr id="42" name="06-041-rect"/>
           <p:cNvSpPr/>
           <p:nvPr/>
         </p:nvSpPr>
@@ -30088,7 +30789,7 @@
       </p:sp>
       <p:sp>
         <p:nvSpPr>
-          <p:cNvPr id="42" name="06-041-text"/>
+          <p:cNvPr id="43" name="06-042-text"/>
           <p:cNvSpPr txBox="1"/>
           <p:nvPr/>
         </p:nvSpPr>
@@ -30133,7 +30834,7 @@
       </p:sp>
       <p:sp>
         <p:nvSpPr>
-          <p:cNvPr id="43" name="06-042-rect"/>
+          <p:cNvPr id="44" name="06-043-rect"/>
           <p:cNvSpPr/>
           <p:nvPr/>
         </p:nvSpPr>
@@ -30180,7 +30881,7 @@
       </p:sp>
       <p:sp>
         <p:nvSpPr>
-          <p:cNvPr id="44" name="06-043-text"/>
+          <p:cNvPr id="45" name="06-044-text"/>
           <p:cNvSpPr txBox="1"/>
           <p:nvPr/>
         </p:nvSpPr>
@@ -30225,7 +30926,7 @@
       </p:sp>
       <p:sp>
         <p:nvSpPr>
-          <p:cNvPr id="45" name="06-044-rect"/>
+          <p:cNvPr id="46" name="06-045-rect"/>
           <p:cNvSpPr/>
           <p:nvPr/>
         </p:nvSpPr>
@@ -30272,7 +30973,7 @@
       </p:sp>
       <p:sp>
         <p:nvSpPr>
-          <p:cNvPr id="46" name="06-045-text"/>
+          <p:cNvPr id="47" name="06-046-text"/>
           <p:cNvSpPr txBox="1"/>
           <p:nvPr/>
         </p:nvSpPr>
@@ -30317,7 +31018,7 @@
       </p:sp>
       <p:sp>
         <p:nvSpPr>
-          <p:cNvPr id="47" name="06-046-rect"/>
+          <p:cNvPr id="48" name="06-047-rect"/>
           <p:cNvSpPr/>
           <p:nvPr/>
         </p:nvSpPr>
@@ -30364,7 +31065,7 @@
       </p:sp>
       <p:sp>
         <p:nvSpPr>
-          <p:cNvPr id="48" name="06-047-text"/>
+          <p:cNvPr id="49" name="06-048-text"/>
           <p:cNvSpPr txBox="1"/>
           <p:nvPr/>
         </p:nvSpPr>
@@ -30409,7 +31110,7 @@
       </p:sp>
       <p:sp>
         <p:nvSpPr>
-          <p:cNvPr id="49" name="06-048-rect"/>
+          <p:cNvPr id="50" name="06-049-rect"/>
           <p:cNvSpPr/>
           <p:nvPr/>
         </p:nvSpPr>
@@ -30456,7 +31157,7 @@
       </p:sp>
       <p:sp>
         <p:nvSpPr>
-          <p:cNvPr id="50" name="06-049-text"/>
+          <p:cNvPr id="51" name="06-050-text"/>
           <p:cNvSpPr txBox="1"/>
           <p:nvPr/>
         </p:nvSpPr>
@@ -30501,7 +31202,7 @@
       </p:sp>
       <p:sp>
         <p:nvSpPr>
-          <p:cNvPr id="51" name="06-050-rect"/>
+          <p:cNvPr id="52" name="06-051-rect"/>
           <p:cNvSpPr/>
           <p:nvPr/>
         </p:nvSpPr>
@@ -30548,7 +31249,7 @@
       </p:sp>
       <p:sp>
         <p:nvSpPr>
-          <p:cNvPr id="52" name="06-051-text"/>
+          <p:cNvPr id="53" name="06-052-text"/>
           <p:cNvSpPr txBox="1"/>
           <p:nvPr/>
         </p:nvSpPr>
@@ -30593,7 +31294,7 @@
       </p:sp>
       <p:sp>
         <p:nvSpPr>
-          <p:cNvPr id="53" name="06-052-rect"/>
+          <p:cNvPr id="54" name="06-053-rect"/>
           <p:cNvSpPr/>
           <p:nvPr/>
         </p:nvSpPr>
@@ -30640,7 +31341,7 @@
       </p:sp>
       <p:sp>
         <p:nvSpPr>
-          <p:cNvPr id="54" name="06-053-text"/>
+          <p:cNvPr id="55" name="06-054-text"/>
           <p:cNvSpPr txBox="1"/>
           <p:nvPr/>
         </p:nvSpPr>
@@ -30685,7 +31386,7 @@
       </p:sp>
       <p:sp>
         <p:nvSpPr>
-          <p:cNvPr id="55" name="06-054-rect"/>
+          <p:cNvPr id="56" name="06-055-rect"/>
           <p:cNvSpPr/>
           <p:nvPr/>
         </p:nvSpPr>
@@ -30732,7 +31433,7 @@
       </p:sp>
       <p:sp>
         <p:nvSpPr>
-          <p:cNvPr id="56" name="06-055-text"/>
+          <p:cNvPr id="57" name="06-056-text"/>
           <p:cNvSpPr txBox="1"/>
           <p:nvPr/>
         </p:nvSpPr>
@@ -30777,7 +31478,7 @@
       </p:sp>
       <p:sp>
         <p:nvSpPr>
-          <p:cNvPr id="57" name="06-056-rect"/>
+          <p:cNvPr id="58" name="06-057-rect"/>
           <p:cNvSpPr/>
           <p:nvPr/>
         </p:nvSpPr>
@@ -30824,7 +31525,7 @@
       </p:sp>
       <p:sp>
         <p:nvSpPr>
-          <p:cNvPr id="58" name="06-057-text"/>
+          <p:cNvPr id="59" name="06-058-text"/>
           <p:cNvSpPr txBox="1"/>
           <p:nvPr/>
         </p:nvSpPr>
@@ -30869,7 +31570,7 @@
       </p:sp>
       <p:sp>
         <p:nvSpPr>
-          <p:cNvPr id="59" name="06-058-text"/>
+          <p:cNvPr id="60" name="06-059-text"/>
           <p:cNvSpPr txBox="1"/>
           <p:nvPr/>
         </p:nvSpPr>
@@ -30914,7 +31615,7 @@
       </p:sp>
       <p:sp>
         <p:nvSpPr>
-          <p:cNvPr id="60" name="06-059-rect"/>
+          <p:cNvPr id="61" name="06-060-rect"/>
           <p:cNvSpPr/>
           <p:nvPr/>
         </p:nvSpPr>
@@ -30959,7 +31660,7 @@
       </p:sp>
       <p:sp>
         <p:nvSpPr>
-          <p:cNvPr id="61" name="06-060-text"/>
+          <p:cNvPr id="62" name="06-061-text"/>
           <p:cNvSpPr txBox="1"/>
           <p:nvPr/>
         </p:nvSpPr>
@@ -31004,7 +31705,7 @@
       </p:sp>
       <p:sp>
         <p:nvSpPr>
-          <p:cNvPr id="62" name="06-061-text"/>
+          <p:cNvPr id="63" name="06-062-text"/>
           <p:cNvSpPr txBox="1"/>
           <p:nvPr/>
         </p:nvSpPr>
@@ -31049,7 +31750,7 @@
       </p:sp>
       <p:sp>
         <p:nvSpPr>
-          <p:cNvPr id="63" name="06-062-text"/>
+          <p:cNvPr id="64" name="06-063-text"/>
           <p:cNvSpPr txBox="1"/>
           <p:nvPr/>
         </p:nvSpPr>
@@ -31094,7 +31795,7 @@
       </p:sp>
       <p:sp>
         <p:nvSpPr>
-          <p:cNvPr id="64" name="06-063-text"/>
+          <p:cNvPr id="65" name="06-064-text"/>
           <p:cNvSpPr txBox="1"/>
           <p:nvPr/>
         </p:nvSpPr>
@@ -31139,7 +31840,7 @@
       </p:sp>
       <p:sp>
         <p:nvSpPr>
-          <p:cNvPr id="65" name="06-064-text"/>
+          <p:cNvPr id="66" name="06-065-text"/>
           <p:cNvSpPr txBox="1"/>
           <p:nvPr/>
         </p:nvSpPr>
@@ -31184,7 +31885,7 @@
       </p:sp>
       <p:sp>
         <p:nvSpPr>
-          <p:cNvPr id="66" name="06-065-rect"/>
+          <p:cNvPr id="67" name="06-066-rect"/>
           <p:cNvSpPr/>
           <p:nvPr/>
         </p:nvSpPr>
@@ -31231,7 +31932,7 @@
       </p:sp>
       <p:sp>
         <p:nvSpPr>
-          <p:cNvPr id="67" name="06-066-text"/>
+          <p:cNvPr id="68" name="06-067-text"/>
           <p:cNvSpPr txBox="1"/>
           <p:nvPr/>
         </p:nvSpPr>
@@ -31276,7 +31977,7 @@
       </p:sp>
       <p:sp>
         <p:nvSpPr>
-          <p:cNvPr id="68" name="06-067-rect"/>
+          <p:cNvPr id="69" name="06-068-rect"/>
           <p:cNvSpPr/>
           <p:nvPr/>
         </p:nvSpPr>
@@ -31323,7 +32024,7 @@
       </p:sp>
       <p:sp>
         <p:nvSpPr>
-          <p:cNvPr id="69" name="06-068-text"/>
+          <p:cNvPr id="70" name="06-069-text"/>
           <p:cNvSpPr txBox="1"/>
           <p:nvPr/>
         </p:nvSpPr>
@@ -31368,7 +32069,7 @@
       </p:sp>
       <p:sp>
         <p:nvSpPr>
-          <p:cNvPr id="70" name="06-069-rect"/>
+          <p:cNvPr id="71" name="06-070-rect"/>
           <p:cNvSpPr/>
           <p:nvPr/>
         </p:nvSpPr>
@@ -31415,7 +32116,7 @@
       </p:sp>
       <p:sp>
         <p:nvSpPr>
-          <p:cNvPr id="71" name="06-070-text"/>
+          <p:cNvPr id="72" name="06-071-text"/>
           <p:cNvSpPr txBox="1"/>
           <p:nvPr/>
         </p:nvSpPr>
@@ -31460,7 +32161,7 @@
       </p:sp>
       <p:sp>
         <p:nvSpPr>
-          <p:cNvPr id="72" name="06-071-rect"/>
+          <p:cNvPr id="73" name="06-072-rect"/>
           <p:cNvSpPr/>
           <p:nvPr/>
         </p:nvSpPr>
@@ -31507,7 +32208,7 @@
       </p:sp>
       <p:sp>
         <p:nvSpPr>
-          <p:cNvPr id="73" name="06-072-text"/>
+          <p:cNvPr id="74" name="06-073-text"/>
           <p:cNvSpPr txBox="1"/>
           <p:nvPr/>
         </p:nvSpPr>
@@ -31552,7 +32253,7 @@
       </p:sp>
       <p:sp>
         <p:nvSpPr>
-          <p:cNvPr id="74" name="06-073-line"/>
+          <p:cNvPr id="75" name="06-074-line"/>
           <p:cNvSpPr/>
           <p:nvPr/>
         </p:nvSpPr>
@@ -31609,7 +32310,7 @@
       </p:sp>
       <p:sp>
         <p:nvSpPr>
-          <p:cNvPr id="75" name="06-074-poly"/>
+          <p:cNvPr id="76" name="06-075-poly"/>
           <p:cNvSpPr/>
           <p:nvPr/>
         </p:nvSpPr>
@@ -31670,7 +32371,7 @@
       </p:sp>
       <p:sp>
         <p:nvSpPr>
-          <p:cNvPr id="76" name="06-075-line"/>
+          <p:cNvPr id="77" name="06-076-line"/>
           <p:cNvSpPr/>
           <p:nvPr/>
         </p:nvSpPr>
@@ -31727,7 +32428,7 @@
       </p:sp>
       <p:sp>
         <p:nvSpPr>
-          <p:cNvPr id="77" name="06-076-poly"/>
+          <p:cNvPr id="78" name="06-077-poly"/>
           <p:cNvSpPr/>
           <p:nvPr/>
         </p:nvSpPr>
@@ -31788,7 +32489,7 @@
       </p:sp>
       <p:sp>
         <p:nvSpPr>
-          <p:cNvPr id="78" name="06-077-line"/>
+          <p:cNvPr id="79" name="06-078-line"/>
           <p:cNvSpPr/>
           <p:nvPr/>
         </p:nvSpPr>
@@ -31845,7 +32546,7 @@
       </p:sp>
       <p:sp>
         <p:nvSpPr>
-          <p:cNvPr id="79" name="06-078-poly"/>
+          <p:cNvPr id="80" name="06-079-poly"/>
           <p:cNvSpPr/>
           <p:nvPr/>
         </p:nvSpPr>
@@ -31906,7 +32607,7 @@
       </p:sp>
       <p:sp>
         <p:nvSpPr>
-          <p:cNvPr id="80" name="06-079-rect"/>
+          <p:cNvPr id="81" name="06-080-rect"/>
           <p:cNvSpPr/>
           <p:nvPr/>
         </p:nvSpPr>
@@ -31951,7 +32652,7 @@
       </p:sp>
       <p:sp>
         <p:nvSpPr>
-          <p:cNvPr id="81" name="06-080-rect"/>
+          <p:cNvPr id="82" name="06-081-rect"/>
           <p:cNvSpPr/>
           <p:nvPr/>
         </p:nvSpPr>
@@ -31994,7 +32695,7 @@
       </p:sp>
       <p:sp>
         <p:nvSpPr>
-          <p:cNvPr id="82" name="06-081-text"/>
+          <p:cNvPr id="83" name="06-082-text"/>
           <p:cNvSpPr txBox="1"/>
           <p:nvPr/>
         </p:nvSpPr>
@@ -32039,7 +32740,7 @@
       </p:sp>
       <p:sp>
         <p:nvSpPr>
-          <p:cNvPr id="83" name="06-082-text"/>
+          <p:cNvPr id="84" name="06-083-text"/>
           <p:cNvSpPr txBox="1"/>
           <p:nvPr/>
         </p:nvSpPr>
@@ -32078,6 +32779,3090 @@
             </a:pPr>
             <a:r>
               <a:t>Current scope: forward INSERT + scalar CSR matvec. Tradeoff: padding and a global all-to-all collective.</a:t>
+            </a:r>
+          </a:p>
+        </p:txBody>
+      </p:sp>
+    </p:spTree>
+  </p:cSld>
+  <p:clrMapOvr>
+    <a:masterClrMapping/>
+  </p:clrMapOvr>
+</p:sld>
+</file>
+
+<file path=ppt/slides/slide8.xml><?xml version="1.0" encoding="utf-8"?>
+<p:sld xmlns:a="http://schemas.openxmlformats.org/drawingml/2006/main" xmlns:p="http://schemas.openxmlformats.org/presentationml/2006/main" xmlns:r="http://schemas.openxmlformats.org/officeDocument/2006/relationships">
+  <p:cSld>
+    <p:spTree>
+      <p:nvGrpSpPr>
+        <p:cNvPr id="1" name=""/>
+        <p:cNvGrpSpPr/>
+        <p:nvPr/>
+      </p:nvGrpSpPr>
+      <p:grpSpPr/>
+      <p:sp>
+        <p:nvSpPr>
+          <p:cNvPr id="2" name="07-001-text"/>
+          <p:cNvSpPr txBox="1"/>
+          <p:nvPr/>
+        </p:nvSpPr>
+        <p:spPr>
+          <a:xfrm>
+            <a:off x="533400" y="247650"/>
+            <a:ext cx="8096250" cy="211454"/>
+          </a:xfrm>
+          <a:prstGeom prst="rect">
+            <a:avLst/>
+          </a:prstGeom>
+          <a:noFill/>
+        </p:spPr>
+        <p:txBody>
+          <a:bodyPr wrap="none" lIns="0" rIns="0" tIns="0" bIns="0" anchor="t">
+            <a:spAutoFit/>
+          </a:bodyPr>
+          <a:lstStyle/>
+          <a:p>
+            <a:pPr algn="l">
+              <a:lnSpc>
+                <a:spcPct val="130000"/>
+              </a:lnSpc>
+              <a:spcBef>
+                <a:spcPts val="0"/>
+              </a:spcBef>
+              <a:spcAft>
+                <a:spcPts val="0"/>
+              </a:spcAft>
+              <a:defRPr sz="1050" b="1">
+                <a:solidFill>
+                  <a:srgbClr val="546477"/>
+                </a:solidFill>
+                <a:latin typeface="DejaVu Sans"/>
+              </a:defRPr>
+            </a:pPr>
+            <a:r>
+              <a:t>JAX-GHOST   /   WHAT TO TRY NEXT</a:t>
+            </a:r>
+          </a:p>
+        </p:txBody>
+      </p:sp>
+      <p:sp>
+        <p:nvSpPr>
+          <p:cNvPr id="3" name="07-002-rect"/>
+          <p:cNvSpPr/>
+          <p:nvPr/>
+        </p:nvSpPr>
+        <p:spPr>
+          <a:xfrm>
+            <a:off x="11172825" y="247650"/>
+            <a:ext cx="485775" cy="47625"/>
+          </a:xfrm>
+          <a:prstGeom prst="rect">
+            <a:avLst/>
+          </a:prstGeom>
+          <a:solidFill>
+            <a:srgbClr val="2463C9"/>
+          </a:solidFill>
+          <a:ln>
+            <a:noFill/>
+          </a:ln>
+        </p:spPr>
+        <p:style>
+          <a:lnRef idx="1">
+            <a:schemeClr val="accent1"/>
+          </a:lnRef>
+          <a:fillRef idx="3">
+            <a:schemeClr val="accent1"/>
+          </a:fillRef>
+          <a:effectRef idx="2">
+            <a:schemeClr val="accent1"/>
+          </a:effectRef>
+          <a:fontRef idx="minor">
+            <a:schemeClr val="lt1"/>
+          </a:fontRef>
+        </p:style>
+        <p:txBody>
+          <a:bodyPr rtlCol="0" anchor="ctr"/>
+          <a:lstStyle/>
+          <a:p>
+            <a:pPr algn="ctr"/>
+          </a:p>
+        </p:txBody>
+      </p:sp>
+      <p:sp>
+        <p:nvSpPr>
+          <p:cNvPr id="4" name="07-003-text"/>
+          <p:cNvSpPr txBox="1"/>
+          <p:nvPr/>
+        </p:nvSpPr>
+        <p:spPr>
+          <a:xfrm>
+            <a:off x="533400" y="600075"/>
+            <a:ext cx="11144250" cy="471487"/>
+          </a:xfrm>
+          <a:prstGeom prst="rect">
+            <a:avLst/>
+          </a:prstGeom>
+          <a:noFill/>
+        </p:spPr>
+        <p:txBody>
+          <a:bodyPr wrap="none" lIns="0" rIns="0" tIns="0" bIns="0" anchor="t">
+            <a:spAutoFit/>
+          </a:bodyPr>
+          <a:lstStyle/>
+          <a:p>
+            <a:pPr algn="l">
+              <a:lnSpc>
+                <a:spcPct val="130000"/>
+              </a:lnSpc>
+              <a:spcBef>
+                <a:spcPts val="0"/>
+              </a:spcBef>
+              <a:spcAft>
+                <a:spcPts val="0"/>
+              </a:spcAft>
+              <a:defRPr sz="2625" b="1">
+                <a:solidFill>
+                  <a:srgbClr val="172638"/>
+                </a:solidFill>
+                <a:latin typeface="DejaVu Sans"/>
+              </a:defRPr>
+            </a:pPr>
+            <a:r>
+              <a:t>Newer JAX APIs: optimization opportunities</a:t>
+            </a:r>
+          </a:p>
+        </p:txBody>
+      </p:sp>
+      <p:sp>
+        <p:nvSpPr>
+          <p:cNvPr id="5" name="07-004-text"/>
+          <p:cNvSpPr txBox="1"/>
+          <p:nvPr/>
+        </p:nvSpPr>
+        <p:spPr>
+          <a:xfrm>
+            <a:off x="533400" y="1143000"/>
+            <a:ext cx="11144250" cy="260985"/>
+          </a:xfrm>
+          <a:prstGeom prst="rect">
+            <a:avLst/>
+          </a:prstGeom>
+          <a:noFill/>
+        </p:spPr>
+        <p:txBody>
+          <a:bodyPr wrap="none" lIns="0" rIns="0" tIns="0" bIns="0" anchor="t">
+            <a:spAutoFit/>
+          </a:bodyPr>
+          <a:lstStyle/>
+          <a:p>
+            <a:pPr algn="l">
+              <a:lnSpc>
+                <a:spcPct val="130000"/>
+              </a:lnSpc>
+              <a:spcBef>
+                <a:spcPts val="0"/>
+              </a:spcBef>
+              <a:spcAft>
+                <a:spcPts val="0"/>
+              </a:spcAft>
+              <a:defRPr sz="1350" b="0">
+                <a:solidFill>
+                  <a:srgbClr val="546477"/>
+                </a:solidFill>
+                <a:latin typeface="DejaVu Sans"/>
+              </a:defRPr>
+            </a:pPr>
+            <a:r>
+              <a:t>Candidates for our sharded implementation • preserve the ownership map • benchmark on the target GPUs</a:t>
+            </a:r>
+          </a:p>
+        </p:txBody>
+      </p:sp>
+      <p:sp>
+        <p:nvSpPr>
+          <p:cNvPr id="6" name="07-005-line"/>
+          <p:cNvSpPr/>
+          <p:nvPr/>
+        </p:nvSpPr>
+        <p:spPr>
+          <a:xfrm>
+            <a:off x="533400" y="6419850"/>
+            <a:ext cx="11125200" cy="0"/>
+          </a:xfrm>
+          <a:custGeom>
+            <a:avLst/>
+            <a:gdLst/>
+            <a:ahLst/>
+            <a:cxnLst/>
+            <a:rect l="l" t="t" r="r" b="b"/>
+            <a:pathLst>
+              <a:path w="1168" h="0">
+                <a:moveTo>
+                  <a:pt x="0" y="0"/>
+                </a:moveTo>
+                <a:lnTo>
+                  <a:pt x="1168" y="0"/>
+                </a:lnTo>
+              </a:path>
+            </a:pathLst>
+          </a:custGeom>
+          <a:noFill/>
+          <a:ln w="9525">
+            <a:solidFill>
+              <a:srgbClr val="D9E1EA"/>
+            </a:solidFill>
+          </a:ln>
+        </p:spPr>
+        <p:style>
+          <a:lnRef idx="1">
+            <a:schemeClr val="accent1"/>
+          </a:lnRef>
+          <a:fillRef idx="3">
+            <a:schemeClr val="accent1"/>
+          </a:fillRef>
+          <a:effectRef idx="2">
+            <a:schemeClr val="accent1"/>
+          </a:effectRef>
+          <a:fontRef idx="minor">
+            <a:schemeClr val="lt1"/>
+          </a:fontRef>
+        </p:style>
+        <p:txBody>
+          <a:bodyPr rtlCol="0" anchor="ctr"/>
+          <a:lstStyle/>
+          <a:p>
+            <a:pPr algn="ctr"/>
+          </a:p>
+        </p:txBody>
+      </p:sp>
+      <p:sp>
+        <p:nvSpPr>
+          <p:cNvPr id="7" name="07-006-text"/>
+          <p:cNvSpPr txBox="1"/>
+          <p:nvPr/>
+        </p:nvSpPr>
+        <p:spPr>
+          <a:xfrm>
+            <a:off x="533400" y="6553200"/>
+            <a:ext cx="6858000" cy="186690"/>
+          </a:xfrm>
+          <a:prstGeom prst="rect">
+            <a:avLst/>
+          </a:prstGeom>
+          <a:noFill/>
+        </p:spPr>
+        <p:txBody>
+          <a:bodyPr wrap="none" lIns="0" rIns="0" tIns="0" bIns="0" anchor="t">
+            <a:spAutoFit/>
+          </a:bodyPr>
+          <a:lstStyle/>
+          <a:p>
+            <a:pPr algn="l">
+              <a:lnSpc>
+                <a:spcPct val="130000"/>
+              </a:lnSpc>
+              <a:spcBef>
+                <a:spcPts val="0"/>
+              </a:spcBef>
+              <a:spcAft>
+                <a:spcPts val="0"/>
+              </a:spcAft>
+              <a:defRPr sz="900" b="0">
+                <a:solidFill>
+                  <a:srgbClr val="546477"/>
+                </a:solidFill>
+                <a:latin typeface="DejaVu Sans"/>
+              </a:defRPr>
+            </a:pPr>
+            <a:r>
+              <a:t>FEniCSx → MPI ownership → JAX GPU communication</a:t>
+            </a:r>
+          </a:p>
+        </p:txBody>
+      </p:sp>
+      <p:sp>
+        <p:nvSpPr>
+          <p:cNvPr id="8" name="07-007-rect"/>
+          <p:cNvSpPr/>
+          <p:nvPr/>
+        </p:nvSpPr>
+        <p:spPr>
+          <a:xfrm>
+            <a:off x="9810750" y="6610350"/>
+            <a:ext cx="114300" cy="38100"/>
+          </a:xfrm>
+          <a:prstGeom prst="rect">
+            <a:avLst/>
+          </a:prstGeom>
+          <a:solidFill>
+            <a:srgbClr val="D9E1EA"/>
+          </a:solidFill>
+          <a:ln>
+            <a:noFill/>
+          </a:ln>
+        </p:spPr>
+        <p:style>
+          <a:lnRef idx="1">
+            <a:schemeClr val="accent1"/>
+          </a:lnRef>
+          <a:fillRef idx="3">
+            <a:schemeClr val="accent1"/>
+          </a:fillRef>
+          <a:effectRef idx="2">
+            <a:schemeClr val="accent1"/>
+          </a:effectRef>
+          <a:fontRef idx="minor">
+            <a:schemeClr val="lt1"/>
+          </a:fontRef>
+        </p:style>
+        <p:txBody>
+          <a:bodyPr rtlCol="0" anchor="ctr"/>
+          <a:lstStyle/>
+          <a:p>
+            <a:pPr algn="ctr"/>
+          </a:p>
+        </p:txBody>
+      </p:sp>
+      <p:sp>
+        <p:nvSpPr>
+          <p:cNvPr id="9" name="07-008-rect"/>
+          <p:cNvSpPr/>
+          <p:nvPr/>
+        </p:nvSpPr>
+        <p:spPr>
+          <a:xfrm>
+            <a:off x="9991725" y="6610350"/>
+            <a:ext cx="114300" cy="38100"/>
+          </a:xfrm>
+          <a:prstGeom prst="rect">
+            <a:avLst/>
+          </a:prstGeom>
+          <a:solidFill>
+            <a:srgbClr val="D9E1EA"/>
+          </a:solidFill>
+          <a:ln>
+            <a:noFill/>
+          </a:ln>
+        </p:spPr>
+        <p:style>
+          <a:lnRef idx="1">
+            <a:schemeClr val="accent1"/>
+          </a:lnRef>
+          <a:fillRef idx="3">
+            <a:schemeClr val="accent1"/>
+          </a:fillRef>
+          <a:effectRef idx="2">
+            <a:schemeClr val="accent1"/>
+          </a:effectRef>
+          <a:fontRef idx="minor">
+            <a:schemeClr val="lt1"/>
+          </a:fontRef>
+        </p:style>
+        <p:txBody>
+          <a:bodyPr rtlCol="0" anchor="ctr"/>
+          <a:lstStyle/>
+          <a:p>
+            <a:pPr algn="ctr"/>
+          </a:p>
+        </p:txBody>
+      </p:sp>
+      <p:sp>
+        <p:nvSpPr>
+          <p:cNvPr id="10" name="07-009-rect"/>
+          <p:cNvSpPr/>
+          <p:nvPr/>
+        </p:nvSpPr>
+        <p:spPr>
+          <a:xfrm>
+            <a:off x="10172700" y="6610350"/>
+            <a:ext cx="114300" cy="38100"/>
+          </a:xfrm>
+          <a:prstGeom prst="rect">
+            <a:avLst/>
+          </a:prstGeom>
+          <a:solidFill>
+            <a:srgbClr val="D9E1EA"/>
+          </a:solidFill>
+          <a:ln>
+            <a:noFill/>
+          </a:ln>
+        </p:spPr>
+        <p:style>
+          <a:lnRef idx="1">
+            <a:schemeClr val="accent1"/>
+          </a:lnRef>
+          <a:fillRef idx="3">
+            <a:schemeClr val="accent1"/>
+          </a:fillRef>
+          <a:effectRef idx="2">
+            <a:schemeClr val="accent1"/>
+          </a:effectRef>
+          <a:fontRef idx="minor">
+            <a:schemeClr val="lt1"/>
+          </a:fontRef>
+        </p:style>
+        <p:txBody>
+          <a:bodyPr rtlCol="0" anchor="ctr"/>
+          <a:lstStyle/>
+          <a:p>
+            <a:pPr algn="ctr"/>
+          </a:p>
+        </p:txBody>
+      </p:sp>
+      <p:sp>
+        <p:nvSpPr>
+          <p:cNvPr id="11" name="07-010-rect"/>
+          <p:cNvSpPr/>
+          <p:nvPr/>
+        </p:nvSpPr>
+        <p:spPr>
+          <a:xfrm>
+            <a:off x="10353675" y="6610350"/>
+            <a:ext cx="114300" cy="38100"/>
+          </a:xfrm>
+          <a:prstGeom prst="rect">
+            <a:avLst/>
+          </a:prstGeom>
+          <a:solidFill>
+            <a:srgbClr val="D9E1EA"/>
+          </a:solidFill>
+          <a:ln>
+            <a:noFill/>
+          </a:ln>
+        </p:spPr>
+        <p:style>
+          <a:lnRef idx="1">
+            <a:schemeClr val="accent1"/>
+          </a:lnRef>
+          <a:fillRef idx="3">
+            <a:schemeClr val="accent1"/>
+          </a:fillRef>
+          <a:effectRef idx="2">
+            <a:schemeClr val="accent1"/>
+          </a:effectRef>
+          <a:fontRef idx="minor">
+            <a:schemeClr val="lt1"/>
+          </a:fontRef>
+        </p:style>
+        <p:txBody>
+          <a:bodyPr rtlCol="0" anchor="ctr"/>
+          <a:lstStyle/>
+          <a:p>
+            <a:pPr algn="ctr"/>
+          </a:p>
+        </p:txBody>
+      </p:sp>
+      <p:sp>
+        <p:nvSpPr>
+          <p:cNvPr id="12" name="07-011-rect"/>
+          <p:cNvSpPr/>
+          <p:nvPr/>
+        </p:nvSpPr>
+        <p:spPr>
+          <a:xfrm>
+            <a:off x="10534650" y="6610350"/>
+            <a:ext cx="114300" cy="38100"/>
+          </a:xfrm>
+          <a:prstGeom prst="rect">
+            <a:avLst/>
+          </a:prstGeom>
+          <a:solidFill>
+            <a:srgbClr val="D9E1EA"/>
+          </a:solidFill>
+          <a:ln>
+            <a:noFill/>
+          </a:ln>
+        </p:spPr>
+        <p:style>
+          <a:lnRef idx="1">
+            <a:schemeClr val="accent1"/>
+          </a:lnRef>
+          <a:fillRef idx="3">
+            <a:schemeClr val="accent1"/>
+          </a:fillRef>
+          <a:effectRef idx="2">
+            <a:schemeClr val="accent1"/>
+          </a:effectRef>
+          <a:fontRef idx="minor">
+            <a:schemeClr val="lt1"/>
+          </a:fontRef>
+        </p:style>
+        <p:txBody>
+          <a:bodyPr rtlCol="0" anchor="ctr"/>
+          <a:lstStyle/>
+          <a:p>
+            <a:pPr algn="ctr"/>
+          </a:p>
+        </p:txBody>
+      </p:sp>
+      <p:sp>
+        <p:nvSpPr>
+          <p:cNvPr id="13" name="07-012-rect"/>
+          <p:cNvSpPr/>
+          <p:nvPr/>
+        </p:nvSpPr>
+        <p:spPr>
+          <a:xfrm>
+            <a:off x="10715625" y="6610350"/>
+            <a:ext cx="114300" cy="38100"/>
+          </a:xfrm>
+          <a:prstGeom prst="rect">
+            <a:avLst/>
+          </a:prstGeom>
+          <a:solidFill>
+            <a:srgbClr val="D9E1EA"/>
+          </a:solidFill>
+          <a:ln>
+            <a:noFill/>
+          </a:ln>
+        </p:spPr>
+        <p:style>
+          <a:lnRef idx="1">
+            <a:schemeClr val="accent1"/>
+          </a:lnRef>
+          <a:fillRef idx="3">
+            <a:schemeClr val="accent1"/>
+          </a:fillRef>
+          <a:effectRef idx="2">
+            <a:schemeClr val="accent1"/>
+          </a:effectRef>
+          <a:fontRef idx="minor">
+            <a:schemeClr val="lt1"/>
+          </a:fontRef>
+        </p:style>
+        <p:txBody>
+          <a:bodyPr rtlCol="0" anchor="ctr"/>
+          <a:lstStyle/>
+          <a:p>
+            <a:pPr algn="ctr"/>
+          </a:p>
+        </p:txBody>
+      </p:sp>
+      <p:sp>
+        <p:nvSpPr>
+          <p:cNvPr id="14" name="07-013-rect"/>
+          <p:cNvSpPr/>
+          <p:nvPr/>
+        </p:nvSpPr>
+        <p:spPr>
+          <a:xfrm>
+            <a:off x="10896600" y="6610350"/>
+            <a:ext cx="114300" cy="38100"/>
+          </a:xfrm>
+          <a:prstGeom prst="rect">
+            <a:avLst/>
+          </a:prstGeom>
+          <a:solidFill>
+            <a:srgbClr val="D9E1EA"/>
+          </a:solidFill>
+          <a:ln>
+            <a:noFill/>
+          </a:ln>
+        </p:spPr>
+        <p:style>
+          <a:lnRef idx="1">
+            <a:schemeClr val="accent1"/>
+          </a:lnRef>
+          <a:fillRef idx="3">
+            <a:schemeClr val="accent1"/>
+          </a:fillRef>
+          <a:effectRef idx="2">
+            <a:schemeClr val="accent1"/>
+          </a:effectRef>
+          <a:fontRef idx="minor">
+            <a:schemeClr val="lt1"/>
+          </a:fontRef>
+        </p:style>
+        <p:txBody>
+          <a:bodyPr rtlCol="0" anchor="ctr"/>
+          <a:lstStyle/>
+          <a:p>
+            <a:pPr algn="ctr"/>
+          </a:p>
+        </p:txBody>
+      </p:sp>
+      <p:sp>
+        <p:nvSpPr>
+          <p:cNvPr id="15" name="07-014-rect"/>
+          <p:cNvSpPr/>
+          <p:nvPr/>
+        </p:nvSpPr>
+        <p:spPr>
+          <a:xfrm>
+            <a:off x="11077575" y="6610350"/>
+            <a:ext cx="114300" cy="38100"/>
+          </a:xfrm>
+          <a:prstGeom prst="rect">
+            <a:avLst/>
+          </a:prstGeom>
+          <a:solidFill>
+            <a:srgbClr val="087D70"/>
+          </a:solidFill>
+          <a:ln>
+            <a:noFill/>
+          </a:ln>
+        </p:spPr>
+        <p:style>
+          <a:lnRef idx="1">
+            <a:schemeClr val="accent1"/>
+          </a:lnRef>
+          <a:fillRef idx="3">
+            <a:schemeClr val="accent1"/>
+          </a:fillRef>
+          <a:effectRef idx="2">
+            <a:schemeClr val="accent1"/>
+          </a:effectRef>
+          <a:fontRef idx="minor">
+            <a:schemeClr val="lt1"/>
+          </a:fontRef>
+        </p:style>
+        <p:txBody>
+          <a:bodyPr rtlCol="0" anchor="ctr"/>
+          <a:lstStyle/>
+          <a:p>
+            <a:pPr algn="ctr"/>
+          </a:p>
+        </p:txBody>
+      </p:sp>
+      <p:sp>
+        <p:nvSpPr>
+          <p:cNvPr id="16" name="07-015-text"/>
+          <p:cNvSpPr txBox="1"/>
+          <p:nvPr/>
+        </p:nvSpPr>
+        <p:spPr>
+          <a:xfrm>
+            <a:off x="11430000" y="6505575"/>
+            <a:ext cx="228600" cy="273367"/>
+          </a:xfrm>
+          <a:prstGeom prst="rect">
+            <a:avLst/>
+          </a:prstGeom>
+          <a:noFill/>
+        </p:spPr>
+        <p:txBody>
+          <a:bodyPr wrap="none" lIns="0" rIns="0" tIns="0" bIns="0" anchor="t">
+            <a:spAutoFit/>
+          </a:bodyPr>
+          <a:lstStyle/>
+          <a:p>
+            <a:pPr algn="r">
+              <a:lnSpc>
+                <a:spcPct val="130000"/>
+              </a:lnSpc>
+              <a:spcBef>
+                <a:spcPts val="0"/>
+              </a:spcBef>
+              <a:spcAft>
+                <a:spcPts val="0"/>
+              </a:spcAft>
+              <a:defRPr sz="1425" b="1">
+                <a:solidFill>
+                  <a:srgbClr val="172638"/>
+                </a:solidFill>
+                <a:latin typeface="DejaVu Sans"/>
+              </a:defRPr>
+            </a:pPr>
+            <a:r>
+              <a:t>7</a:t>
+            </a:r>
+          </a:p>
+        </p:txBody>
+      </p:sp>
+      <p:sp>
+        <p:nvSpPr>
+          <p:cNvPr id="17" name="07-016-rect"/>
+          <p:cNvSpPr/>
+          <p:nvPr/>
+        </p:nvSpPr>
+        <p:spPr>
+          <a:xfrm>
+            <a:off x="533400" y="1724025"/>
+            <a:ext cx="3495675" cy="3295650"/>
+          </a:xfrm>
+          <a:prstGeom prst="roundRect">
+            <a:avLst>
+              <a:gd name="adj" fmla="val 2890"/>
+            </a:avLst>
+          </a:prstGeom>
+          <a:solidFill>
+            <a:srgbClr val="EFF5FF"/>
+          </a:solidFill>
+          <a:ln w="9525">
+            <a:solidFill>
+              <a:srgbClr val="D9E1EA"/>
+            </a:solidFill>
+          </a:ln>
+        </p:spPr>
+        <p:style>
+          <a:lnRef idx="1">
+            <a:schemeClr val="accent1"/>
+          </a:lnRef>
+          <a:fillRef idx="3">
+            <a:schemeClr val="accent1"/>
+          </a:fillRef>
+          <a:effectRef idx="2">
+            <a:schemeClr val="accent1"/>
+          </a:effectRef>
+          <a:fontRef idx="minor">
+            <a:schemeClr val="lt1"/>
+          </a:fontRef>
+        </p:style>
+        <p:txBody>
+          <a:bodyPr rtlCol="0" anchor="ctr"/>
+          <a:lstStyle/>
+          <a:p>
+            <a:pPr algn="ctr"/>
+          </a:p>
+        </p:txBody>
+      </p:sp>
+      <p:sp>
+        <p:nvSpPr>
+          <p:cNvPr id="18" name="07-017-text"/>
+          <p:cNvSpPr txBox="1"/>
+          <p:nvPr/>
+        </p:nvSpPr>
+        <p:spPr>
+          <a:xfrm>
+            <a:off x="723900" y="1905000"/>
+            <a:ext cx="3114675" cy="322897"/>
+          </a:xfrm>
+          <a:prstGeom prst="rect">
+            <a:avLst/>
+          </a:prstGeom>
+          <a:noFill/>
+        </p:spPr>
+        <p:txBody>
+          <a:bodyPr wrap="none" lIns="0" rIns="0" tIns="0" bIns="0" anchor="t">
+            <a:spAutoFit/>
+          </a:bodyPr>
+          <a:lstStyle/>
+          <a:p>
+            <a:pPr algn="l">
+              <a:lnSpc>
+                <a:spcPct val="130000"/>
+              </a:lnSpc>
+              <a:spcBef>
+                <a:spcPts val="0"/>
+              </a:spcBef>
+              <a:spcAft>
+                <a:spcPts val="0"/>
+              </a:spcAft>
+              <a:defRPr sz="1725" b="1">
+                <a:solidFill>
+                  <a:srgbClr val="2463C9"/>
+                </a:solidFill>
+                <a:latin typeface="DejaVu Sans"/>
+              </a:defRPr>
+            </a:pPr>
+            <a:r>
+              <a:t>Less packet padding</a:t>
+            </a:r>
+          </a:p>
+        </p:txBody>
+      </p:sp>
+      <p:sp>
+        <p:nvSpPr>
+          <p:cNvPr id="19" name="07-018-rect"/>
+          <p:cNvSpPr/>
+          <p:nvPr/>
+        </p:nvSpPr>
+        <p:spPr>
+          <a:xfrm>
+            <a:off x="4343400" y="1724025"/>
+            <a:ext cx="3495675" cy="3295650"/>
+          </a:xfrm>
+          <a:prstGeom prst="roundRect">
+            <a:avLst>
+              <a:gd name="adj" fmla="val 2890"/>
+            </a:avLst>
+          </a:prstGeom>
+          <a:solidFill>
+            <a:srgbClr val="EDF8F5"/>
+          </a:solidFill>
+          <a:ln w="9525">
+            <a:solidFill>
+              <a:srgbClr val="D9E1EA"/>
+            </a:solidFill>
+          </a:ln>
+        </p:spPr>
+        <p:style>
+          <a:lnRef idx="1">
+            <a:schemeClr val="accent1"/>
+          </a:lnRef>
+          <a:fillRef idx="3">
+            <a:schemeClr val="accent1"/>
+          </a:fillRef>
+          <a:effectRef idx="2">
+            <a:schemeClr val="accent1"/>
+          </a:effectRef>
+          <a:fontRef idx="minor">
+            <a:schemeClr val="lt1"/>
+          </a:fontRef>
+        </p:style>
+        <p:txBody>
+          <a:bodyPr rtlCol="0" anchor="ctr"/>
+          <a:lstStyle/>
+          <a:p>
+            <a:pPr algn="ctr"/>
+          </a:p>
+        </p:txBody>
+      </p:sp>
+      <p:sp>
+        <p:nvSpPr>
+          <p:cNvPr id="20" name="07-019-text"/>
+          <p:cNvSpPr txBox="1"/>
+          <p:nvPr/>
+        </p:nvSpPr>
+        <p:spPr>
+          <a:xfrm>
+            <a:off x="4533900" y="1905000"/>
+            <a:ext cx="3114675" cy="322897"/>
+          </a:xfrm>
+          <a:prstGeom prst="rect">
+            <a:avLst/>
+          </a:prstGeom>
+          <a:noFill/>
+        </p:spPr>
+        <p:txBody>
+          <a:bodyPr wrap="none" lIns="0" rIns="0" tIns="0" bIns="0" anchor="t">
+            <a:spAutoFit/>
+          </a:bodyPr>
+          <a:lstStyle/>
+          <a:p>
+            <a:pPr algn="l">
+              <a:lnSpc>
+                <a:spcPct val="130000"/>
+              </a:lnSpc>
+              <a:spcBef>
+                <a:spcPts val="0"/>
+              </a:spcBef>
+              <a:spcAft>
+                <a:spcPts val="0"/>
+              </a:spcAft>
+              <a:defRPr sz="1725" b="1">
+                <a:solidFill>
+                  <a:srgbClr val="087D70"/>
+                </a:solidFill>
+                <a:latin typeface="DejaVu Sans"/>
+              </a:defRPr>
+            </a:pPr>
+            <a:r>
+              <a:t>Reuse device storage</a:t>
+            </a:r>
+          </a:p>
+        </p:txBody>
+      </p:sp>
+      <p:sp>
+        <p:nvSpPr>
+          <p:cNvPr id="21" name="07-020-rect"/>
+          <p:cNvSpPr/>
+          <p:nvPr/>
+        </p:nvSpPr>
+        <p:spPr>
+          <a:xfrm>
+            <a:off x="8162925" y="1724025"/>
+            <a:ext cx="3495675" cy="3295650"/>
+          </a:xfrm>
+          <a:prstGeom prst="roundRect">
+            <a:avLst>
+              <a:gd name="adj" fmla="val 2890"/>
+            </a:avLst>
+          </a:prstGeom>
+          <a:solidFill>
+            <a:srgbClr val="FFF3EB"/>
+          </a:solidFill>
+          <a:ln w="9525">
+            <a:solidFill>
+              <a:srgbClr val="D9E1EA"/>
+            </a:solidFill>
+          </a:ln>
+        </p:spPr>
+        <p:style>
+          <a:lnRef idx="1">
+            <a:schemeClr val="accent1"/>
+          </a:lnRef>
+          <a:fillRef idx="3">
+            <a:schemeClr val="accent1"/>
+          </a:fillRef>
+          <a:effectRef idx="2">
+            <a:schemeClr val="accent1"/>
+          </a:effectRef>
+          <a:fontRef idx="minor">
+            <a:schemeClr val="lt1"/>
+          </a:fontRef>
+        </p:style>
+        <p:txBody>
+          <a:bodyPr rtlCol="0" anchor="ctr"/>
+          <a:lstStyle/>
+          <a:p>
+            <a:pPr algn="ctr"/>
+          </a:p>
+        </p:txBody>
+      </p:sp>
+      <p:sp>
+        <p:nvSpPr>
+          <p:cNvPr id="22" name="07-021-text"/>
+          <p:cNvSpPr txBox="1"/>
+          <p:nvPr/>
+        </p:nvSpPr>
+        <p:spPr>
+          <a:xfrm>
+            <a:off x="8353425" y="1905000"/>
+            <a:ext cx="3114675" cy="322897"/>
+          </a:xfrm>
+          <a:prstGeom prst="rect">
+            <a:avLst/>
+          </a:prstGeom>
+          <a:noFill/>
+        </p:spPr>
+        <p:txBody>
+          <a:bodyPr wrap="none" lIns="0" rIns="0" tIns="0" bIns="0" anchor="t">
+            <a:spAutoFit/>
+          </a:bodyPr>
+          <a:lstStyle/>
+          <a:p>
+            <a:pPr algn="l">
+              <a:lnSpc>
+                <a:spcPct val="130000"/>
+              </a:lnSpc>
+              <a:spcBef>
+                <a:spcPts val="0"/>
+              </a:spcBef>
+              <a:spcAft>
+                <a:spcPts val="0"/>
+              </a:spcAft>
+              <a:defRPr sz="1725" b="1">
+                <a:solidFill>
+                  <a:srgbClr val="C8531C"/>
+                </a:solidFill>
+                <a:latin typeface="DejaVu Sans"/>
+              </a:defRPr>
+            </a:pPr>
+            <a:r>
+              <a:t>Overlap useful work</a:t>
+            </a:r>
+          </a:p>
+        </p:txBody>
+      </p:sp>
+      <p:sp>
+        <p:nvSpPr>
+          <p:cNvPr id="23" name="07-022-text"/>
+          <p:cNvSpPr txBox="1"/>
+          <p:nvPr/>
+        </p:nvSpPr>
+        <p:spPr>
+          <a:xfrm>
+            <a:off x="723900" y="2371725"/>
+            <a:ext cx="3114675" cy="285750"/>
+          </a:xfrm>
+          <a:prstGeom prst="rect">
+            <a:avLst/>
+          </a:prstGeom>
+          <a:noFill/>
+        </p:spPr>
+        <p:txBody>
+          <a:bodyPr wrap="none" lIns="0" rIns="0" tIns="0" bIns="0" anchor="t">
+            <a:spAutoFit/>
+          </a:bodyPr>
+          <a:lstStyle/>
+          <a:p>
+            <a:pPr algn="l">
+              <a:lnSpc>
+                <a:spcPct val="130000"/>
+              </a:lnSpc>
+              <a:spcBef>
+                <a:spcPts val="0"/>
+              </a:spcBef>
+              <a:spcAft>
+                <a:spcPts val="0"/>
+              </a:spcAft>
+              <a:defRPr sz="1500" b="0">
+                <a:solidFill>
+                  <a:srgbClr val="2463C9"/>
+                </a:solidFill>
+                <a:latin typeface="DejaVu Sans Mono"/>
+              </a:defRPr>
+            </a:pPr>
+            <a:r>
+              <a:t>lax.ragged_all_to_all</a:t>
+            </a:r>
+          </a:p>
+        </p:txBody>
+      </p:sp>
+      <p:sp>
+        <p:nvSpPr>
+          <p:cNvPr id="24" name="07-023-text"/>
+          <p:cNvSpPr txBox="1"/>
+          <p:nvPr/>
+        </p:nvSpPr>
+        <p:spPr>
+          <a:xfrm>
+            <a:off x="723900" y="2800350"/>
+            <a:ext cx="3114675" cy="236220"/>
+          </a:xfrm>
+          <a:prstGeom prst="rect">
+            <a:avLst/>
+          </a:prstGeom>
+          <a:noFill/>
+        </p:spPr>
+        <p:txBody>
+          <a:bodyPr wrap="none" lIns="0" rIns="0" tIns="0" bIns="0" anchor="t">
+            <a:spAutoFit/>
+          </a:bodyPr>
+          <a:lstStyle/>
+          <a:p>
+            <a:pPr algn="l">
+              <a:lnSpc>
+                <a:spcPct val="130000"/>
+              </a:lnSpc>
+              <a:spcBef>
+                <a:spcPts val="0"/>
+              </a:spcBef>
+              <a:spcAft>
+                <a:spcPts val="0"/>
+              </a:spcAft>
+              <a:defRPr sz="1200" b="0">
+                <a:solidFill>
+                  <a:srgbClr val="546477"/>
+                </a:solidFill>
+                <a:latin typeface="DejaVu Sans"/>
+              </a:defRPr>
+            </a:pPr>
+            <a:r>
+              <a:t>Fixed peer packets</a:t>
+            </a:r>
+          </a:p>
+        </p:txBody>
+      </p:sp>
+      <p:sp>
+        <p:nvSpPr>
+          <p:cNvPr id="25" name="07-024-rect"/>
+          <p:cNvSpPr/>
+          <p:nvPr/>
+        </p:nvSpPr>
+        <p:spPr>
+          <a:xfrm>
+            <a:off x="723900" y="3057525"/>
+            <a:ext cx="266700" cy="209550"/>
+          </a:xfrm>
+          <a:prstGeom prst="rect">
+            <a:avLst/>
+          </a:prstGeom>
+          <a:solidFill>
+            <a:srgbClr val="2463C9"/>
+          </a:solidFill>
+          <a:ln w="9525">
+            <a:solidFill>
+              <a:srgbClr val="2463C9"/>
+            </a:solidFill>
+          </a:ln>
+        </p:spPr>
+        <p:style>
+          <a:lnRef idx="1">
+            <a:schemeClr val="accent1"/>
+          </a:lnRef>
+          <a:fillRef idx="3">
+            <a:schemeClr val="accent1"/>
+          </a:fillRef>
+          <a:effectRef idx="2">
+            <a:schemeClr val="accent1"/>
+          </a:effectRef>
+          <a:fontRef idx="minor">
+            <a:schemeClr val="lt1"/>
+          </a:fontRef>
+        </p:style>
+        <p:txBody>
+          <a:bodyPr rtlCol="0" anchor="ctr"/>
+          <a:lstStyle/>
+          <a:p>
+            <a:pPr algn="ctr"/>
+          </a:p>
+        </p:txBody>
+      </p:sp>
+      <p:sp>
+        <p:nvSpPr>
+          <p:cNvPr id="26" name="07-025-rect"/>
+          <p:cNvSpPr/>
+          <p:nvPr/>
+        </p:nvSpPr>
+        <p:spPr>
+          <a:xfrm>
+            <a:off x="1047750" y="3057525"/>
+            <a:ext cx="266700" cy="209550"/>
+          </a:xfrm>
+          <a:prstGeom prst="rect">
+            <a:avLst/>
+          </a:prstGeom>
+          <a:solidFill>
+            <a:srgbClr val="FFFFFF"/>
+          </a:solidFill>
+          <a:ln w="9525">
+            <a:solidFill>
+              <a:srgbClr val="D9E1EA"/>
+            </a:solidFill>
+          </a:ln>
+        </p:spPr>
+        <p:style>
+          <a:lnRef idx="1">
+            <a:schemeClr val="accent1"/>
+          </a:lnRef>
+          <a:fillRef idx="3">
+            <a:schemeClr val="accent1"/>
+          </a:fillRef>
+          <a:effectRef idx="2">
+            <a:schemeClr val="accent1"/>
+          </a:effectRef>
+          <a:fontRef idx="minor">
+            <a:schemeClr val="lt1"/>
+          </a:fontRef>
+        </p:style>
+        <p:txBody>
+          <a:bodyPr rtlCol="0" anchor="ctr"/>
+          <a:lstStyle/>
+          <a:p>
+            <a:pPr algn="ctr"/>
+          </a:p>
+        </p:txBody>
+      </p:sp>
+      <p:sp>
+        <p:nvSpPr>
+          <p:cNvPr id="27" name="07-026-rect"/>
+          <p:cNvSpPr/>
+          <p:nvPr/>
+        </p:nvSpPr>
+        <p:spPr>
+          <a:xfrm>
+            <a:off x="1371600" y="3057525"/>
+            <a:ext cx="266700" cy="209550"/>
+          </a:xfrm>
+          <a:prstGeom prst="rect">
+            <a:avLst/>
+          </a:prstGeom>
+          <a:solidFill>
+            <a:srgbClr val="FFFFFF"/>
+          </a:solidFill>
+          <a:ln w="9525">
+            <a:solidFill>
+              <a:srgbClr val="D9E1EA"/>
+            </a:solidFill>
+          </a:ln>
+        </p:spPr>
+        <p:style>
+          <a:lnRef idx="1">
+            <a:schemeClr val="accent1"/>
+          </a:lnRef>
+          <a:fillRef idx="3">
+            <a:schemeClr val="accent1"/>
+          </a:fillRef>
+          <a:effectRef idx="2">
+            <a:schemeClr val="accent1"/>
+          </a:effectRef>
+          <a:fontRef idx="minor">
+            <a:schemeClr val="lt1"/>
+          </a:fontRef>
+        </p:style>
+        <p:txBody>
+          <a:bodyPr rtlCol="0" anchor="ctr"/>
+          <a:lstStyle/>
+          <a:p>
+            <a:pPr algn="ctr"/>
+          </a:p>
+        </p:txBody>
+      </p:sp>
+      <p:sp>
+        <p:nvSpPr>
+          <p:cNvPr id="28" name="07-027-rect"/>
+          <p:cNvSpPr/>
+          <p:nvPr/>
+        </p:nvSpPr>
+        <p:spPr>
+          <a:xfrm>
+            <a:off x="1695450" y="3057525"/>
+            <a:ext cx="266700" cy="209550"/>
+          </a:xfrm>
+          <a:prstGeom prst="rect">
+            <a:avLst/>
+          </a:prstGeom>
+          <a:solidFill>
+            <a:srgbClr val="FFFFFF"/>
+          </a:solidFill>
+          <a:ln w="9525">
+            <a:solidFill>
+              <a:srgbClr val="D9E1EA"/>
+            </a:solidFill>
+          </a:ln>
+        </p:spPr>
+        <p:style>
+          <a:lnRef idx="1">
+            <a:schemeClr val="accent1"/>
+          </a:lnRef>
+          <a:fillRef idx="3">
+            <a:schemeClr val="accent1"/>
+          </a:fillRef>
+          <a:effectRef idx="2">
+            <a:schemeClr val="accent1"/>
+          </a:effectRef>
+          <a:fontRef idx="minor">
+            <a:schemeClr val="lt1"/>
+          </a:fontRef>
+        </p:style>
+        <p:txBody>
+          <a:bodyPr rtlCol="0" anchor="ctr"/>
+          <a:lstStyle/>
+          <a:p>
+            <a:pPr algn="ctr"/>
+          </a:p>
+        </p:txBody>
+      </p:sp>
+      <p:sp>
+        <p:nvSpPr>
+          <p:cNvPr id="29" name="07-028-rect"/>
+          <p:cNvSpPr/>
+          <p:nvPr/>
+        </p:nvSpPr>
+        <p:spPr>
+          <a:xfrm>
+            <a:off x="2019300" y="3057525"/>
+            <a:ext cx="266700" cy="209550"/>
+          </a:xfrm>
+          <a:prstGeom prst="rect">
+            <a:avLst/>
+          </a:prstGeom>
+          <a:solidFill>
+            <a:srgbClr val="2463C9"/>
+          </a:solidFill>
+          <a:ln w="9525">
+            <a:solidFill>
+              <a:srgbClr val="2463C9"/>
+            </a:solidFill>
+          </a:ln>
+        </p:spPr>
+        <p:style>
+          <a:lnRef idx="1">
+            <a:schemeClr val="accent1"/>
+          </a:lnRef>
+          <a:fillRef idx="3">
+            <a:schemeClr val="accent1"/>
+          </a:fillRef>
+          <a:effectRef idx="2">
+            <a:schemeClr val="accent1"/>
+          </a:effectRef>
+          <a:fontRef idx="minor">
+            <a:schemeClr val="lt1"/>
+          </a:fontRef>
+        </p:style>
+        <p:txBody>
+          <a:bodyPr rtlCol="0" anchor="ctr"/>
+          <a:lstStyle/>
+          <a:p>
+            <a:pPr algn="ctr"/>
+          </a:p>
+        </p:txBody>
+      </p:sp>
+      <p:sp>
+        <p:nvSpPr>
+          <p:cNvPr id="30" name="07-029-rect"/>
+          <p:cNvSpPr/>
+          <p:nvPr/>
+        </p:nvSpPr>
+        <p:spPr>
+          <a:xfrm>
+            <a:off x="2343150" y="3057525"/>
+            <a:ext cx="266700" cy="209550"/>
+          </a:xfrm>
+          <a:prstGeom prst="rect">
+            <a:avLst/>
+          </a:prstGeom>
+          <a:solidFill>
+            <a:srgbClr val="2463C9"/>
+          </a:solidFill>
+          <a:ln w="9525">
+            <a:solidFill>
+              <a:srgbClr val="2463C9"/>
+            </a:solidFill>
+          </a:ln>
+        </p:spPr>
+        <p:style>
+          <a:lnRef idx="1">
+            <a:schemeClr val="accent1"/>
+          </a:lnRef>
+          <a:fillRef idx="3">
+            <a:schemeClr val="accent1"/>
+          </a:fillRef>
+          <a:effectRef idx="2">
+            <a:schemeClr val="accent1"/>
+          </a:effectRef>
+          <a:fontRef idx="minor">
+            <a:schemeClr val="lt1"/>
+          </a:fontRef>
+        </p:style>
+        <p:txBody>
+          <a:bodyPr rtlCol="0" anchor="ctr"/>
+          <a:lstStyle/>
+          <a:p>
+            <a:pPr algn="ctr"/>
+          </a:p>
+        </p:txBody>
+      </p:sp>
+      <p:sp>
+        <p:nvSpPr>
+          <p:cNvPr id="31" name="07-030-rect"/>
+          <p:cNvSpPr/>
+          <p:nvPr/>
+        </p:nvSpPr>
+        <p:spPr>
+          <a:xfrm>
+            <a:off x="2667000" y="3057525"/>
+            <a:ext cx="266700" cy="209550"/>
+          </a:xfrm>
+          <a:prstGeom prst="rect">
+            <a:avLst/>
+          </a:prstGeom>
+          <a:solidFill>
+            <a:srgbClr val="FFFFFF"/>
+          </a:solidFill>
+          <a:ln w="9525">
+            <a:solidFill>
+              <a:srgbClr val="D9E1EA"/>
+            </a:solidFill>
+          </a:ln>
+        </p:spPr>
+        <p:style>
+          <a:lnRef idx="1">
+            <a:schemeClr val="accent1"/>
+          </a:lnRef>
+          <a:fillRef idx="3">
+            <a:schemeClr val="accent1"/>
+          </a:fillRef>
+          <a:effectRef idx="2">
+            <a:schemeClr val="accent1"/>
+          </a:effectRef>
+          <a:fontRef idx="minor">
+            <a:schemeClr val="lt1"/>
+          </a:fontRef>
+        </p:style>
+        <p:txBody>
+          <a:bodyPr rtlCol="0" anchor="ctr"/>
+          <a:lstStyle/>
+          <a:p>
+            <a:pPr algn="ctr"/>
+          </a:p>
+        </p:txBody>
+      </p:sp>
+      <p:sp>
+        <p:nvSpPr>
+          <p:cNvPr id="32" name="07-031-rect"/>
+          <p:cNvSpPr/>
+          <p:nvPr/>
+        </p:nvSpPr>
+        <p:spPr>
+          <a:xfrm>
+            <a:off x="2990850" y="3057525"/>
+            <a:ext cx="266700" cy="209550"/>
+          </a:xfrm>
+          <a:prstGeom prst="rect">
+            <a:avLst/>
+          </a:prstGeom>
+          <a:solidFill>
+            <a:srgbClr val="FFFFFF"/>
+          </a:solidFill>
+          <a:ln w="9525">
+            <a:solidFill>
+              <a:srgbClr val="D9E1EA"/>
+            </a:solidFill>
+          </a:ln>
+        </p:spPr>
+        <p:style>
+          <a:lnRef idx="1">
+            <a:schemeClr val="accent1"/>
+          </a:lnRef>
+          <a:fillRef idx="3">
+            <a:schemeClr val="accent1"/>
+          </a:fillRef>
+          <a:effectRef idx="2">
+            <a:schemeClr val="accent1"/>
+          </a:effectRef>
+          <a:fontRef idx="minor">
+            <a:schemeClr val="lt1"/>
+          </a:fontRef>
+        </p:style>
+        <p:txBody>
+          <a:bodyPr rtlCol="0" anchor="ctr"/>
+          <a:lstStyle/>
+          <a:p>
+            <a:pPr algn="ctr"/>
+          </a:p>
+        </p:txBody>
+      </p:sp>
+      <p:sp>
+        <p:nvSpPr>
+          <p:cNvPr id="33" name="07-032-line"/>
+          <p:cNvSpPr/>
+          <p:nvPr/>
+        </p:nvSpPr>
+        <p:spPr>
+          <a:xfrm>
+            <a:off x="3476625" y="3143250"/>
+            <a:ext cx="0" cy="428625"/>
+          </a:xfrm>
+          <a:custGeom>
+            <a:avLst/>
+            <a:gdLst/>
+            <a:ahLst/>
+            <a:cxnLst/>
+            <a:rect l="l" t="t" r="r" b="b"/>
+            <a:pathLst>
+              <a:path w="0" h="45">
+                <a:moveTo>
+                  <a:pt x="0" y="0"/>
+                </a:moveTo>
+                <a:lnTo>
+                  <a:pt x="0" y="45"/>
+                </a:lnTo>
+              </a:path>
+            </a:pathLst>
+          </a:custGeom>
+          <a:noFill/>
+          <a:ln w="19050">
+            <a:solidFill>
+              <a:srgbClr val="2463C9"/>
+            </a:solidFill>
+          </a:ln>
+        </p:spPr>
+        <p:style>
+          <a:lnRef idx="1">
+            <a:schemeClr val="accent1"/>
+          </a:lnRef>
+          <a:fillRef idx="3">
+            <a:schemeClr val="accent1"/>
+          </a:fillRef>
+          <a:effectRef idx="2">
+            <a:schemeClr val="accent1"/>
+          </a:effectRef>
+          <a:fontRef idx="minor">
+            <a:schemeClr val="lt1"/>
+          </a:fontRef>
+        </p:style>
+        <p:txBody>
+          <a:bodyPr rtlCol="0" anchor="ctr"/>
+          <a:lstStyle/>
+          <a:p>
+            <a:pPr algn="ctr"/>
+          </a:p>
+        </p:txBody>
+      </p:sp>
+      <p:sp>
+        <p:nvSpPr>
+          <p:cNvPr id="34" name="07-033-poly"/>
+          <p:cNvSpPr/>
+          <p:nvPr/>
+        </p:nvSpPr>
+        <p:spPr>
+          <a:xfrm>
+            <a:off x="3438525" y="3495675"/>
+            <a:ext cx="76200" cy="76200"/>
+          </a:xfrm>
+          <a:custGeom>
+            <a:avLst/>
+            <a:gdLst/>
+            <a:ahLst/>
+            <a:cxnLst/>
+            <a:rect l="l" t="t" r="r" b="b"/>
+            <a:pathLst>
+              <a:path w="8" h="8">
+                <a:moveTo>
+                  <a:pt x="4" y="8"/>
+                </a:moveTo>
+                <a:lnTo>
+                  <a:pt x="8" y="0"/>
+                </a:lnTo>
+                <a:lnTo>
+                  <a:pt x="0" y="0"/>
+                </a:lnTo>
+                <a:close/>
+              </a:path>
+            </a:pathLst>
+          </a:custGeom>
+          <a:solidFill>
+            <a:srgbClr val="2463C9"/>
+          </a:solidFill>
+          <a:ln>
+            <a:noFill/>
+          </a:ln>
+        </p:spPr>
+        <p:style>
+          <a:lnRef idx="1">
+            <a:schemeClr val="accent1"/>
+          </a:lnRef>
+          <a:fillRef idx="3">
+            <a:schemeClr val="accent1"/>
+          </a:fillRef>
+          <a:effectRef idx="2">
+            <a:schemeClr val="accent1"/>
+          </a:effectRef>
+          <a:fontRef idx="minor">
+            <a:schemeClr val="lt1"/>
+          </a:fontRef>
+        </p:style>
+        <p:txBody>
+          <a:bodyPr rtlCol="0" anchor="ctr"/>
+          <a:lstStyle/>
+          <a:p>
+            <a:pPr algn="ctr"/>
+          </a:p>
+        </p:txBody>
+      </p:sp>
+      <p:sp>
+        <p:nvSpPr>
+          <p:cNvPr id="35" name="07-034-text"/>
+          <p:cNvSpPr txBox="1"/>
+          <p:nvPr/>
+        </p:nvSpPr>
+        <p:spPr>
+          <a:xfrm>
+            <a:off x="723900" y="3438525"/>
+            <a:ext cx="2667000" cy="236220"/>
+          </a:xfrm>
+          <a:prstGeom prst="rect">
+            <a:avLst/>
+          </a:prstGeom>
+          <a:noFill/>
+        </p:spPr>
+        <p:txBody>
+          <a:bodyPr wrap="none" lIns="0" rIns="0" tIns="0" bIns="0" anchor="t">
+            <a:spAutoFit/>
+          </a:bodyPr>
+          <a:lstStyle/>
+          <a:p>
+            <a:pPr algn="l">
+              <a:lnSpc>
+                <a:spcPct val="130000"/>
+              </a:lnSpc>
+              <a:spcBef>
+                <a:spcPts val="0"/>
+              </a:spcBef>
+              <a:spcAft>
+                <a:spcPts val="0"/>
+              </a:spcAft>
+              <a:defRPr sz="1200" b="0">
+                <a:solidFill>
+                  <a:srgbClr val="546477"/>
+                </a:solidFill>
+                <a:latin typeface="DejaVu Sans"/>
+              </a:defRPr>
+            </a:pPr>
+            <a:r>
+              <a:t>Packed values + counts / offsets</a:t>
+            </a:r>
+          </a:p>
+        </p:txBody>
+      </p:sp>
+      <p:sp>
+        <p:nvSpPr>
+          <p:cNvPr id="36" name="07-035-rect"/>
+          <p:cNvSpPr/>
+          <p:nvPr/>
+        </p:nvSpPr>
+        <p:spPr>
+          <a:xfrm>
+            <a:off x="723900" y="3705225"/>
+            <a:ext cx="266700" cy="209550"/>
+          </a:xfrm>
+          <a:prstGeom prst="rect">
+            <a:avLst/>
+          </a:prstGeom>
+          <a:solidFill>
+            <a:srgbClr val="2463C9"/>
+          </a:solidFill>
+          <a:ln>
+            <a:noFill/>
+          </a:ln>
+        </p:spPr>
+        <p:style>
+          <a:lnRef idx="1">
+            <a:schemeClr val="accent1"/>
+          </a:lnRef>
+          <a:fillRef idx="3">
+            <a:schemeClr val="accent1"/>
+          </a:fillRef>
+          <a:effectRef idx="2">
+            <a:schemeClr val="accent1"/>
+          </a:effectRef>
+          <a:fontRef idx="minor">
+            <a:schemeClr val="lt1"/>
+          </a:fontRef>
+        </p:style>
+        <p:txBody>
+          <a:bodyPr rtlCol="0" anchor="ctr"/>
+          <a:lstStyle/>
+          <a:p>
+            <a:pPr algn="ctr"/>
+          </a:p>
+        </p:txBody>
+      </p:sp>
+      <p:sp>
+        <p:nvSpPr>
+          <p:cNvPr id="37" name="07-036-rect"/>
+          <p:cNvSpPr/>
+          <p:nvPr/>
+        </p:nvSpPr>
+        <p:spPr>
+          <a:xfrm>
+            <a:off x="1047750" y="3705225"/>
+            <a:ext cx="266700" cy="209550"/>
+          </a:xfrm>
+          <a:prstGeom prst="rect">
+            <a:avLst/>
+          </a:prstGeom>
+          <a:solidFill>
+            <a:srgbClr val="2463C9"/>
+          </a:solidFill>
+          <a:ln>
+            <a:noFill/>
+          </a:ln>
+        </p:spPr>
+        <p:style>
+          <a:lnRef idx="1">
+            <a:schemeClr val="accent1"/>
+          </a:lnRef>
+          <a:fillRef idx="3">
+            <a:schemeClr val="accent1"/>
+          </a:fillRef>
+          <a:effectRef idx="2">
+            <a:schemeClr val="accent1"/>
+          </a:effectRef>
+          <a:fontRef idx="minor">
+            <a:schemeClr val="lt1"/>
+          </a:fontRef>
+        </p:style>
+        <p:txBody>
+          <a:bodyPr rtlCol="0" anchor="ctr"/>
+          <a:lstStyle/>
+          <a:p>
+            <a:pPr algn="ctr"/>
+          </a:p>
+        </p:txBody>
+      </p:sp>
+      <p:sp>
+        <p:nvSpPr>
+          <p:cNvPr id="38" name="07-037-rect"/>
+          <p:cNvSpPr/>
+          <p:nvPr/>
+        </p:nvSpPr>
+        <p:spPr>
+          <a:xfrm>
+            <a:off x="1371600" y="3705225"/>
+            <a:ext cx="266700" cy="209550"/>
+          </a:xfrm>
+          <a:prstGeom prst="rect">
+            <a:avLst/>
+          </a:prstGeom>
+          <a:solidFill>
+            <a:srgbClr val="2463C9"/>
+          </a:solidFill>
+          <a:ln>
+            <a:noFill/>
+          </a:ln>
+        </p:spPr>
+        <p:style>
+          <a:lnRef idx="1">
+            <a:schemeClr val="accent1"/>
+          </a:lnRef>
+          <a:fillRef idx="3">
+            <a:schemeClr val="accent1"/>
+          </a:fillRef>
+          <a:effectRef idx="2">
+            <a:schemeClr val="accent1"/>
+          </a:effectRef>
+          <a:fontRef idx="minor">
+            <a:schemeClr val="lt1"/>
+          </a:fontRef>
+        </p:style>
+        <p:txBody>
+          <a:bodyPr rtlCol="0" anchor="ctr"/>
+          <a:lstStyle/>
+          <a:p>
+            <a:pPr algn="ctr"/>
+          </a:p>
+        </p:txBody>
+      </p:sp>
+      <p:sp>
+        <p:nvSpPr>
+          <p:cNvPr id="39" name="07-038-text"/>
+          <p:cNvSpPr txBox="1"/>
+          <p:nvPr/>
+        </p:nvSpPr>
+        <p:spPr>
+          <a:xfrm>
+            <a:off x="723900" y="4191000"/>
+            <a:ext cx="3114675" cy="706755"/>
+          </a:xfrm>
+          <a:prstGeom prst="rect">
+            <a:avLst/>
+          </a:prstGeom>
+          <a:noFill/>
+        </p:spPr>
+        <p:txBody>
+          <a:bodyPr wrap="none" lIns="0" rIns="0" tIns="0" bIns="0" anchor="t">
+            <a:spAutoFit/>
+          </a:bodyPr>
+          <a:lstStyle/>
+          <a:p>
+            <a:pPr algn="l">
+              <a:lnSpc>
+                <a:spcPct val="130000"/>
+              </a:lnSpc>
+              <a:spcBef>
+                <a:spcPts val="0"/>
+              </a:spcBef>
+              <a:spcAft>
+                <a:spcPts val="0"/>
+              </a:spcAft>
+              <a:defRPr sz="1350" b="0">
+                <a:solidFill>
+                  <a:srgbClr val="172638"/>
+                </a:solidFill>
+                <a:latin typeface="DejaVu Sans"/>
+              </a:defRPr>
+            </a:pPr>
+            <a:r>
+              <a:t>Send variable-length slices.</a:t>
+            </a:r>
+          </a:p>
+          <a:p>
+            <a:pPr algn="l">
+              <a:lnSpc>
+                <a:spcPct val="130000"/>
+              </a:lnSpc>
+              <a:spcBef>
+                <a:spcPts val="0"/>
+              </a:spcBef>
+              <a:spcAft>
+                <a:spcPts val="0"/>
+              </a:spcAft>
+              <a:defRPr sz="1350" b="0">
+                <a:solidFill>
+                  <a:srgbClr val="172638"/>
+                </a:solidFill>
+                <a:latin typeface="DejaVu Sans"/>
+              </a:defRPr>
+            </a:pPr>
+            <a:r>
+              <a:t>Keep fixed buffer capacities;</a:t>
+            </a:r>
+          </a:p>
+          <a:p>
+            <a:pPr algn="l">
+              <a:lnSpc>
+                <a:spcPct val="130000"/>
+              </a:lnSpc>
+              <a:spcBef>
+                <a:spcPts val="0"/>
+              </a:spcBef>
+              <a:spcAft>
+                <a:spcPts val="0"/>
+              </a:spcAft>
+              <a:defRPr sz="1350" b="0">
+                <a:solidFill>
+                  <a:srgbClr val="172638"/>
+                </a:solidFill>
+                <a:latin typeface="DejaVu Sans"/>
+              </a:defRPr>
+            </a:pPr>
+            <a:r>
+              <a:t>vector / CSR padding remains.</a:t>
+            </a:r>
+          </a:p>
+        </p:txBody>
+      </p:sp>
+      <p:sp>
+        <p:nvSpPr>
+          <p:cNvPr id="40" name="07-039-text"/>
+          <p:cNvSpPr txBox="1"/>
+          <p:nvPr/>
+        </p:nvSpPr>
+        <p:spPr>
+          <a:xfrm>
+            <a:off x="4533900" y="2371725"/>
+            <a:ext cx="3114675" cy="260985"/>
+          </a:xfrm>
+          <a:prstGeom prst="rect">
+            <a:avLst/>
+          </a:prstGeom>
+          <a:noFill/>
+        </p:spPr>
+        <p:txBody>
+          <a:bodyPr wrap="none" lIns="0" rIns="0" tIns="0" bIns="0" anchor="t">
+            <a:spAutoFit/>
+          </a:bodyPr>
+          <a:lstStyle/>
+          <a:p>
+            <a:pPr algn="l">
+              <a:lnSpc>
+                <a:spcPct val="130000"/>
+              </a:lnSpc>
+              <a:spcBef>
+                <a:spcPts val="0"/>
+              </a:spcBef>
+              <a:spcAft>
+                <a:spcPts val="0"/>
+              </a:spcAft>
+              <a:defRPr sz="1350" b="0">
+                <a:solidFill>
+                  <a:srgbClr val="087D70"/>
+                </a:solidFill>
+                <a:latin typeface="DejaVu Sans Mono"/>
+              </a:defRPr>
+            </a:pPr>
+            <a:r>
+              <a:t>donate_argnums / jax.new_ref</a:t>
+            </a:r>
+          </a:p>
+        </p:txBody>
+      </p:sp>
+      <p:sp>
+        <p:nvSpPr>
+          <p:cNvPr id="41" name="07-040-rect"/>
+          <p:cNvSpPr/>
+          <p:nvPr/>
+        </p:nvSpPr>
+        <p:spPr>
+          <a:xfrm>
+            <a:off x="4676775" y="3009900"/>
+            <a:ext cx="561975" cy="409575"/>
+          </a:xfrm>
+          <a:prstGeom prst="roundRect">
+            <a:avLst>
+              <a:gd name="adj" fmla="val 6976"/>
+            </a:avLst>
+          </a:prstGeom>
+          <a:solidFill>
+            <a:srgbClr val="2463C9"/>
+          </a:solidFill>
+          <a:ln w="9525">
+            <a:solidFill>
+              <a:srgbClr val="2463C9"/>
+            </a:solidFill>
+          </a:ln>
+        </p:spPr>
+        <p:style>
+          <a:lnRef idx="1">
+            <a:schemeClr val="accent1"/>
+          </a:lnRef>
+          <a:fillRef idx="3">
+            <a:schemeClr val="accent1"/>
+          </a:fillRef>
+          <a:effectRef idx="2">
+            <a:schemeClr val="accent1"/>
+          </a:effectRef>
+          <a:fontRef idx="minor">
+            <a:schemeClr val="lt1"/>
+          </a:fontRef>
+        </p:style>
+        <p:txBody>
+          <a:bodyPr rtlCol="0" anchor="ctr"/>
+          <a:lstStyle/>
+          <a:p>
+            <a:pPr algn="ctr"/>
+          </a:p>
+        </p:txBody>
+      </p:sp>
+      <p:sp>
+        <p:nvSpPr>
+          <p:cNvPr id="42" name="07-041-text"/>
+          <p:cNvSpPr txBox="1"/>
+          <p:nvPr/>
+        </p:nvSpPr>
+        <p:spPr>
+          <a:xfrm>
+            <a:off x="4695825" y="3068954"/>
+            <a:ext cx="523875" cy="310515"/>
+          </a:xfrm>
+          <a:prstGeom prst="rect">
+            <a:avLst/>
+          </a:prstGeom>
+          <a:noFill/>
+        </p:spPr>
+        <p:txBody>
+          <a:bodyPr wrap="none" lIns="0" rIns="0" tIns="0" bIns="0" anchor="t">
+            <a:spAutoFit/>
+          </a:bodyPr>
+          <a:lstStyle/>
+          <a:p>
+            <a:pPr algn="ctr">
+              <a:lnSpc>
+                <a:spcPct val="130000"/>
+              </a:lnSpc>
+              <a:spcBef>
+                <a:spcPts val="0"/>
+              </a:spcBef>
+              <a:spcAft>
+                <a:spcPts val="0"/>
+              </a:spcAft>
+              <a:defRPr sz="1650" b="1">
+                <a:solidFill>
+                  <a:srgbClr val="FFFFFF"/>
+                </a:solidFill>
+                <a:latin typeface="DejaVu Sans"/>
+              </a:defRPr>
+            </a:pPr>
+            <a:r>
+              <a:t>1</a:t>
+            </a:r>
+          </a:p>
+        </p:txBody>
+      </p:sp>
+      <p:sp>
+        <p:nvSpPr>
+          <p:cNvPr id="43" name="07-042-rect"/>
+          <p:cNvSpPr/>
+          <p:nvPr/>
+        </p:nvSpPr>
+        <p:spPr>
+          <a:xfrm>
+            <a:off x="5267325" y="3009900"/>
+            <a:ext cx="561975" cy="409575"/>
+          </a:xfrm>
+          <a:prstGeom prst="roundRect">
+            <a:avLst>
+              <a:gd name="adj" fmla="val 6976"/>
+            </a:avLst>
+          </a:prstGeom>
+          <a:solidFill>
+            <a:srgbClr val="2463C9"/>
+          </a:solidFill>
+          <a:ln w="9525">
+            <a:solidFill>
+              <a:srgbClr val="2463C9"/>
+            </a:solidFill>
+          </a:ln>
+        </p:spPr>
+        <p:style>
+          <a:lnRef idx="1">
+            <a:schemeClr val="accent1"/>
+          </a:lnRef>
+          <a:fillRef idx="3">
+            <a:schemeClr val="accent1"/>
+          </a:fillRef>
+          <a:effectRef idx="2">
+            <a:schemeClr val="accent1"/>
+          </a:effectRef>
+          <a:fontRef idx="minor">
+            <a:schemeClr val="lt1"/>
+          </a:fontRef>
+        </p:style>
+        <p:txBody>
+          <a:bodyPr rtlCol="0" anchor="ctr"/>
+          <a:lstStyle/>
+          <a:p>
+            <a:pPr algn="ctr"/>
+          </a:p>
+        </p:txBody>
+      </p:sp>
+      <p:sp>
+        <p:nvSpPr>
+          <p:cNvPr id="44" name="07-043-text"/>
+          <p:cNvSpPr txBox="1"/>
+          <p:nvPr/>
+        </p:nvSpPr>
+        <p:spPr>
+          <a:xfrm>
+            <a:off x="5286375" y="3068954"/>
+            <a:ext cx="523875" cy="310515"/>
+          </a:xfrm>
+          <a:prstGeom prst="rect">
+            <a:avLst/>
+          </a:prstGeom>
+          <a:noFill/>
+        </p:spPr>
+        <p:txBody>
+          <a:bodyPr wrap="none" lIns="0" rIns="0" tIns="0" bIns="0" anchor="t">
+            <a:spAutoFit/>
+          </a:bodyPr>
+          <a:lstStyle/>
+          <a:p>
+            <a:pPr algn="ctr">
+              <a:lnSpc>
+                <a:spcPct val="130000"/>
+              </a:lnSpc>
+              <a:spcBef>
+                <a:spcPts val="0"/>
+              </a:spcBef>
+              <a:spcAft>
+                <a:spcPts val="0"/>
+              </a:spcAft>
+              <a:defRPr sz="1650" b="1">
+                <a:solidFill>
+                  <a:srgbClr val="FFFFFF"/>
+                </a:solidFill>
+                <a:latin typeface="DejaVu Sans"/>
+              </a:defRPr>
+            </a:pPr>
+            <a:r>
+              <a:t>2</a:t>
+            </a:r>
+          </a:p>
+        </p:txBody>
+      </p:sp>
+      <p:sp>
+        <p:nvSpPr>
+          <p:cNvPr id="45" name="07-044-rect"/>
+          <p:cNvSpPr/>
+          <p:nvPr/>
+        </p:nvSpPr>
+        <p:spPr>
+          <a:xfrm>
+            <a:off x="5857875" y="3009900"/>
+            <a:ext cx="561975" cy="409575"/>
+          </a:xfrm>
+          <a:prstGeom prst="roundRect">
+            <a:avLst>
+              <a:gd name="adj" fmla="val 6976"/>
+            </a:avLst>
+          </a:prstGeom>
+          <a:solidFill>
+            <a:srgbClr val="FFFFFF"/>
+          </a:solidFill>
+          <a:ln w="19050">
+            <a:solidFill>
+              <a:srgbClr val="C8531C"/>
+            </a:solidFill>
+          </a:ln>
+        </p:spPr>
+        <p:style>
+          <a:lnRef idx="1">
+            <a:schemeClr val="accent1"/>
+          </a:lnRef>
+          <a:fillRef idx="3">
+            <a:schemeClr val="accent1"/>
+          </a:fillRef>
+          <a:effectRef idx="2">
+            <a:schemeClr val="accent1"/>
+          </a:effectRef>
+          <a:fontRef idx="minor">
+            <a:schemeClr val="lt1"/>
+          </a:fontRef>
+        </p:style>
+        <p:txBody>
+          <a:bodyPr rtlCol="0" anchor="ctr"/>
+          <a:lstStyle/>
+          <a:p>
+            <a:pPr algn="ctr"/>
+          </a:p>
+        </p:txBody>
+      </p:sp>
+      <p:sp>
+        <p:nvSpPr>
+          <p:cNvPr id="46" name="07-045-text"/>
+          <p:cNvSpPr txBox="1"/>
+          <p:nvPr/>
+        </p:nvSpPr>
+        <p:spPr>
+          <a:xfrm>
+            <a:off x="5876925" y="3068954"/>
+            <a:ext cx="523875" cy="310515"/>
+          </a:xfrm>
+          <a:prstGeom prst="rect">
+            <a:avLst/>
+          </a:prstGeom>
+          <a:noFill/>
+        </p:spPr>
+        <p:txBody>
+          <a:bodyPr wrap="none" lIns="0" rIns="0" tIns="0" bIns="0" anchor="t">
+            <a:spAutoFit/>
+          </a:bodyPr>
+          <a:lstStyle/>
+          <a:p>
+            <a:pPr algn="ctr">
+              <a:lnSpc>
+                <a:spcPct val="130000"/>
+              </a:lnSpc>
+              <a:spcBef>
+                <a:spcPts val="0"/>
+              </a:spcBef>
+              <a:spcAft>
+                <a:spcPts val="0"/>
+              </a:spcAft>
+              <a:defRPr sz="1650" b="1">
+                <a:solidFill>
+                  <a:srgbClr val="C8531C"/>
+                </a:solidFill>
+                <a:latin typeface="DejaVu Sans"/>
+              </a:defRPr>
+            </a:pPr>
+            <a:r>
+              <a:t>4</a:t>
+            </a:r>
+          </a:p>
+        </p:txBody>
+      </p:sp>
+      <p:sp>
+        <p:nvSpPr>
+          <p:cNvPr id="47" name="07-046-text"/>
+          <p:cNvSpPr txBox="1"/>
+          <p:nvPr/>
+        </p:nvSpPr>
+        <p:spPr>
+          <a:xfrm>
+            <a:off x="6553200" y="3095625"/>
+            <a:ext cx="1066800" cy="260985"/>
+          </a:xfrm>
+          <a:prstGeom prst="rect">
+            <a:avLst/>
+          </a:prstGeom>
+          <a:noFill/>
+        </p:spPr>
+        <p:txBody>
+          <a:bodyPr wrap="none" lIns="0" rIns="0" tIns="0" bIns="0" anchor="t">
+            <a:spAutoFit/>
+          </a:bodyPr>
+          <a:lstStyle/>
+          <a:p>
+            <a:pPr algn="l">
+              <a:lnSpc>
+                <a:spcPct val="130000"/>
+              </a:lnSpc>
+              <a:spcBef>
+                <a:spcPts val="0"/>
+              </a:spcBef>
+              <a:spcAft>
+                <a:spcPts val="0"/>
+              </a:spcAft>
+              <a:defRPr sz="1350" b="1">
+                <a:solidFill>
+                  <a:srgbClr val="C8531C"/>
+                </a:solidFill>
+                <a:latin typeface="DejaVu Sans"/>
+              </a:defRPr>
+            </a:pPr>
+            <a:r>
+              <a:t>← write</a:t>
+            </a:r>
+          </a:p>
+        </p:txBody>
+      </p:sp>
+      <p:sp>
+        <p:nvSpPr>
+          <p:cNvPr id="48" name="07-047-text"/>
+          <p:cNvSpPr txBox="1"/>
+          <p:nvPr/>
+        </p:nvSpPr>
+        <p:spPr>
+          <a:xfrm>
+            <a:off x="4533900" y="3638550"/>
+            <a:ext cx="3114675" cy="248602"/>
+          </a:xfrm>
+          <a:prstGeom prst="rect">
+            <a:avLst/>
+          </a:prstGeom>
+          <a:noFill/>
+        </p:spPr>
+        <p:txBody>
+          <a:bodyPr wrap="none" lIns="0" rIns="0" tIns="0" bIns="0" anchor="t">
+            <a:spAutoFit/>
+          </a:bodyPr>
+          <a:lstStyle/>
+          <a:p>
+            <a:pPr algn="l">
+              <a:lnSpc>
+                <a:spcPct val="130000"/>
+              </a:lnSpc>
+              <a:spcBef>
+                <a:spcPts val="0"/>
+              </a:spcBef>
+              <a:spcAft>
+                <a:spcPts val="0"/>
+              </a:spcAft>
+              <a:defRPr sz="1275" b="0">
+                <a:solidFill>
+                  <a:srgbClr val="546477"/>
+                </a:solidFill>
+                <a:latin typeface="DejaVu Sans"/>
+              </a:defRPr>
+            </a:pPr>
+            <a:r>
+              <a:t>Reuse buffers or write ghost slots.</a:t>
+            </a:r>
+          </a:p>
+        </p:txBody>
+      </p:sp>
+      <p:sp>
+        <p:nvSpPr>
+          <p:cNvPr id="49" name="07-048-text"/>
+          <p:cNvSpPr txBox="1"/>
+          <p:nvPr/>
+        </p:nvSpPr>
+        <p:spPr>
+          <a:xfrm>
+            <a:off x="4533900" y="4191000"/>
+            <a:ext cx="3114675" cy="706755"/>
+          </a:xfrm>
+          <a:prstGeom prst="rect">
+            <a:avLst/>
+          </a:prstGeom>
+          <a:noFill/>
+        </p:spPr>
+        <p:txBody>
+          <a:bodyPr wrap="none" lIns="0" rIns="0" tIns="0" bIns="0" anchor="t">
+            <a:spAutoFit/>
+          </a:bodyPr>
+          <a:lstStyle/>
+          <a:p>
+            <a:pPr algn="l">
+              <a:lnSpc>
+                <a:spcPct val="130000"/>
+              </a:lnSpc>
+              <a:spcBef>
+                <a:spcPts val="0"/>
+              </a:spcBef>
+              <a:spcAft>
+                <a:spcPts val="0"/>
+              </a:spcAft>
+              <a:defRPr sz="1350" b="0">
+                <a:solidFill>
+                  <a:srgbClr val="172638"/>
+                </a:solidFill>
+                <a:latin typeface="DejaVu Sans"/>
+              </a:defRPr>
+            </a:pPr>
+            <a:r>
+              <a:t>Donation consumes the input.</a:t>
+            </a:r>
+          </a:p>
+          <a:p>
+            <a:pPr algn="l">
+              <a:lnSpc>
+                <a:spcPct val="130000"/>
+              </a:lnSpc>
+              <a:spcBef>
+                <a:spcPts val="0"/>
+              </a:spcBef>
+              <a:spcAft>
+                <a:spcPts val="0"/>
+              </a:spcAft>
+              <a:defRPr sz="1350" b="0">
+                <a:solidFill>
+                  <a:srgbClr val="172638"/>
+                </a:solidFill>
+                <a:latin typeface="DejaVu Sans"/>
+              </a:defRPr>
+            </a:pPr>
+            <a:r>
+              <a:t>Refs enable explicit mutation.</a:t>
+            </a:r>
+          </a:p>
+          <a:p>
+            <a:pPr algn="l">
+              <a:lnSpc>
+                <a:spcPct val="130000"/>
+              </a:lnSpc>
+              <a:spcBef>
+                <a:spcPts val="0"/>
+              </a:spcBef>
+              <a:spcAft>
+                <a:spcPts val="0"/>
+              </a:spcAft>
+              <a:defRPr sz="1350" b="0">
+                <a:solidFill>
+                  <a:srgbClr val="172638"/>
+                </a:solidFill>
+                <a:latin typeface="DejaVu Sans"/>
+              </a:defRPr>
+            </a:pPr>
+            <a:r>
+              <a:t>Measure memory + dispatch cost.</a:t>
+            </a:r>
+          </a:p>
+        </p:txBody>
+      </p:sp>
+      <p:sp>
+        <p:nvSpPr>
+          <p:cNvPr id="50" name="07-049-text"/>
+          <p:cNvSpPr txBox="1"/>
+          <p:nvPr/>
+        </p:nvSpPr>
+        <p:spPr>
+          <a:xfrm>
+            <a:off x="8353425" y="2371725"/>
+            <a:ext cx="3114675" cy="285750"/>
+          </a:xfrm>
+          <a:prstGeom prst="rect">
+            <a:avLst/>
+          </a:prstGeom>
+          <a:noFill/>
+        </p:spPr>
+        <p:txBody>
+          <a:bodyPr wrap="none" lIns="0" rIns="0" tIns="0" bIns="0" anchor="t">
+            <a:spAutoFit/>
+          </a:bodyPr>
+          <a:lstStyle/>
+          <a:p>
+            <a:pPr algn="l">
+              <a:lnSpc>
+                <a:spcPct val="130000"/>
+              </a:lnSpc>
+              <a:spcBef>
+                <a:spcPts val="0"/>
+              </a:spcBef>
+              <a:spcAft>
+                <a:spcPts val="0"/>
+              </a:spcAft>
+              <a:defRPr sz="1500" b="0">
+                <a:solidFill>
+                  <a:srgbClr val="C8531C"/>
+                </a:solidFill>
+                <a:latin typeface="DejaVu Sans Mono"/>
+              </a:defRPr>
+            </a:pPr>
+            <a:r>
+              <a:t>lax.psend / lax.precv</a:t>
+            </a:r>
+          </a:p>
+        </p:txBody>
+      </p:sp>
+      <p:sp>
+        <p:nvSpPr>
+          <p:cNvPr id="51" name="07-050-text"/>
+          <p:cNvSpPr txBox="1"/>
+          <p:nvPr/>
+        </p:nvSpPr>
+        <p:spPr>
+          <a:xfrm>
+            <a:off x="8353425" y="2800350"/>
+            <a:ext cx="3114675" cy="236220"/>
+          </a:xfrm>
+          <a:prstGeom prst="rect">
+            <a:avLst/>
+          </a:prstGeom>
+          <a:noFill/>
+        </p:spPr>
+        <p:txBody>
+          <a:bodyPr wrap="none" lIns="0" rIns="0" tIns="0" bIns="0" anchor="t">
+            <a:spAutoFit/>
+          </a:bodyPr>
+          <a:lstStyle/>
+          <a:p>
+            <a:pPr algn="l">
+              <a:lnSpc>
+                <a:spcPct val="130000"/>
+              </a:lnSpc>
+              <a:spcBef>
+                <a:spcPts val="0"/>
+              </a:spcBef>
+              <a:spcAft>
+                <a:spcPts val="0"/>
+              </a:spcAft>
+              <a:defRPr sz="1200" b="0">
+                <a:solidFill>
+                  <a:srgbClr val="546477"/>
+                </a:solidFill>
+                <a:latin typeface="DejaVu Sans"/>
+              </a:defRPr>
+            </a:pPr>
+            <a:r>
+              <a:t>Target schedule — verify in a trace</a:t>
+            </a:r>
+          </a:p>
+        </p:txBody>
+      </p:sp>
+      <p:sp>
+        <p:nvSpPr>
+          <p:cNvPr id="52" name="07-051-rect"/>
+          <p:cNvSpPr/>
+          <p:nvPr/>
+        </p:nvSpPr>
+        <p:spPr>
+          <a:xfrm>
+            <a:off x="8353425" y="3114675"/>
+            <a:ext cx="2238375" cy="266700"/>
+          </a:xfrm>
+          <a:prstGeom prst="roundRect">
+            <a:avLst>
+              <a:gd name="adj" fmla="val 14285"/>
+            </a:avLst>
+          </a:prstGeom>
+          <a:solidFill>
+            <a:srgbClr val="C8531C"/>
+          </a:solidFill>
+          <a:ln>
+            <a:noFill/>
+          </a:ln>
+        </p:spPr>
+        <p:style>
+          <a:lnRef idx="1">
+            <a:schemeClr val="accent1"/>
+          </a:lnRef>
+          <a:fillRef idx="3">
+            <a:schemeClr val="accent1"/>
+          </a:fillRef>
+          <a:effectRef idx="2">
+            <a:schemeClr val="accent1"/>
+          </a:effectRef>
+          <a:fontRef idx="minor">
+            <a:schemeClr val="lt1"/>
+          </a:fontRef>
+        </p:style>
+        <p:txBody>
+          <a:bodyPr rtlCol="0" anchor="ctr"/>
+          <a:lstStyle/>
+          <a:p>
+            <a:pPr algn="ctr"/>
+          </a:p>
+        </p:txBody>
+      </p:sp>
+      <p:sp>
+        <p:nvSpPr>
+          <p:cNvPr id="53" name="07-052-text"/>
+          <p:cNvSpPr txBox="1"/>
+          <p:nvPr/>
+        </p:nvSpPr>
+        <p:spPr>
+          <a:xfrm>
+            <a:off x="8429625" y="3152775"/>
+            <a:ext cx="2057400" cy="211454"/>
+          </a:xfrm>
+          <a:prstGeom prst="rect">
+            <a:avLst/>
+          </a:prstGeom>
+          <a:noFill/>
+        </p:spPr>
+        <p:txBody>
+          <a:bodyPr wrap="none" lIns="0" rIns="0" tIns="0" bIns="0" anchor="t">
+            <a:spAutoFit/>
+          </a:bodyPr>
+          <a:lstStyle/>
+          <a:p>
+            <a:pPr algn="ctr">
+              <a:lnSpc>
+                <a:spcPct val="130000"/>
+              </a:lnSpc>
+              <a:spcBef>
+                <a:spcPts val="0"/>
+              </a:spcBef>
+              <a:spcAft>
+                <a:spcPts val="0"/>
+              </a:spcAft>
+              <a:defRPr sz="1050" b="1">
+                <a:solidFill>
+                  <a:srgbClr val="FFFFFF"/>
+                </a:solidFill>
+                <a:latin typeface="DejaVu Sans"/>
+              </a:defRPr>
+            </a:pPr>
+            <a:r>
+              <a:t>communicate ghost values</a:t>
+            </a:r>
+          </a:p>
+        </p:txBody>
+      </p:sp>
+      <p:sp>
+        <p:nvSpPr>
+          <p:cNvPr id="54" name="07-053-rect"/>
+          <p:cNvSpPr/>
+          <p:nvPr/>
+        </p:nvSpPr>
+        <p:spPr>
+          <a:xfrm>
+            <a:off x="8353425" y="3524250"/>
+            <a:ext cx="1828800" cy="266700"/>
+          </a:xfrm>
+          <a:prstGeom prst="roundRect">
+            <a:avLst>
+              <a:gd name="adj" fmla="val 14285"/>
+            </a:avLst>
+          </a:prstGeom>
+          <a:solidFill>
+            <a:srgbClr val="2463C9"/>
+          </a:solidFill>
+          <a:ln>
+            <a:noFill/>
+          </a:ln>
+        </p:spPr>
+        <p:style>
+          <a:lnRef idx="1">
+            <a:schemeClr val="accent1"/>
+          </a:lnRef>
+          <a:fillRef idx="3">
+            <a:schemeClr val="accent1"/>
+          </a:fillRef>
+          <a:effectRef idx="2">
+            <a:schemeClr val="accent1"/>
+          </a:effectRef>
+          <a:fontRef idx="minor">
+            <a:schemeClr val="lt1"/>
+          </a:fontRef>
+        </p:style>
+        <p:txBody>
+          <a:bodyPr rtlCol="0" anchor="ctr"/>
+          <a:lstStyle/>
+          <a:p>
+            <a:pPr algn="ctr"/>
+          </a:p>
+        </p:txBody>
+      </p:sp>
+      <p:sp>
+        <p:nvSpPr>
+          <p:cNvPr id="55" name="07-054-text"/>
+          <p:cNvSpPr txBox="1"/>
+          <p:nvPr/>
+        </p:nvSpPr>
+        <p:spPr>
+          <a:xfrm>
+            <a:off x="8420100" y="3562350"/>
+            <a:ext cx="1685925" cy="211454"/>
+          </a:xfrm>
+          <a:prstGeom prst="rect">
+            <a:avLst/>
+          </a:prstGeom>
+          <a:noFill/>
+        </p:spPr>
+        <p:txBody>
+          <a:bodyPr wrap="none" lIns="0" rIns="0" tIns="0" bIns="0" anchor="t">
+            <a:spAutoFit/>
+          </a:bodyPr>
+          <a:lstStyle/>
+          <a:p>
+            <a:pPr algn="ctr">
+              <a:lnSpc>
+                <a:spcPct val="130000"/>
+              </a:lnSpc>
+              <a:spcBef>
+                <a:spcPts val="0"/>
+              </a:spcBef>
+              <a:spcAft>
+                <a:spcPts val="0"/>
+              </a:spcAft>
+              <a:defRPr sz="1050" b="1">
+                <a:solidFill>
+                  <a:srgbClr val="FFFFFF"/>
+                </a:solidFill>
+                <a:latin typeface="DejaVu Sans"/>
+              </a:defRPr>
+            </a:pPr>
+            <a:r>
+              <a:t>owned-column part</a:t>
+            </a:r>
+          </a:p>
+        </p:txBody>
+      </p:sp>
+      <p:sp>
+        <p:nvSpPr>
+          <p:cNvPr id="56" name="07-055-rect"/>
+          <p:cNvSpPr/>
+          <p:nvPr/>
+        </p:nvSpPr>
+        <p:spPr>
+          <a:xfrm>
+            <a:off x="10658475" y="3524250"/>
+            <a:ext cx="800100" cy="266700"/>
+          </a:xfrm>
+          <a:prstGeom prst="roundRect">
+            <a:avLst>
+              <a:gd name="adj" fmla="val 14285"/>
+            </a:avLst>
+          </a:prstGeom>
+          <a:solidFill>
+            <a:srgbClr val="C8531C"/>
+          </a:solidFill>
+          <a:ln>
+            <a:noFill/>
+          </a:ln>
+        </p:spPr>
+        <p:style>
+          <a:lnRef idx="1">
+            <a:schemeClr val="accent1"/>
+          </a:lnRef>
+          <a:fillRef idx="3">
+            <a:schemeClr val="accent1"/>
+          </a:fillRef>
+          <a:effectRef idx="2">
+            <a:schemeClr val="accent1"/>
+          </a:effectRef>
+          <a:fontRef idx="minor">
+            <a:schemeClr val="lt1"/>
+          </a:fontRef>
+        </p:style>
+        <p:txBody>
+          <a:bodyPr rtlCol="0" anchor="ctr"/>
+          <a:lstStyle/>
+          <a:p>
+            <a:pPr algn="ctr"/>
+          </a:p>
+        </p:txBody>
+      </p:sp>
+      <p:sp>
+        <p:nvSpPr>
+          <p:cNvPr id="57" name="07-056-text"/>
+          <p:cNvSpPr txBox="1"/>
+          <p:nvPr/>
+        </p:nvSpPr>
+        <p:spPr>
+          <a:xfrm>
+            <a:off x="10696575" y="3562350"/>
+            <a:ext cx="723900" cy="211454"/>
+          </a:xfrm>
+          <a:prstGeom prst="rect">
+            <a:avLst/>
+          </a:prstGeom>
+          <a:noFill/>
+        </p:spPr>
+        <p:txBody>
+          <a:bodyPr wrap="none" lIns="0" rIns="0" tIns="0" bIns="0" anchor="t">
+            <a:spAutoFit/>
+          </a:bodyPr>
+          <a:lstStyle/>
+          <a:p>
+            <a:pPr algn="ctr">
+              <a:lnSpc>
+                <a:spcPct val="130000"/>
+              </a:lnSpc>
+              <a:spcBef>
+                <a:spcPts val="0"/>
+              </a:spcBef>
+              <a:spcAft>
+                <a:spcPts val="0"/>
+              </a:spcAft>
+              <a:defRPr sz="1050" b="1">
+                <a:solidFill>
+                  <a:srgbClr val="FFFFFF"/>
+                </a:solidFill>
+                <a:latin typeface="DejaVu Sans"/>
+              </a:defRPr>
+            </a:pPr>
+            <a:r>
+              <a:t>ghosts</a:t>
+            </a:r>
+          </a:p>
+        </p:txBody>
+      </p:sp>
+      <p:sp>
+        <p:nvSpPr>
+          <p:cNvPr id="58" name="07-057-line"/>
+          <p:cNvSpPr/>
+          <p:nvPr/>
+        </p:nvSpPr>
+        <p:spPr>
+          <a:xfrm>
+            <a:off x="10591800" y="3248025"/>
+            <a:ext cx="133350" cy="238125"/>
+          </a:xfrm>
+          <a:custGeom>
+            <a:avLst/>
+            <a:gdLst/>
+            <a:ahLst/>
+            <a:cxnLst/>
+            <a:rect l="l" t="t" r="r" b="b"/>
+            <a:pathLst>
+              <a:path w="14" h="25">
+                <a:moveTo>
+                  <a:pt x="0" y="0"/>
+                </a:moveTo>
+                <a:lnTo>
+                  <a:pt x="14" y="25"/>
+                </a:lnTo>
+              </a:path>
+            </a:pathLst>
+          </a:custGeom>
+          <a:noFill/>
+          <a:ln w="14287">
+            <a:solidFill>
+              <a:srgbClr val="C8531C"/>
+            </a:solidFill>
+          </a:ln>
+        </p:spPr>
+        <p:style>
+          <a:lnRef idx="1">
+            <a:schemeClr val="accent1"/>
+          </a:lnRef>
+          <a:fillRef idx="3">
+            <a:schemeClr val="accent1"/>
+          </a:fillRef>
+          <a:effectRef idx="2">
+            <a:schemeClr val="accent1"/>
+          </a:effectRef>
+          <a:fontRef idx="minor">
+            <a:schemeClr val="lt1"/>
+          </a:fontRef>
+        </p:style>
+        <p:txBody>
+          <a:bodyPr rtlCol="0" anchor="ctr"/>
+          <a:lstStyle/>
+          <a:p>
+            <a:pPr algn="ctr"/>
+          </a:p>
+        </p:txBody>
+      </p:sp>
+      <p:sp>
+        <p:nvSpPr>
+          <p:cNvPr id="59" name="07-058-poly"/>
+          <p:cNvSpPr/>
+          <p:nvPr/>
+        </p:nvSpPr>
+        <p:spPr>
+          <a:xfrm>
+            <a:off x="10677525" y="3419475"/>
+            <a:ext cx="47625" cy="66675"/>
+          </a:xfrm>
+          <a:custGeom>
+            <a:avLst/>
+            <a:gdLst/>
+            <a:ahLst/>
+            <a:cxnLst/>
+            <a:rect l="l" t="t" r="r" b="b"/>
+            <a:pathLst>
+              <a:path w="5" h="7">
+                <a:moveTo>
+                  <a:pt x="5" y="7"/>
+                </a:moveTo>
+                <a:lnTo>
+                  <a:pt x="5" y="0"/>
+                </a:lnTo>
+                <a:lnTo>
+                  <a:pt x="0" y="3"/>
+                </a:lnTo>
+                <a:close/>
+              </a:path>
+            </a:pathLst>
+          </a:custGeom>
+          <a:solidFill>
+            <a:srgbClr val="C8531C"/>
+          </a:solidFill>
+          <a:ln>
+            <a:noFill/>
+          </a:ln>
+        </p:spPr>
+        <p:style>
+          <a:lnRef idx="1">
+            <a:schemeClr val="accent1"/>
+          </a:lnRef>
+          <a:fillRef idx="3">
+            <a:schemeClr val="accent1"/>
+          </a:fillRef>
+          <a:effectRef idx="2">
+            <a:schemeClr val="accent1"/>
+          </a:effectRef>
+          <a:fontRef idx="minor">
+            <a:schemeClr val="lt1"/>
+          </a:fontRef>
+        </p:style>
+        <p:txBody>
+          <a:bodyPr rtlCol="0" anchor="ctr"/>
+          <a:lstStyle/>
+          <a:p>
+            <a:pPr algn="ctr"/>
+          </a:p>
+        </p:txBody>
+      </p:sp>
+      <p:sp>
+        <p:nvSpPr>
+          <p:cNvPr id="60" name="07-059-text"/>
+          <p:cNvSpPr txBox="1"/>
+          <p:nvPr/>
+        </p:nvSpPr>
+        <p:spPr>
+          <a:xfrm>
+            <a:off x="8353425" y="4191000"/>
+            <a:ext cx="3114675" cy="706755"/>
+          </a:xfrm>
+          <a:prstGeom prst="rect">
+            <a:avLst/>
+          </a:prstGeom>
+          <a:noFill/>
+        </p:spPr>
+        <p:txBody>
+          <a:bodyPr wrap="none" lIns="0" rIns="0" tIns="0" bIns="0" anchor="t">
+            <a:spAutoFit/>
+          </a:bodyPr>
+          <a:lstStyle/>
+          <a:p>
+            <a:pPr algn="l">
+              <a:lnSpc>
+                <a:spcPct val="130000"/>
+              </a:lnSpc>
+              <a:spcBef>
+                <a:spcPts val="0"/>
+              </a:spcBef>
+              <a:spcAft>
+                <a:spcPts val="0"/>
+              </a:spcAft>
+              <a:defRPr sz="1350" b="0">
+                <a:solidFill>
+                  <a:srgbClr val="172638"/>
+                </a:solidFill>
+                <a:latin typeface="DejaVu Sans"/>
+              </a:defRPr>
+            </a:pPr>
+            <a:r>
+              <a:t>Split owned / ghost-column work.</a:t>
+            </a:r>
+          </a:p>
+          <a:p>
+            <a:pPr algn="l">
+              <a:lnSpc>
+                <a:spcPct val="130000"/>
+              </a:lnSpc>
+              <a:spcBef>
+                <a:spcPts val="0"/>
+              </a:spcBef>
+              <a:spcAft>
+                <a:spcPts val="0"/>
+              </a:spcAft>
+              <a:defRPr sz="1350" b="0">
+                <a:solidFill>
+                  <a:srgbClr val="172638"/>
+                </a:solidFill>
+                <a:latin typeface="DejaVu Sans"/>
+              </a:defRPr>
+            </a:pPr>
+            <a:r>
+              <a:t>Test scheduling and GPU progress.</a:t>
+            </a:r>
+          </a:p>
+          <a:p>
+            <a:pPr algn="l">
+              <a:lnSpc>
+                <a:spcPct val="130000"/>
+              </a:lnSpc>
+              <a:spcBef>
+                <a:spcPts val="0"/>
+              </a:spcBef>
+              <a:spcAft>
+                <a:spcPts val="0"/>
+              </a:spcAft>
+              <a:defRPr sz="1350" b="0">
+                <a:solidFill>
+                  <a:srgbClr val="172638"/>
+                </a:solidFill>
+                <a:latin typeface="DejaVu Sans"/>
+              </a:defRPr>
+            </a:pPr>
+            <a:r>
+              <a:t>MPI-style overlap is not automatic.</a:t>
+            </a:r>
+          </a:p>
+        </p:txBody>
+      </p:sp>
+      <p:sp>
+        <p:nvSpPr>
+          <p:cNvPr id="61" name="07-060-text"/>
+          <p:cNvSpPr txBox="1"/>
+          <p:nvPr/>
+        </p:nvSpPr>
+        <p:spPr>
+          <a:xfrm>
+            <a:off x="542925" y="5219700"/>
+            <a:ext cx="11096625" cy="273367"/>
+          </a:xfrm>
+          <a:prstGeom prst="rect">
+            <a:avLst/>
+          </a:prstGeom>
+          <a:noFill/>
+        </p:spPr>
+        <p:txBody>
+          <a:bodyPr wrap="none" lIns="0" rIns="0" tIns="0" bIns="0" anchor="t">
+            <a:spAutoFit/>
+          </a:bodyPr>
+          <a:lstStyle/>
+          <a:p>
+            <a:pPr algn="l">
+              <a:lnSpc>
+                <a:spcPct val="130000"/>
+              </a:lnSpc>
+              <a:spcBef>
+                <a:spcPts val="0"/>
+              </a:spcBef>
+              <a:spcAft>
+                <a:spcPts val="0"/>
+              </a:spcAft>
+              <a:defRPr sz="1425" b="0">
+                <a:solidFill>
+                  <a:srgbClr val="546477"/>
+                </a:solidFill>
+                <a:latin typeface="DejaVu Sans"/>
+              </a:defRPr>
+            </a:pPr>
+            <a:r>
+              <a:t>Also profile local CSR alternatives; consider Pallas fusion only for a measured kernel bottleneck.</a:t>
+            </a:r>
+          </a:p>
+        </p:txBody>
+      </p:sp>
+      <p:sp>
+        <p:nvSpPr>
+          <p:cNvPr id="62" name="07-061-rect"/>
+          <p:cNvSpPr/>
+          <p:nvPr/>
+        </p:nvSpPr>
+        <p:spPr>
+          <a:xfrm>
+            <a:off x="533400" y="5753100"/>
+            <a:ext cx="11125200" cy="542925"/>
+          </a:xfrm>
+          <a:prstGeom prst="roundRect">
+            <a:avLst>
+              <a:gd name="adj" fmla="val 14035"/>
+            </a:avLst>
+          </a:prstGeom>
+          <a:solidFill>
+            <a:srgbClr val="EDF8F5"/>
+          </a:solidFill>
+          <a:ln>
+            <a:noFill/>
+          </a:ln>
+        </p:spPr>
+        <p:style>
+          <a:lnRef idx="1">
+            <a:schemeClr val="accent1"/>
+          </a:lnRef>
+          <a:fillRef idx="3">
+            <a:schemeClr val="accent1"/>
+          </a:fillRef>
+          <a:effectRef idx="2">
+            <a:schemeClr val="accent1"/>
+          </a:effectRef>
+          <a:fontRef idx="minor">
+            <a:schemeClr val="lt1"/>
+          </a:fontRef>
+        </p:style>
+        <p:txBody>
+          <a:bodyPr rtlCol="0" anchor="ctr"/>
+          <a:lstStyle/>
+          <a:p>
+            <a:pPr algn="ctr"/>
+          </a:p>
+        </p:txBody>
+      </p:sp>
+      <p:sp>
+        <p:nvSpPr>
+          <p:cNvPr id="63" name="07-062-rect"/>
+          <p:cNvSpPr/>
+          <p:nvPr/>
+        </p:nvSpPr>
+        <p:spPr>
+          <a:xfrm>
+            <a:off x="533400" y="5753100"/>
+            <a:ext cx="47625" cy="542925"/>
+          </a:xfrm>
+          <a:prstGeom prst="rect">
+            <a:avLst/>
+          </a:prstGeom>
+          <a:solidFill>
+            <a:srgbClr val="087D70"/>
+          </a:solidFill>
+          <a:ln>
+            <a:noFill/>
+          </a:ln>
+        </p:spPr>
+        <p:style>
+          <a:lnRef idx="1">
+            <a:schemeClr val="accent1"/>
+          </a:lnRef>
+          <a:fillRef idx="3">
+            <a:schemeClr val="accent1"/>
+          </a:fillRef>
+          <a:effectRef idx="2">
+            <a:schemeClr val="accent1"/>
+          </a:effectRef>
+          <a:fontRef idx="minor">
+            <a:schemeClr val="lt1"/>
+          </a:fontRef>
+        </p:style>
+        <p:txBody>
+          <a:bodyPr rtlCol="0" anchor="ctr"/>
+          <a:lstStyle/>
+          <a:p>
+            <a:pPr algn="ctr"/>
+          </a:p>
+        </p:txBody>
+      </p:sp>
+      <p:sp>
+        <p:nvSpPr>
+          <p:cNvPr id="64" name="07-063-text"/>
+          <p:cNvSpPr txBox="1"/>
+          <p:nvPr/>
+        </p:nvSpPr>
+        <p:spPr>
+          <a:xfrm>
+            <a:off x="723900" y="5800725"/>
+            <a:ext cx="10668000" cy="298132"/>
+          </a:xfrm>
+          <a:prstGeom prst="rect">
+            <a:avLst/>
+          </a:prstGeom>
+          <a:noFill/>
+        </p:spPr>
+        <p:txBody>
+          <a:bodyPr wrap="none" lIns="0" rIns="0" tIns="0" bIns="0" anchor="t">
+            <a:spAutoFit/>
+          </a:bodyPr>
+          <a:lstStyle/>
+          <a:p>
+            <a:pPr algn="l">
+              <a:lnSpc>
+                <a:spcPct val="130000"/>
+              </a:lnSpc>
+              <a:spcBef>
+                <a:spcPts val="0"/>
+              </a:spcBef>
+              <a:spcAft>
+                <a:spcPts val="0"/>
+              </a:spcAft>
+              <a:defRPr sz="1575" b="1">
+                <a:solidFill>
+                  <a:srgbClr val="087D70"/>
+                </a:solidFill>
+                <a:latin typeface="DejaVu Sans"/>
+              </a:defRPr>
+            </a:pPr>
+            <a:r>
+              <a:t>First test storage reuse and ragged exchange; measure end-to-end matvec before choosing.</a:t>
+            </a:r>
+          </a:p>
+        </p:txBody>
+      </p:sp>
+      <p:sp>
+        <p:nvSpPr>
+          <p:cNvPr id="65" name="07-064-text"/>
+          <p:cNvSpPr txBox="1"/>
+          <p:nvPr/>
+        </p:nvSpPr>
+        <p:spPr>
+          <a:xfrm>
+            <a:off x="723900" y="6067425"/>
+            <a:ext cx="10668000" cy="211454"/>
+          </a:xfrm>
+          <a:prstGeom prst="rect">
+            <a:avLst/>
+          </a:prstGeom>
+          <a:noFill/>
+        </p:spPr>
+        <p:txBody>
+          <a:bodyPr wrap="none" lIns="0" rIns="0" tIns="0" bIns="0" anchor="t">
+            <a:spAutoFit/>
+          </a:bodyPr>
+          <a:lstStyle/>
+          <a:p>
+            <a:pPr algn="l">
+              <a:lnSpc>
+                <a:spcPct val="130000"/>
+              </a:lnSpc>
+              <a:spcBef>
+                <a:spcPts val="0"/>
+              </a:spcBef>
+              <a:spcAft>
+                <a:spcPts val="0"/>
+              </a:spcAft>
+              <a:defRPr sz="1050" b="0">
+                <a:solidFill>
+                  <a:srgbClr val="546477"/>
+                </a:solidFill>
+                <a:latin typeface="DejaVu Sans"/>
+              </a:defRPr>
+            </a:pPr>
+            <a:r>
+              <a:t>Optimization candidates, not measured speedups. Verify GPU execution, numerical results and required JAX transforms.</a:t>
             </a:r>
           </a:p>
         </p:txBody>
